--- a/docs/manual-company.pptx
+++ b/docs/manual-company.pptx
@@ -22,9 +22,10 @@
     <p:sldId id="270" r:id="rId16"/>
     <p:sldId id="271" r:id="rId17"/>
     <p:sldId id="272" r:id="rId18"/>
+    <p:sldId id="273" r:id="rId19"/>
   </p:sldIdLst>
   <p:notesMasterIdLst>
-    <p:notesMasterId r:id="rId19"/>
+    <p:notesMasterId r:id="rId20"/>
   </p:notesMasterIdLst>
   <p:sldSz cx="12192000" cy="6858000"/>
   <p:notesSz cx="6858000" cy="12192000"/>
@@ -606,7 +607,7 @@
           <a:p>
             <a:r>
               <a:rPr lang="en-US" dirty="0"/>
-              <a:t>追い越された方には「キャンセル待ち 1 番目」と表示されたままです。</a:t>
+              <a:t>付き添いを含めない設定のとき、付き添いは定員を消費しません。来場人数で会場の収容を確認してください。</a:t>
             </a:r>
             <a:endParaRPr lang="en-US" dirty="0"/>
           </a:p>
@@ -694,7 +695,7 @@
           <a:p>
             <a:r>
               <a:rPr lang="en-US" dirty="0"/>
-              <a:t>E（別の回へ振り替え）も同じ注意が要ります。振替先に他にお待ちの方がいないか先に確認してください。</a:t>
+              <a:t>追い越された方には「キャンセル待ち 1 番目」と表示されたままです。</a:t>
             </a:r>
             <a:endParaRPr lang="en-US" dirty="0"/>
           </a:p>
@@ -782,7 +783,7 @@
           <a:p>
             <a:r>
               <a:rPr lang="en-US" dirty="0"/>
-              <a:t>人数の大きい方を先に試すのが原則。上から順に押せば自然とそうなります。</a:t>
+              <a:t>E（別の回へ振り替え）も同じ注意が要ります。振替先に他にお待ちの方がいないか先に確認してください。</a:t>
             </a:r>
             <a:endParaRPr lang="en-US" dirty="0"/>
           </a:p>
@@ -870,7 +871,7 @@
           <a:p>
             <a:r>
               <a:rPr lang="en-US" dirty="0"/>
-              <a:t>メッセージにどの予約と重なっているかが出ます。</a:t>
+              <a:t>人数の大きい方を先に試すのが原則。上から順に押せば自然とそうなります。</a:t>
             </a:r>
             <a:endParaRPr lang="en-US" dirty="0"/>
           </a:p>
@@ -958,7 +959,7 @@
           <a:p>
             <a:r>
               <a:rPr lang="en-US" dirty="0"/>
-              <a:t>キャンセル済みの方には送りません。同じアドレスは何件予約していても1通です。</a:t>
+              <a:t>メッセージにどの予約と重なっているかが出ます。</a:t>
             </a:r>
             <a:endParaRPr lang="en-US" dirty="0"/>
           </a:p>
@@ -1046,7 +1047,7 @@
           <a:p>
             <a:r>
               <a:rPr lang="en-US" dirty="0"/>
-              <a:t>送信完了まで数分かかることがあります。急ぐ場合や届かない問い合わせは事務局へ。</a:t>
+              <a:t>キャンセル済みの方には送りません。同じアドレスは何件予約していても1通です。</a:t>
             </a:r>
             <a:endParaRPr lang="en-US" dirty="0"/>
           </a:p>
@@ -1134,7 +1135,7 @@
           <a:p>
             <a:r>
               <a:rPr lang="en-US" dirty="0"/>
-              <a:t>毎日ダッシュボードを見るのがいちばん確実です。</a:t>
+              <a:t>送信完了まで数分かかることがあります。急ぐ場合や届かない問い合わせは事務局へ。</a:t>
             </a:r>
             <a:endParaRPr lang="en-US" dirty="0"/>
           </a:p>
@@ -1222,7 +1223,7 @@
           <a:p>
             <a:r>
               <a:rPr lang="en-US" dirty="0"/>
-              <a:t/>
+              <a:t>毎日ダッシュボードを見るのがいちばん確実です。</a:t>
             </a:r>
             <a:endParaRPr lang="en-US" dirty="0"/>
           </a:p>
@@ -1246,6 +1247,94 @@
             <a:fld id="{F7021451-1387-4CA6-816F-3879F97B5CBC}" type="slidenum">
               <a:rPr lang="en-US"/>
               <a:t>17</a:t>
+            </a:fld>
+            <a:endParaRPr lang="en-US"/>
+          </a:p>
+        </p:txBody>
+      </p:sp>
+    </p:spTree>
+    <p:extLst>
+      <p:ext uri="{BB962C8B-B14F-4D97-AF65-F5344CB8AC3E}">
+        <p14:creationId xmlns:p14="http://schemas.microsoft.com/office/powerpoint/2010/main" val="1024086991"/>
+      </p:ext>
+    </p:extLst>
+  </p:cSld>
+  <p:clrMapOvr>
+    <a:masterClrMapping/>
+  </p:clrMapOvr>
+</p:notes>
+</file>
+
+<file path=ppt/notesSlides/notesSlide18.xml><?xml version="1.0" encoding="utf-8"?>
+<p:notes xmlns:a="http://schemas.openxmlformats.org/drawingml/2006/main" xmlns:r="http://schemas.openxmlformats.org/officeDocument/2006/relationships" xmlns:p="http://schemas.openxmlformats.org/presentationml/2006/main">
+  <p:cSld>
+    <p:spTree>
+      <p:nvGrpSpPr>
+        <p:cNvPr id="1" name=""/>
+        <p:cNvGrpSpPr/>
+        <p:nvPr/>
+      </p:nvGrpSpPr>
+      <p:grpSpPr>
+        <a:xfrm>
+          <a:off x="0" y="0"/>
+          <a:ext cx="0" cy="0"/>
+          <a:chOff x="0" y="0"/>
+          <a:chExt cx="0" cy="0"/>
+        </a:xfrm>
+      </p:grpSpPr>
+      <p:sp>
+        <p:nvSpPr>
+          <p:cNvPr id="2" name="Slide Image Placeholder 1"/>
+          <p:cNvSpPr>
+            <a:spLocks noGrp="1" noRot="1" noChangeAspect="1"/>
+          </p:cNvSpPr>
+          <p:nvPr>
+            <p:ph type="sldImg"/>
+          </p:nvPr>
+        </p:nvSpPr>
+        <p:spPr/>
+      </p:sp>
+      <p:sp>
+        <p:nvSpPr>
+          <p:cNvPr id="3" name="Notes Placeholder 2"/>
+          <p:cNvSpPr>
+            <a:spLocks noGrp="1"/>
+          </p:cNvSpPr>
+          <p:nvPr>
+            <p:ph type="body" idx="1"/>
+          </p:nvPr>
+        </p:nvSpPr>
+        <p:spPr/>
+        <p:txBody>
+          <a:bodyPr/>
+          <a:lstStyle/>
+          <a:p>
+            <a:r>
+              <a:rPr lang="en-US" dirty="0"/>
+              <a:t/>
+            </a:r>
+            <a:endParaRPr lang="en-US" dirty="0"/>
+          </a:p>
+        </p:txBody>
+      </p:sp>
+      <p:sp>
+        <p:nvSpPr>
+          <p:cNvPr id="4" name="Slide Number Placeholder 3"/>
+          <p:cNvSpPr>
+            <a:spLocks noGrp="1"/>
+          </p:cNvSpPr>
+          <p:nvPr>
+            <p:ph type="sldNum" sz="quarter" idx="10"/>
+          </p:nvPr>
+        </p:nvSpPr>
+        <p:spPr/>
+        <p:txBody>
+          <a:bodyPr/>
+          <a:lstStyle/>
+          <a:p>
+            <a:fld id="{F7021451-1387-4CA6-816F-3879F97B5CBC}" type="slidenum">
+              <a:rPr lang="en-US"/>
+              <a:t>18</a:t>
             </a:fld>
             <a:endParaRPr lang="en-US"/>
           </a:p>
@@ -1750,7 +1839,7 @@
           <a:p>
             <a:r>
               <a:rPr lang="en-US" dirty="0"/>
-              <a:t>エラーメッセージには、その予約の人数と現在の空きが出ます。</a:t>
+              <a:t>オレンジは、その方が他社を申し込んだ時点ではこの回がキャンセル待ちだったために起きます。繰り上げると両方が確定します。</a:t>
             </a:r>
             <a:endParaRPr lang="en-US" dirty="0"/>
           </a:p>
@@ -1838,7 +1927,7 @@
           <a:p>
             <a:r>
               <a:rPr lang="en-US" dirty="0"/>
-              <a:t>A が原則。前日になっても埋まらないときに B〜E を検討します。</a:t>
+              <a:t>エラーメッセージには、その予約の人数と現在の空きが出ます。</a:t>
             </a:r>
             <a:endParaRPr lang="en-US" dirty="0"/>
           </a:p>
@@ -1926,7 +2015,7 @@
           <a:p>
             <a:r>
               <a:rPr lang="en-US" dirty="0"/>
-              <a:t>付き添いを含めない設定のとき、付き添いは定員を消費しません。来場人数で会場の収容を確認してください。</a:t>
+              <a:t>A が原則。前日になっても埋まらないときに B〜E を検討します。</a:t>
             </a:r>
             <a:endParaRPr lang="en-US" dirty="0"/>
           </a:p>
@@ -2684,7 +2773,7 @@
                 <a:ea typeface="Meiryo" pitchFamily="34" charset="-122"/>
                 <a:cs typeface="Meiryo" pitchFamily="34" charset="-120"/>
               </a:rPr>
-              <a:t>手立て C ： 順番の追い越し</a:t>
+              <a:t>手立て B ： 定員を増やす</a:t>
             </a:r>
             <a:endParaRPr lang="en-US" sz="2800" dirty="0"/>
           </a:p>
@@ -2723,7 +2812,7 @@
                 <a:ea typeface="Meiryo" pitchFamily="34" charset="-122"/>
                 <a:cs typeface="Meiryo" pitchFamily="34" charset="-120"/>
               </a:rPr>
-              <a:t>空席を埋められますが、運用上の判断が必要です</a:t>
+              <a:t>「体験内容」→ 開催回 → 編集 → 定員（人数）</a:t>
             </a:r>
             <a:endParaRPr lang="en-US" sz="1400" dirty="0"/>
           </a:p>
@@ -2731,7 +2820,7 @@
       </p:sp>
       <p:pic>
         <p:nvPicPr>
-          <p:cNvPr id="8" name="Image 0" descr="C:\Users\sato\AppData\Local\Temp\claude\c--Users-sato-Desktop---3---3\c0abf194-6a09-42ac-bc16-2cd244740c64\scratchpad\deck\img\d2-overtake.png">    </p:cNvPr>
+          <p:cNvPr id="8" name="Image 0" descr="C:\Users\sato\AppData\Local\Temp\claude\c--Users-sato-Desktop---3---3\c0abf194-6a09-42ac-bc16-2cd244740c64\scratchpad\deck\img\c-capacity.png">    </p:cNvPr>
           <p:cNvPicPr>
             <a:picLocks noChangeAspect="1"/>
           </p:cNvPicPr>
@@ -2745,8 +2834,8 @@
         </p:blipFill>
         <p:spPr>
           <a:xfrm>
-            <a:off x="1325757" y="1325880"/>
-            <a:ext cx="9540181" cy="3977640"/>
+            <a:off x="640080" y="1325880"/>
+            <a:ext cx="6168187" cy="4206240"/>
           </a:xfrm>
           <a:prstGeom prst="rect">
             <a:avLst/>
@@ -2761,12 +2850,121 @@
         </p:nvSpPr>
         <p:spPr>
           <a:xfrm>
-            <a:off x="640080" y="5532120"/>
-            <a:ext cx="10927080" cy="731520"/>
+            <a:off x="7406640" y="1463040"/>
+            <a:ext cx="4160520" cy="1371600"/>
           </a:xfrm>
           <a:prstGeom prst="roundRect">
             <a:avLst>
-              <a:gd name="adj" fmla="val 10000"/>
+              <a:gd name="adj" fmla="val 5333"/>
+            </a:avLst>
+          </a:prstGeom>
+          <a:solidFill>
+            <a:srgbClr val="FEF2F2"/>
+          </a:solidFill>
+          <a:ln w="12700">
+            <a:solidFill>
+              <a:srgbClr val="FEF2F2"/>
+            </a:solidFill>
+            <a:prstDash val="solid"/>
+          </a:ln>
+        </p:spPr>
+      </p:sp>
+      <p:sp>
+        <p:nvSpPr>
+          <p:cNvPr id="10" name="Text 7"/>
+          <p:cNvSpPr txBox="1"/>
+          <p:nvPr/>
+        </p:nvSpPr>
+        <p:spPr>
+          <a:xfrm>
+            <a:off x="7607808" y="1572768"/>
+            <a:ext cx="3758184" cy="1152144"/>
+          </a:xfrm>
+          <a:prstGeom prst="rect">
+            <a:avLst/>
+          </a:prstGeom>
+          <a:noFill/>
+          <a:ln/>
+        </p:spPr>
+        <p:txBody>
+          <a:bodyPr wrap="square" lIns="0" tIns="0" rIns="0" bIns="0" rtlCol="0" anchor="ctr"/>
+          <a:lstStyle/>
+          <a:p>
+            <a:pPr algn="l" indent="0" marL="0">
+              <a:lnSpc>
+                <a:spcPct val="125000"/>
+              </a:lnSpc>
+              <a:buNone/>
+            </a:pPr>
+            <a:r>
+              <a:rPr lang="en-US" sz="1500" b="1" dirty="0">
+                <a:solidFill>
+                  <a:srgbClr val="B91C1C"/>
+                </a:solidFill>
+                <a:latin typeface="Meiryo" pitchFamily="34" charset="0"/>
+                <a:ea typeface="Meiryo" pitchFamily="34" charset="-122"/>
+                <a:cs typeface="Meiryo" pitchFamily="34" charset="-120"/>
+              </a:rPr>
+              <a:t>増やしただけでは繰り上がりません</a:t>
+            </a:r>
+            <a:endParaRPr lang="en-US" sz="1500" dirty="0"/>
+          </a:p>
+          <a:p>
+            <a:pPr algn="l" indent="0" marL="0">
+              <a:lnSpc>
+                <a:spcPct val="125000"/>
+              </a:lnSpc>
+              <a:buNone/>
+            </a:pPr>
+            <a:r>
+              <a:rPr lang="en-US" sz="1250" dirty="0">
+                <a:solidFill>
+                  <a:srgbClr val="B91C1C"/>
+                </a:solidFill>
+                <a:latin typeface="Meiryo" pitchFamily="34" charset="0"/>
+                <a:ea typeface="Meiryo" pitchFamily="34" charset="-122"/>
+                <a:cs typeface="Meiryo" pitchFamily="34" charset="-120"/>
+              </a:rPr>
+              <a:t>更新したあと、予約一覧に戻って</a:t>
+            </a:r>
+            <a:endParaRPr lang="en-US" sz="1500" dirty="0"/>
+          </a:p>
+          <a:p>
+            <a:pPr algn="l" indent="0" marL="0">
+              <a:lnSpc>
+                <a:spcPct val="125000"/>
+              </a:lnSpc>
+              <a:buNone/>
+            </a:pPr>
+            <a:r>
+              <a:rPr lang="en-US" sz="1250" dirty="0">
+                <a:solidFill>
+                  <a:srgbClr val="B91C1C"/>
+                </a:solidFill>
+                <a:latin typeface="Meiryo" pitchFamily="34" charset="0"/>
+                <a:ea typeface="Meiryo" pitchFamily="34" charset="-122"/>
+                <a:cs typeface="Meiryo" pitchFamily="34" charset="-120"/>
+              </a:rPr>
+              <a:t>「繰り上げ」を押してください。</a:t>
+            </a:r>
+            <a:endParaRPr lang="en-US" sz="1500" dirty="0"/>
+          </a:p>
+        </p:txBody>
+      </p:sp>
+      <p:sp>
+        <p:nvSpPr>
+          <p:cNvPr id="11" name="Shape 8"/>
+          <p:cNvSpPr/>
+          <p:nvPr/>
+        </p:nvSpPr>
+        <p:spPr>
+          <a:xfrm>
+            <a:off x="7406640" y="2971800"/>
+            <a:ext cx="4160520" cy="1371600"/>
+          </a:xfrm>
+          <a:prstGeom prst="roundRect">
+            <a:avLst>
+              <a:gd name="adj" fmla="val 5333"/>
             </a:avLst>
           </a:prstGeom>
           <a:solidFill>
@@ -2782,14 +2980,14 @@
       </p:sp>
       <p:sp>
         <p:nvSpPr>
-          <p:cNvPr id="10" name="Text 7"/>
-          <p:cNvSpPr txBox="1"/>
-          <p:nvPr/>
-        </p:nvSpPr>
-        <p:spPr>
-          <a:xfrm>
-            <a:off x="841248" y="5641848"/>
-            <a:ext cx="10524744" cy="512064"/>
+          <p:cNvPr id="12" name="Text 9"/>
+          <p:cNvSpPr txBox="1"/>
+          <p:nvPr/>
+        </p:nvSpPr>
+        <p:spPr>
+          <a:xfrm>
+            <a:off x="7607808" y="3081528"/>
+            <a:ext cx="3758184" cy="1152144"/>
           </a:xfrm>
           <a:prstGeom prst="rect">
             <a:avLst/>
@@ -2808,7 +3006,7 @@
               <a:buNone/>
             </a:pPr>
             <a:r>
-              <a:rPr lang="en-US" sz="1350" b="1" dirty="0">
+              <a:rPr lang="en-US" sz="1500" b="1" dirty="0">
                 <a:solidFill>
                   <a:srgbClr val="1E2761"/>
                 </a:solidFill>
@@ -2816,9 +3014,178 @@
                 <a:ea typeface="Meiryo" pitchFamily="34" charset="-122"/>
                 <a:cs typeface="Meiryo" pitchFamily="34" charset="-120"/>
               </a:rPr>
-              <a:t>開催まで日があるなら A（待つ）、会場に余裕があるなら B（定員を増やす）、開催直前で空席を埋めたいなら C。</a:t>
-            </a:r>
-            <a:endParaRPr lang="en-US" sz="1350" dirty="0"/>
+              <a:t>定員は減らせないことがあります</a:t>
+            </a:r>
+            <a:endParaRPr lang="en-US" sz="1500" dirty="0"/>
+          </a:p>
+          <a:p>
+            <a:pPr algn="l" indent="0" marL="0">
+              <a:lnSpc>
+                <a:spcPct val="125000"/>
+              </a:lnSpc>
+              <a:buNone/>
+            </a:pPr>
+            <a:r>
+              <a:rPr lang="en-US" sz="1250" dirty="0">
+                <a:solidFill>
+                  <a:srgbClr val="1E2761"/>
+                </a:solidFill>
+                <a:latin typeface="Meiryo" pitchFamily="34" charset="0"/>
+                <a:ea typeface="Meiryo" pitchFamily="34" charset="-122"/>
+                <a:cs typeface="Meiryo" pitchFamily="34" charset="-120"/>
+              </a:rPr>
+              <a:t>現在の確定席数より小さくはできません。</a:t>
+            </a:r>
+            <a:endParaRPr lang="en-US" sz="1500" dirty="0"/>
+          </a:p>
+          <a:p>
+            <a:pPr algn="l" indent="0" marL="0">
+              <a:lnSpc>
+                <a:spcPct val="125000"/>
+              </a:lnSpc>
+              <a:buNone/>
+            </a:pPr>
+            <a:r>
+              <a:rPr lang="en-US" sz="1250" dirty="0">
+                <a:solidFill>
+                  <a:srgbClr val="1E2761"/>
+                </a:solidFill>
+                <a:latin typeface="Meiryo" pitchFamily="34" charset="0"/>
+                <a:ea typeface="Meiryo" pitchFamily="34" charset="-122"/>
+                <a:cs typeface="Meiryo" pitchFamily="34" charset="-120"/>
+              </a:rPr>
+              <a:t>先にキャンセルか繰り上げが必要です。</a:t>
+            </a:r>
+            <a:endParaRPr lang="en-US" sz="1500" dirty="0"/>
+          </a:p>
+        </p:txBody>
+      </p:sp>
+      <p:sp>
+        <p:nvSpPr>
+          <p:cNvPr id="13" name="Shape 10"/>
+          <p:cNvSpPr/>
+          <p:nvPr/>
+        </p:nvSpPr>
+        <p:spPr>
+          <a:xfrm>
+            <a:off x="7406640" y="4480560"/>
+            <a:ext cx="4160520" cy="1508760"/>
+          </a:xfrm>
+          <a:prstGeom prst="roundRect">
+            <a:avLst>
+              <a:gd name="adj" fmla="val 4848"/>
+            </a:avLst>
+          </a:prstGeom>
+          <a:solidFill>
+            <a:srgbClr val="ECFDF5"/>
+          </a:solidFill>
+          <a:ln w="12700">
+            <a:solidFill>
+              <a:srgbClr val="ECFDF5"/>
+            </a:solidFill>
+            <a:prstDash val="solid"/>
+          </a:ln>
+        </p:spPr>
+      </p:sp>
+      <p:sp>
+        <p:nvSpPr>
+          <p:cNvPr id="14" name="Text 11"/>
+          <p:cNvSpPr txBox="1"/>
+          <p:nvPr/>
+        </p:nvSpPr>
+        <p:spPr>
+          <a:xfrm>
+            <a:off x="7607808" y="4590288"/>
+            <a:ext cx="3758184" cy="1289304"/>
+          </a:xfrm>
+          <a:prstGeom prst="rect">
+            <a:avLst/>
+          </a:prstGeom>
+          <a:noFill/>
+          <a:ln/>
+        </p:spPr>
+        <p:txBody>
+          <a:bodyPr wrap="square" lIns="0" tIns="0" rIns="0" bIns="0" rtlCol="0" anchor="ctr"/>
+          <a:lstStyle/>
+          <a:p>
+            <a:pPr algn="l" indent="0" marL="0">
+              <a:lnSpc>
+                <a:spcPct val="125000"/>
+              </a:lnSpc>
+              <a:buNone/>
+            </a:pPr>
+            <a:r>
+              <a:rPr lang="en-US" sz="1500" b="1" dirty="0">
+                <a:solidFill>
+                  <a:srgbClr val="15803D"/>
+                </a:solidFill>
+                <a:latin typeface="Meiryo" pitchFamily="34" charset="0"/>
+                <a:ea typeface="Meiryo" pitchFamily="34" charset="-122"/>
+                <a:cs typeface="Meiryo" pitchFamily="34" charset="-120"/>
+              </a:rPr>
+              <a:t>先に埋められる心配はありません</a:t>
+            </a:r>
+            <a:endParaRPr lang="en-US" sz="1500" dirty="0"/>
+          </a:p>
+          <a:p>
+            <a:pPr algn="l" indent="0" marL="0">
+              <a:lnSpc>
+                <a:spcPct val="125000"/>
+              </a:lnSpc>
+              <a:buNone/>
+            </a:pPr>
+            <a:r>
+              <a:rPr lang="en-US" sz="1250" dirty="0">
+                <a:solidFill>
+                  <a:srgbClr val="15803D"/>
+                </a:solidFill>
+                <a:latin typeface="Meiryo" pitchFamily="34" charset="0"/>
+                <a:ea typeface="Meiryo" pitchFamily="34" charset="-122"/>
+                <a:cs typeface="Meiryo" pitchFamily="34" charset="-120"/>
+              </a:rPr>
+              <a:t>お待ちの方がいる間、公開側は</a:t>
+            </a:r>
+            <a:endParaRPr lang="en-US" sz="1500" dirty="0"/>
+          </a:p>
+          <a:p>
+            <a:pPr algn="l" indent="0" marL="0">
+              <a:lnSpc>
+                <a:spcPct val="125000"/>
+              </a:lnSpc>
+              <a:buNone/>
+            </a:pPr>
+            <a:r>
+              <a:rPr lang="en-US" sz="1250" dirty="0">
+                <a:solidFill>
+                  <a:srgbClr val="15803D"/>
+                </a:solidFill>
+                <a:latin typeface="Meiryo" pitchFamily="34" charset="0"/>
+                <a:ea typeface="Meiryo" pitchFamily="34" charset="-122"/>
+                <a:cs typeface="Meiryo" pitchFamily="34" charset="-120"/>
+              </a:rPr>
+              <a:t>「キャンセル待ち」のままです。</a:t>
+            </a:r>
+            <a:endParaRPr lang="en-US" sz="1500" dirty="0"/>
+          </a:p>
+          <a:p>
+            <a:pPr algn="l" indent="0" marL="0">
+              <a:lnSpc>
+                <a:spcPct val="125000"/>
+              </a:lnSpc>
+              <a:buNone/>
+            </a:pPr>
+            <a:r>
+              <a:rPr lang="en-US" sz="1250" dirty="0">
+                <a:solidFill>
+                  <a:srgbClr val="15803D"/>
+                </a:solidFill>
+                <a:latin typeface="Meiryo" pitchFamily="34" charset="0"/>
+                <a:ea typeface="Meiryo" pitchFamily="34" charset="-122"/>
+                <a:cs typeface="Meiryo" pitchFamily="34" charset="-120"/>
+              </a:rPr>
+              <a:t>落ち着いて繰り上げてください。</a:t>
+            </a:r>
+            <a:endParaRPr lang="en-US" sz="1500" dirty="0"/>
           </a:p>
         </p:txBody>
       </p:sp>
@@ -3024,7 +3391,7 @@
                 <a:ea typeface="Meiryo" pitchFamily="34" charset="-122"/>
                 <a:cs typeface="Meiryo" pitchFamily="34" charset="-120"/>
               </a:rPr>
-              <a:t>手立て D・E ： 取り直していただく</a:t>
+              <a:t>手立て C ： 順番の追い越し</a:t>
             </a:r>
             <a:endParaRPr lang="en-US" sz="2800" dirty="0"/>
           </a:p>
@@ -3063,144 +3430,50 @@
                 <a:ea typeface="Meiryo" pitchFamily="34" charset="-122"/>
                 <a:cs typeface="Meiryo" pitchFamily="34" charset="-120"/>
               </a:rPr>
-              <a:t>人数を変更する機能はありません。キャンセル → 取り直しになります</a:t>
+              <a:t>空席を埋められますが、運用上の判断が必要です</a:t>
             </a:r>
             <a:endParaRPr lang="en-US" sz="1400" dirty="0"/>
           </a:p>
         </p:txBody>
       </p:sp>
-      <p:sp>
-        <p:nvSpPr>
-          <p:cNvPr id="8" name="Shape 6"/>
+      <p:pic>
+        <p:nvPicPr>
+          <p:cNvPr id="8" name="Image 0" descr="C:\Users\sato\AppData\Local\Temp\claude\c--Users-sato-Desktop---3---3\c0abf194-6a09-42ac-bc16-2cd244740c64\scratchpad\deck\img\d2-overtake.png">    </p:cNvPr>
+          <p:cNvPicPr>
+            <a:picLocks noChangeAspect="1"/>
+          </p:cNvPicPr>
+          <p:nvPr/>
+        </p:nvPicPr>
+        <p:blipFill>
+          <a:blip r:embed="rId1"/>
+          <a:stretch>
+            <a:fillRect/>
+          </a:stretch>
+        </p:blipFill>
+        <p:spPr>
+          <a:xfrm>
+            <a:off x="1325757" y="1325880"/>
+            <a:ext cx="9540181" cy="3977640"/>
+          </a:xfrm>
+          <a:prstGeom prst="rect">
+            <a:avLst/>
+          </a:prstGeom>
+        </p:spPr>
+      </p:pic>
+      <p:sp>
+        <p:nvSpPr>
+          <p:cNvPr id="9" name="Shape 6"/>
           <p:cNvSpPr/>
           <p:nvPr/>
         </p:nvSpPr>
         <p:spPr>
           <a:xfrm>
-            <a:off x="640080" y="1417320"/>
-            <a:ext cx="10927080" cy="1783080"/>
+            <a:off x="640080" y="5532120"/>
+            <a:ext cx="10927080" cy="731520"/>
           </a:xfrm>
           <a:prstGeom prst="roundRect">
             <a:avLst>
-              <a:gd name="adj" fmla="val 4103"/>
-            </a:avLst>
-          </a:prstGeom>
-          <a:solidFill>
-            <a:srgbClr val="FEF2F2"/>
-          </a:solidFill>
-          <a:ln w="19050">
-            <a:solidFill>
-              <a:srgbClr val="B91C1C"/>
-            </a:solidFill>
-            <a:prstDash val="solid"/>
-          </a:ln>
-        </p:spPr>
-      </p:sp>
-      <p:sp>
-        <p:nvSpPr>
-          <p:cNvPr id="9" name="Text 7"/>
-          <p:cNvSpPr txBox="1"/>
-          <p:nvPr/>
-        </p:nvSpPr>
-        <p:spPr>
-          <a:xfrm>
-            <a:off x="914400" y="1572768"/>
-            <a:ext cx="10332720" cy="1463040"/>
-          </a:xfrm>
-          <a:prstGeom prst="rect">
-            <a:avLst/>
-          </a:prstGeom>
-          <a:noFill/>
-          <a:ln/>
-        </p:spPr>
-        <p:txBody>
-          <a:bodyPr wrap="square" lIns="0" tIns="0" rIns="0" bIns="0" rtlCol="0" anchor="ctr"/>
-          <a:lstStyle/>
-          <a:p>
-            <a:pPr algn="l" indent="0" marL="0">
-              <a:lnSpc>
-                <a:spcPct val="130000"/>
-              </a:lnSpc>
-              <a:buNone/>
-            </a:pPr>
-            <a:r>
-              <a:rPr lang="en-US" sz="1600" b="1" dirty="0">
-                <a:solidFill>
-                  <a:srgbClr val="B91C1C"/>
-                </a:solidFill>
-                <a:latin typeface="Meiryo" pitchFamily="34" charset="0"/>
-                <a:ea typeface="Meiryo" pitchFamily="34" charset="-122"/>
-                <a:cs typeface="Meiryo" pitchFamily="34" charset="-120"/>
-              </a:rPr>
-              <a:t>ここに落とし穴があります。取り直すと、その方の待ち順は最初からになります。</a:t>
-            </a:r>
-            <a:endParaRPr lang="en-US" sz="1600" dirty="0"/>
-          </a:p>
-          <a:p>
-            <a:pPr algn="l" indent="0" marL="0">
-              <a:lnSpc>
-                <a:spcPct val="130000"/>
-              </a:lnSpc>
-              <a:buNone/>
-            </a:pPr>
-            <a:endParaRPr lang="en-US" sz="1600" dirty="0"/>
-          </a:p>
-          <a:p>
-            <a:pPr algn="l" indent="0" marL="0">
-              <a:lnSpc>
-                <a:spcPct val="130000"/>
-              </a:lnSpc>
-              <a:buNone/>
-            </a:pPr>
-            <a:r>
-              <a:rPr lang="en-US" sz="1400" dirty="0">
-                <a:solidFill>
-                  <a:srgbClr val="1F2937"/>
-                </a:solidFill>
-                <a:latin typeface="Meiryo" pitchFamily="34" charset="0"/>
-                <a:ea typeface="Meiryo" pitchFamily="34" charset="-122"/>
-                <a:cs typeface="Meiryo" pitchFamily="34" charset="-120"/>
-              </a:rPr>
-              <a:t>取り直した時点で 他にキャンセル待ちの方がいなければ → 空席の範囲でそのまま確定</a:t>
-            </a:r>
-            <a:endParaRPr lang="en-US" sz="1600" dirty="0"/>
-          </a:p>
-          <a:p>
-            <a:pPr algn="l" indent="0" marL="0">
-              <a:lnSpc>
-                <a:spcPct val="130000"/>
-              </a:lnSpc>
-              <a:buNone/>
-            </a:pPr>
-            <a:r>
-              <a:rPr lang="en-US" sz="1400" dirty="0">
-                <a:solidFill>
-                  <a:srgbClr val="B91C1C"/>
-                </a:solidFill>
-                <a:latin typeface="Meiryo" pitchFamily="34" charset="0"/>
-                <a:ea typeface="Meiryo" pitchFamily="34" charset="-122"/>
-                <a:cs typeface="Meiryo" pitchFamily="34" charset="-120"/>
-              </a:rPr>
-              <a:t>取り直した時点で 他にキャンセル待ちの方がいれば → 空席があってもキャンセル待ちの最後</a:t>
-            </a:r>
-            <a:endParaRPr lang="en-US" sz="1600" dirty="0"/>
-          </a:p>
-        </p:txBody>
-      </p:sp>
-      <p:sp>
-        <p:nvSpPr>
-          <p:cNvPr id="10" name="Shape 8"/>
-          <p:cNvSpPr/>
-          <p:nvPr/>
-        </p:nvSpPr>
-        <p:spPr>
-          <a:xfrm>
-            <a:off x="640080" y="3429000"/>
-            <a:ext cx="10927080" cy="777240"/>
-          </a:xfrm>
-          <a:prstGeom prst="roundRect">
-            <a:avLst>
-              <a:gd name="adj" fmla="val 9412"/>
+              <a:gd name="adj" fmla="val 10000"/>
             </a:avLst>
           </a:prstGeom>
           <a:solidFill>
@@ -3216,14 +3489,14 @@
       </p:sp>
       <p:sp>
         <p:nvSpPr>
-          <p:cNvPr id="11" name="Text 9"/>
-          <p:cNvSpPr txBox="1"/>
-          <p:nvPr/>
-        </p:nvSpPr>
-        <p:spPr>
-          <a:xfrm>
-            <a:off x="841248" y="3538728"/>
-            <a:ext cx="10524744" cy="557784"/>
+          <p:cNvPr id="10" name="Text 7"/>
+          <p:cNvSpPr txBox="1"/>
+          <p:nvPr/>
+        </p:nvSpPr>
+        <p:spPr>
+          <a:xfrm>
+            <a:off x="841248" y="5641848"/>
+            <a:ext cx="10524744" cy="512064"/>
           </a:xfrm>
           <a:prstGeom prst="rect">
             <a:avLst/>
@@ -3242,7 +3515,7 @@
               <a:buNone/>
             </a:pPr>
             <a:r>
-              <a:rPr lang="en-US" sz="1400" b="1" dirty="0">
+              <a:rPr lang="en-US" sz="1350" b="1" dirty="0">
                 <a:solidFill>
                   <a:srgbClr val="1E2761"/>
                 </a:solidFill>
@@ -3250,157 +3523,9 @@
                 <a:ea typeface="Meiryo" pitchFamily="34" charset="-122"/>
                 <a:cs typeface="Meiryo" pitchFamily="34" charset="-120"/>
               </a:rPr>
-              <a:t>ご案内する前に、予約一覧でその開催回のキャンセル待ちが「その方だけ」であることを必ず確認してください。</a:t>
-            </a:r>
-            <a:endParaRPr lang="en-US" sz="1400" dirty="0"/>
-          </a:p>
-        </p:txBody>
-      </p:sp>
-      <p:sp>
-        <p:nvSpPr>
-          <p:cNvPr id="12" name="Text 10"/>
-          <p:cNvSpPr txBox="1"/>
-          <p:nvPr/>
-        </p:nvSpPr>
-        <p:spPr>
-          <a:xfrm>
-            <a:off x="640080" y="4389120"/>
-            <a:ext cx="10927080" cy="292608"/>
-          </a:xfrm>
-          <a:prstGeom prst="rect">
-            <a:avLst/>
-          </a:prstGeom>
-          <a:noFill/>
-          <a:ln/>
-        </p:spPr>
-        <p:txBody>
-          <a:bodyPr wrap="square" lIns="0" tIns="0" rIns="0" bIns="0" rtlCol="0" anchor="ctr"/>
-          <a:lstStyle/>
-          <a:p>
-            <a:pPr indent="0" marL="0">
-              <a:buNone/>
-            </a:pPr>
-            <a:r>
-              <a:rPr lang="en-US" sz="1500" b="1" dirty="0">
-                <a:solidFill>
-                  <a:srgbClr val="1E2761"/>
-                </a:solidFill>
-                <a:latin typeface="Meiryo" pitchFamily="34" charset="0"/>
-                <a:ea typeface="Meiryo" pitchFamily="34" charset="-122"/>
-                <a:cs typeface="Meiryo" pitchFamily="34" charset="-120"/>
-              </a:rPr>
-              <a:t>ご案内の文例</a:t>
-            </a:r>
-            <a:endParaRPr lang="en-US" sz="1500" dirty="0"/>
-          </a:p>
-        </p:txBody>
-      </p:sp>
-      <p:sp>
-        <p:nvSpPr>
-          <p:cNvPr id="13" name="Shape 11"/>
-          <p:cNvSpPr/>
-          <p:nvPr/>
-        </p:nvSpPr>
-        <p:spPr>
-          <a:xfrm>
-            <a:off x="640080" y="4709160"/>
-            <a:ext cx="10927080" cy="1325880"/>
-          </a:xfrm>
-          <a:prstGeom prst="roundRect">
-            <a:avLst>
-              <a:gd name="adj" fmla="val 5517"/>
-            </a:avLst>
-          </a:prstGeom>
-          <a:solidFill>
-            <a:srgbClr val="F4F7FC"/>
-          </a:solidFill>
-          <a:ln w="12700">
-            <a:solidFill>
-              <a:srgbClr val="C7D2E4"/>
-            </a:solidFill>
-            <a:prstDash val="solid"/>
-          </a:ln>
-        </p:spPr>
-      </p:sp>
-      <p:sp>
-        <p:nvSpPr>
-          <p:cNvPr id="14" name="Text 12"/>
-          <p:cNvSpPr txBox="1"/>
-          <p:nvPr/>
-        </p:nvSpPr>
-        <p:spPr>
-          <a:xfrm>
-            <a:off x="914400" y="4846320"/>
-            <a:ext cx="10424160" cy="1051560"/>
-          </a:xfrm>
-          <a:prstGeom prst="rect">
-            <a:avLst/>
-          </a:prstGeom>
-          <a:noFill/>
-          <a:ln/>
-        </p:spPr>
-        <p:txBody>
-          <a:bodyPr wrap="square" lIns="0" tIns="0" rIns="0" bIns="0" rtlCol="0" anchor="ctr"/>
-          <a:lstStyle/>
-          <a:p>
-            <a:pPr algn="l" indent="0" marL="0">
-              <a:lnSpc>
-                <a:spcPct val="130000"/>
-              </a:lnSpc>
-              <a:buNone/>
-            </a:pPr>
-            <a:r>
-              <a:rPr lang="en-US" sz="1300" dirty="0">
-                <a:solidFill>
-                  <a:srgbClr val="1F2937"/>
-                </a:solidFill>
-                <a:latin typeface="Meiryo" pitchFamily="34" charset="0"/>
-                <a:ea typeface="Meiryo" pitchFamily="34" charset="-122"/>
-                <a:cs typeface="Meiryo" pitchFamily="34" charset="-120"/>
-              </a:rPr>
-              <a:t>現在この回は他にお待ちの方がいらっしゃらないため、いま 3 名のご予約をキャンセルして 2 名で取り直していただければ、</a:t>
-            </a:r>
-            <a:endParaRPr lang="en-US" sz="1300" dirty="0"/>
-          </a:p>
-          <a:p>
-            <a:pPr algn="l" indent="0" marL="0">
-              <a:lnSpc>
-                <a:spcPct val="130000"/>
-              </a:lnSpc>
-              <a:buNone/>
-            </a:pPr>
-            <a:r>
-              <a:rPr lang="en-US" sz="1300" dirty="0">
-                <a:solidFill>
-                  <a:srgbClr val="1F2937"/>
-                </a:solidFill>
-                <a:latin typeface="Meiryo" pitchFamily="34" charset="0"/>
-                <a:ea typeface="Meiryo" pitchFamily="34" charset="-122"/>
-                <a:cs typeface="Meiryo" pitchFamily="34" charset="-120"/>
-              </a:rPr>
-              <a:t>そのままご参加が確定します。順番が後ろになることはありません。</a:t>
-            </a:r>
-            <a:endParaRPr lang="en-US" sz="1300" dirty="0"/>
-          </a:p>
-          <a:p>
-            <a:pPr algn="l" indent="0" marL="0">
-              <a:lnSpc>
-                <a:spcPct val="130000"/>
-              </a:lnSpc>
-              <a:buNone/>
-            </a:pPr>
-            <a:r>
-              <a:rPr lang="en-US" sz="1300" dirty="0">
-                <a:solidFill>
-                  <a:srgbClr val="1F2937"/>
-                </a:solidFill>
-                <a:latin typeface="Meiryo" pitchFamily="34" charset="0"/>
-                <a:ea typeface="Meiryo" pitchFamily="34" charset="-122"/>
-                <a:cs typeface="Meiryo" pitchFamily="34" charset="-120"/>
-              </a:rPr>
-              <a:t>お手数ですが、予約完了メールの URL からキャンセルのうえ、改めてお申し込みください。</a:t>
-            </a:r>
-            <a:endParaRPr lang="en-US" sz="1300" dirty="0"/>
+              <a:t>開催まで日があるなら A（待つ）、会場に余裕があるなら B（定員を増やす）、開催直前で空席を埋めたいなら C。</a:t>
+            </a:r>
+            <a:endParaRPr lang="en-US" sz="1350" dirty="0"/>
           </a:p>
         </p:txBody>
       </p:sp>
@@ -3606,7 +3731,7 @@
                 <a:ea typeface="Meiryo" pitchFamily="34" charset="-122"/>
                 <a:cs typeface="Meiryo" pitchFamily="34" charset="-120"/>
               </a:rPr>
-              <a:t>複数の方をまとめて繰り上げるとき</a:t>
+              <a:t>手立て D・E ： 取り直していただく</a:t>
             </a:r>
             <a:endParaRPr lang="en-US" sz="2800" dirty="0"/>
           </a:p>
@@ -3645,36 +3770,347 @@
                 <a:ea typeface="Meiryo" pitchFamily="34" charset="-122"/>
                 <a:cs typeface="Meiryo" pitchFamily="34" charset="-120"/>
               </a:rPr>
-              <a:t>押す順番で、参加できる人数が変わります</a:t>
+              <a:t>人数を変更する機能はありません。キャンセル → 取り直しになります</a:t>
             </a:r>
             <a:endParaRPr lang="en-US" sz="1400" dirty="0"/>
           </a:p>
         </p:txBody>
       </p:sp>
-      <p:pic>
-        <p:nvPicPr>
-          <p:cNvPr id="8" name="Image 0" descr="C:\Users\sato\AppData\Local\Temp\claude\c--Users-sato-Desktop---3---3\c0abf194-6a09-42ac-bc16-2cd244740c64\scratchpad\deck\img\d3-order.png">    </p:cNvPr>
-          <p:cNvPicPr>
-            <a:picLocks noChangeAspect="1"/>
-          </p:cNvPicPr>
-          <p:nvPr/>
-        </p:nvPicPr>
-        <p:blipFill>
-          <a:blip r:embed="rId1"/>
-          <a:stretch>
-            <a:fillRect/>
-          </a:stretch>
-        </p:blipFill>
-        <p:spPr>
-          <a:xfrm>
-            <a:off x="632308" y="1371600"/>
-            <a:ext cx="10927080" cy="4256274"/>
-          </a:xfrm>
-          <a:prstGeom prst="rect">
-            <a:avLst/>
-          </a:prstGeom>
-        </p:spPr>
-      </p:pic>
+      <p:sp>
+        <p:nvSpPr>
+          <p:cNvPr id="8" name="Shape 6"/>
+          <p:cNvSpPr/>
+          <p:nvPr/>
+        </p:nvSpPr>
+        <p:spPr>
+          <a:xfrm>
+            <a:off x="640080" y="1417320"/>
+            <a:ext cx="10927080" cy="1783080"/>
+          </a:xfrm>
+          <a:prstGeom prst="roundRect">
+            <a:avLst>
+              <a:gd name="adj" fmla="val 4103"/>
+            </a:avLst>
+          </a:prstGeom>
+          <a:solidFill>
+            <a:srgbClr val="FEF2F2"/>
+          </a:solidFill>
+          <a:ln w="19050">
+            <a:solidFill>
+              <a:srgbClr val="B91C1C"/>
+            </a:solidFill>
+            <a:prstDash val="solid"/>
+          </a:ln>
+        </p:spPr>
+      </p:sp>
+      <p:sp>
+        <p:nvSpPr>
+          <p:cNvPr id="9" name="Text 7"/>
+          <p:cNvSpPr txBox="1"/>
+          <p:nvPr/>
+        </p:nvSpPr>
+        <p:spPr>
+          <a:xfrm>
+            <a:off x="914400" y="1572768"/>
+            <a:ext cx="10332720" cy="1463040"/>
+          </a:xfrm>
+          <a:prstGeom prst="rect">
+            <a:avLst/>
+          </a:prstGeom>
+          <a:noFill/>
+          <a:ln/>
+        </p:spPr>
+        <p:txBody>
+          <a:bodyPr wrap="square" lIns="0" tIns="0" rIns="0" bIns="0" rtlCol="0" anchor="ctr"/>
+          <a:lstStyle/>
+          <a:p>
+            <a:pPr algn="l" indent="0" marL="0">
+              <a:lnSpc>
+                <a:spcPct val="130000"/>
+              </a:lnSpc>
+              <a:buNone/>
+            </a:pPr>
+            <a:r>
+              <a:rPr lang="en-US" sz="1600" b="1" dirty="0">
+                <a:solidFill>
+                  <a:srgbClr val="B91C1C"/>
+                </a:solidFill>
+                <a:latin typeface="Meiryo" pitchFamily="34" charset="0"/>
+                <a:ea typeface="Meiryo" pitchFamily="34" charset="-122"/>
+                <a:cs typeface="Meiryo" pitchFamily="34" charset="-120"/>
+              </a:rPr>
+              <a:t>ここに落とし穴があります。取り直すと、その方の待ち順は最初からになります。</a:t>
+            </a:r>
+            <a:endParaRPr lang="en-US" sz="1600" dirty="0"/>
+          </a:p>
+          <a:p>
+            <a:pPr algn="l" indent="0" marL="0">
+              <a:lnSpc>
+                <a:spcPct val="130000"/>
+              </a:lnSpc>
+              <a:buNone/>
+            </a:pPr>
+            <a:endParaRPr lang="en-US" sz="1600" dirty="0"/>
+          </a:p>
+          <a:p>
+            <a:pPr algn="l" indent="0" marL="0">
+              <a:lnSpc>
+                <a:spcPct val="130000"/>
+              </a:lnSpc>
+              <a:buNone/>
+            </a:pPr>
+            <a:r>
+              <a:rPr lang="en-US" sz="1400" dirty="0">
+                <a:solidFill>
+                  <a:srgbClr val="1F2937"/>
+                </a:solidFill>
+                <a:latin typeface="Meiryo" pitchFamily="34" charset="0"/>
+                <a:ea typeface="Meiryo" pitchFamily="34" charset="-122"/>
+                <a:cs typeface="Meiryo" pitchFamily="34" charset="-120"/>
+              </a:rPr>
+              <a:t>取り直した時点で 他にキャンセル待ちの方がいなければ → 空席の範囲でそのまま確定</a:t>
+            </a:r>
+            <a:endParaRPr lang="en-US" sz="1600" dirty="0"/>
+          </a:p>
+          <a:p>
+            <a:pPr algn="l" indent="0" marL="0">
+              <a:lnSpc>
+                <a:spcPct val="130000"/>
+              </a:lnSpc>
+              <a:buNone/>
+            </a:pPr>
+            <a:r>
+              <a:rPr lang="en-US" sz="1400" dirty="0">
+                <a:solidFill>
+                  <a:srgbClr val="B91C1C"/>
+                </a:solidFill>
+                <a:latin typeface="Meiryo" pitchFamily="34" charset="0"/>
+                <a:ea typeface="Meiryo" pitchFamily="34" charset="-122"/>
+                <a:cs typeface="Meiryo" pitchFamily="34" charset="-120"/>
+              </a:rPr>
+              <a:t>取り直した時点で 他にキャンセル待ちの方がいれば → 空席があってもキャンセル待ちの最後</a:t>
+            </a:r>
+            <a:endParaRPr lang="en-US" sz="1600" dirty="0"/>
+          </a:p>
+        </p:txBody>
+      </p:sp>
+      <p:sp>
+        <p:nvSpPr>
+          <p:cNvPr id="10" name="Shape 8"/>
+          <p:cNvSpPr/>
+          <p:nvPr/>
+        </p:nvSpPr>
+        <p:spPr>
+          <a:xfrm>
+            <a:off x="640080" y="3429000"/>
+            <a:ext cx="10927080" cy="777240"/>
+          </a:xfrm>
+          <a:prstGeom prst="roundRect">
+            <a:avLst>
+              <a:gd name="adj" fmla="val 9412"/>
+            </a:avLst>
+          </a:prstGeom>
+          <a:solidFill>
+            <a:srgbClr val="CADCFC"/>
+          </a:solidFill>
+          <a:ln w="12700">
+            <a:solidFill>
+              <a:srgbClr val="CADCFC"/>
+            </a:solidFill>
+            <a:prstDash val="solid"/>
+          </a:ln>
+        </p:spPr>
+      </p:sp>
+      <p:sp>
+        <p:nvSpPr>
+          <p:cNvPr id="11" name="Text 9"/>
+          <p:cNvSpPr txBox="1"/>
+          <p:nvPr/>
+        </p:nvSpPr>
+        <p:spPr>
+          <a:xfrm>
+            <a:off x="841248" y="3538728"/>
+            <a:ext cx="10524744" cy="557784"/>
+          </a:xfrm>
+          <a:prstGeom prst="rect">
+            <a:avLst/>
+          </a:prstGeom>
+          <a:noFill/>
+          <a:ln/>
+        </p:spPr>
+        <p:txBody>
+          <a:bodyPr wrap="square" lIns="0" tIns="0" rIns="0" bIns="0" rtlCol="0" anchor="ctr"/>
+          <a:lstStyle/>
+          <a:p>
+            <a:pPr algn="l" indent="0" marL="0">
+              <a:lnSpc>
+                <a:spcPct val="125000"/>
+              </a:lnSpc>
+              <a:buNone/>
+            </a:pPr>
+            <a:r>
+              <a:rPr lang="en-US" sz="1400" b="1" dirty="0">
+                <a:solidFill>
+                  <a:srgbClr val="1E2761"/>
+                </a:solidFill>
+                <a:latin typeface="Meiryo" pitchFamily="34" charset="0"/>
+                <a:ea typeface="Meiryo" pitchFamily="34" charset="-122"/>
+                <a:cs typeface="Meiryo" pitchFamily="34" charset="-120"/>
+              </a:rPr>
+              <a:t>ご案内する前に、予約一覧でその開催回のキャンセル待ちが「その方だけ」であることを必ず確認してください。</a:t>
+            </a:r>
+            <a:endParaRPr lang="en-US" sz="1400" dirty="0"/>
+          </a:p>
+        </p:txBody>
+      </p:sp>
+      <p:sp>
+        <p:nvSpPr>
+          <p:cNvPr id="12" name="Text 10"/>
+          <p:cNvSpPr txBox="1"/>
+          <p:nvPr/>
+        </p:nvSpPr>
+        <p:spPr>
+          <a:xfrm>
+            <a:off x="640080" y="4389120"/>
+            <a:ext cx="10927080" cy="292608"/>
+          </a:xfrm>
+          <a:prstGeom prst="rect">
+            <a:avLst/>
+          </a:prstGeom>
+          <a:noFill/>
+          <a:ln/>
+        </p:spPr>
+        <p:txBody>
+          <a:bodyPr wrap="square" lIns="0" tIns="0" rIns="0" bIns="0" rtlCol="0" anchor="ctr"/>
+          <a:lstStyle/>
+          <a:p>
+            <a:pPr indent="0" marL="0">
+              <a:buNone/>
+            </a:pPr>
+            <a:r>
+              <a:rPr lang="en-US" sz="1500" b="1" dirty="0">
+                <a:solidFill>
+                  <a:srgbClr val="1E2761"/>
+                </a:solidFill>
+                <a:latin typeface="Meiryo" pitchFamily="34" charset="0"/>
+                <a:ea typeface="Meiryo" pitchFamily="34" charset="-122"/>
+                <a:cs typeface="Meiryo" pitchFamily="34" charset="-120"/>
+              </a:rPr>
+              <a:t>ご案内の文例</a:t>
+            </a:r>
+            <a:endParaRPr lang="en-US" sz="1500" dirty="0"/>
+          </a:p>
+        </p:txBody>
+      </p:sp>
+      <p:sp>
+        <p:nvSpPr>
+          <p:cNvPr id="13" name="Shape 11"/>
+          <p:cNvSpPr/>
+          <p:nvPr/>
+        </p:nvSpPr>
+        <p:spPr>
+          <a:xfrm>
+            <a:off x="640080" y="4709160"/>
+            <a:ext cx="10927080" cy="1325880"/>
+          </a:xfrm>
+          <a:prstGeom prst="roundRect">
+            <a:avLst>
+              <a:gd name="adj" fmla="val 5517"/>
+            </a:avLst>
+          </a:prstGeom>
+          <a:solidFill>
+            <a:srgbClr val="F4F7FC"/>
+          </a:solidFill>
+          <a:ln w="12700">
+            <a:solidFill>
+              <a:srgbClr val="C7D2E4"/>
+            </a:solidFill>
+            <a:prstDash val="solid"/>
+          </a:ln>
+        </p:spPr>
+      </p:sp>
+      <p:sp>
+        <p:nvSpPr>
+          <p:cNvPr id="14" name="Text 12"/>
+          <p:cNvSpPr txBox="1"/>
+          <p:nvPr/>
+        </p:nvSpPr>
+        <p:spPr>
+          <a:xfrm>
+            <a:off x="914400" y="4846320"/>
+            <a:ext cx="10424160" cy="1051560"/>
+          </a:xfrm>
+          <a:prstGeom prst="rect">
+            <a:avLst/>
+          </a:prstGeom>
+          <a:noFill/>
+          <a:ln/>
+        </p:spPr>
+        <p:txBody>
+          <a:bodyPr wrap="square" lIns="0" tIns="0" rIns="0" bIns="0" rtlCol="0" anchor="ctr"/>
+          <a:lstStyle/>
+          <a:p>
+            <a:pPr algn="l" indent="0" marL="0">
+              <a:lnSpc>
+                <a:spcPct val="130000"/>
+              </a:lnSpc>
+              <a:buNone/>
+            </a:pPr>
+            <a:r>
+              <a:rPr lang="en-US" sz="1300" dirty="0">
+                <a:solidFill>
+                  <a:srgbClr val="1F2937"/>
+                </a:solidFill>
+                <a:latin typeface="Meiryo" pitchFamily="34" charset="0"/>
+                <a:ea typeface="Meiryo" pitchFamily="34" charset="-122"/>
+                <a:cs typeface="Meiryo" pitchFamily="34" charset="-120"/>
+              </a:rPr>
+              <a:t>現在この回は他にお待ちの方がいらっしゃらないため、いま 3 名のご予約をキャンセルして 2 名で取り直していただければ、</a:t>
+            </a:r>
+            <a:endParaRPr lang="en-US" sz="1300" dirty="0"/>
+          </a:p>
+          <a:p>
+            <a:pPr algn="l" indent="0" marL="0">
+              <a:lnSpc>
+                <a:spcPct val="130000"/>
+              </a:lnSpc>
+              <a:buNone/>
+            </a:pPr>
+            <a:r>
+              <a:rPr lang="en-US" sz="1300" dirty="0">
+                <a:solidFill>
+                  <a:srgbClr val="1F2937"/>
+                </a:solidFill>
+                <a:latin typeface="Meiryo" pitchFamily="34" charset="0"/>
+                <a:ea typeface="Meiryo" pitchFamily="34" charset="-122"/>
+                <a:cs typeface="Meiryo" pitchFamily="34" charset="-120"/>
+              </a:rPr>
+              <a:t>そのままご参加が確定します。順番が後ろになることはありません。</a:t>
+            </a:r>
+            <a:endParaRPr lang="en-US" sz="1300" dirty="0"/>
+          </a:p>
+          <a:p>
+            <a:pPr algn="l" indent="0" marL="0">
+              <a:lnSpc>
+                <a:spcPct val="130000"/>
+              </a:lnSpc>
+              <a:buNone/>
+            </a:pPr>
+            <a:r>
+              <a:rPr lang="en-US" sz="1300" dirty="0">
+                <a:solidFill>
+                  <a:srgbClr val="1F2937"/>
+                </a:solidFill>
+                <a:latin typeface="Meiryo" pitchFamily="34" charset="0"/>
+                <a:ea typeface="Meiryo" pitchFamily="34" charset="-122"/>
+                <a:cs typeface="Meiryo" pitchFamily="34" charset="-120"/>
+              </a:rPr>
+              <a:t>お手数ですが、予約完了メールの URL からキャンセルのうえ、改めてお申し込みください。</a:t>
+            </a:r>
+            <a:endParaRPr lang="en-US" sz="1300" dirty="0"/>
+          </a:p>
+        </p:txBody>
+      </p:sp>
     </p:spTree>
   </p:cSld>
   <p:clrMapOvr>
@@ -3877,7 +4313,7 @@
                 <a:ea typeface="Meiryo" pitchFamily="34" charset="-122"/>
                 <a:cs typeface="Meiryo" pitchFamily="34" charset="-120"/>
               </a:rPr>
-              <a:t>繰り上げたあと／繰り上げできないとき</a:t>
+              <a:t>複数の方をまとめて繰り上げるとき</a:t>
             </a:r>
             <a:endParaRPr lang="en-US" sz="2800" dirty="0"/>
           </a:p>
@@ -3916,7 +4352,7 @@
                 <a:ea typeface="Meiryo" pitchFamily="34" charset="-122"/>
                 <a:cs typeface="Meiryo" pitchFamily="34" charset="-120"/>
               </a:rPr>
-              <a:t>成功すると、ご本人に確定メールが送られます</a:t>
+              <a:t>押す順番で、参加できる人数が変わります</a:t>
             </a:r>
             <a:endParaRPr lang="en-US" sz="1400" dirty="0"/>
           </a:p>
@@ -3924,7 +4360,7 @@
       </p:sp>
       <p:pic>
         <p:nvPicPr>
-          <p:cNvPr id="8" name="Image 0" descr="C:\Users\sato\AppData\Local\Temp\claude\c--Users-sato-Desktop---3---3\c0abf194-6a09-42ac-bc16-2cd244740c64\scratchpad\deck\img\c-promoted.png">    </p:cNvPr>
+          <p:cNvPr id="8" name="Image 0" descr="C:\Users\sato\AppData\Local\Temp\claude\c--Users-sato-Desktop---3---3\c0abf194-6a09-42ac-bc16-2cd244740c64\scratchpad\deck\img\d3-order.png">    </p:cNvPr>
           <p:cNvPicPr>
             <a:picLocks noChangeAspect="1"/>
           </p:cNvPicPr>
@@ -3938,566 +4374,14 @@
         </p:blipFill>
         <p:spPr>
           <a:xfrm>
-            <a:off x="892601" y="1325880"/>
-            <a:ext cx="10406493" cy="1554480"/>
+            <a:off x="632308" y="1371600"/>
+            <a:ext cx="10927080" cy="4256274"/>
           </a:xfrm>
           <a:prstGeom prst="rect">
             <a:avLst/>
           </a:prstGeom>
         </p:spPr>
       </p:pic>
-      <p:sp>
-        <p:nvSpPr>
-          <p:cNvPr id="9" name="Text 6"/>
-          <p:cNvSpPr txBox="1"/>
-          <p:nvPr/>
-        </p:nvSpPr>
-        <p:spPr>
-          <a:xfrm>
-            <a:off x="640080" y="3063240"/>
-            <a:ext cx="10927080" cy="320040"/>
-          </a:xfrm>
-          <a:prstGeom prst="rect">
-            <a:avLst/>
-          </a:prstGeom>
-          <a:noFill/>
-          <a:ln/>
-        </p:spPr>
-        <p:txBody>
-          <a:bodyPr wrap="square" lIns="0" tIns="0" rIns="0" bIns="0" rtlCol="0" anchor="ctr"/>
-          <a:lstStyle/>
-          <a:p>
-            <a:pPr indent="0" marL="0">
-              <a:buNone/>
-            </a:pPr>
-            <a:r>
-              <a:rPr lang="en-US" sz="1600" b="1" dirty="0">
-                <a:solidFill>
-                  <a:srgbClr val="1E2761"/>
-                </a:solidFill>
-                <a:latin typeface="Meiryo" pitchFamily="34" charset="0"/>
-                <a:ea typeface="Meiryo" pitchFamily="34" charset="-122"/>
-                <a:cs typeface="Meiryo" pitchFamily="34" charset="-120"/>
-              </a:rPr>
-              <a:t>空席は足りているのに繰り上げられないとき</a:t>
-            </a:r>
-            <a:endParaRPr lang="en-US" sz="1600" dirty="0"/>
-          </a:p>
-        </p:txBody>
-      </p:sp>
-      <p:sp>
-        <p:nvSpPr>
-          <p:cNvPr id="10" name="Shape 7"/>
-          <p:cNvSpPr/>
-          <p:nvPr/>
-        </p:nvSpPr>
-        <p:spPr>
-          <a:xfrm>
-            <a:off x="640080" y="3474720"/>
-            <a:ext cx="10927080" cy="768096"/>
-          </a:xfrm>
-          <a:prstGeom prst="roundRect">
-            <a:avLst>
-              <a:gd name="adj" fmla="val 7143"/>
-            </a:avLst>
-          </a:prstGeom>
-          <a:solidFill>
-            <a:srgbClr val="F4F7FC"/>
-          </a:solidFill>
-          <a:ln w="12700">
-            <a:solidFill>
-              <a:srgbClr val="C7D2E4"/>
-            </a:solidFill>
-            <a:prstDash val="solid"/>
-          </a:ln>
-        </p:spPr>
-      </p:sp>
-      <p:sp>
-        <p:nvSpPr>
-          <p:cNvPr id="11" name="Shape 8"/>
-          <p:cNvSpPr/>
-          <p:nvPr/>
-        </p:nvSpPr>
-        <p:spPr>
-          <a:xfrm>
-            <a:off x="804672" y="3648456"/>
-            <a:ext cx="420624" cy="420624"/>
-          </a:xfrm>
-          <a:prstGeom prst="ellipse">
-            <a:avLst/>
-          </a:prstGeom>
-          <a:solidFill>
-            <a:srgbClr val="B26A00"/>
-          </a:solidFill>
-          <a:ln/>
-        </p:spPr>
-      </p:sp>
-      <p:sp>
-        <p:nvSpPr>
-          <p:cNvPr id="12" name="Text 9"/>
-          <p:cNvSpPr txBox="1"/>
-          <p:nvPr/>
-        </p:nvSpPr>
-        <p:spPr>
-          <a:xfrm>
-            <a:off x="804672" y="3648456"/>
-            <a:ext cx="420624" cy="420624"/>
-          </a:xfrm>
-          <a:prstGeom prst="rect">
-            <a:avLst/>
-          </a:prstGeom>
-          <a:noFill/>
-          <a:ln/>
-        </p:spPr>
-        <p:txBody>
-          <a:bodyPr wrap="square" rtlCol="0" anchor="ctr"/>
-          <a:lstStyle/>
-          <a:p>
-            <a:pPr algn="ctr" indent="0" marL="0">
-              <a:buNone/>
-            </a:pPr>
-            <a:r>
-              <a:rPr lang="en-US" sz="1400" b="1" dirty="0">
-                <a:solidFill>
-                  <a:srgbClr val="FFFFFF"/>
-                </a:solidFill>
-                <a:latin typeface="Meiryo" pitchFamily="34" charset="0"/>
-                <a:ea typeface="Meiryo" pitchFamily="34" charset="-122"/>
-                <a:cs typeface="Meiryo" pitchFamily="34" charset="-120"/>
-              </a:rPr>
-              <a:t>!</a:t>
-            </a:r>
-            <a:endParaRPr lang="en-US" sz="1400" dirty="0"/>
-          </a:p>
-        </p:txBody>
-      </p:sp>
-      <p:sp>
-        <p:nvSpPr>
-          <p:cNvPr id="13" name="Text 10"/>
-          <p:cNvSpPr txBox="1"/>
-          <p:nvPr/>
-        </p:nvSpPr>
-        <p:spPr>
-          <a:xfrm>
-            <a:off x="1389888" y="3529584"/>
-            <a:ext cx="10012680" cy="658368"/>
-          </a:xfrm>
-          <a:prstGeom prst="rect">
-            <a:avLst/>
-          </a:prstGeom>
-          <a:noFill/>
-          <a:ln/>
-        </p:spPr>
-        <p:txBody>
-          <a:bodyPr wrap="square" lIns="0" tIns="0" rIns="0" bIns="0" rtlCol="0" anchor="ctr"/>
-          <a:lstStyle/>
-          <a:p>
-            <a:pPr algn="l" indent="0" marL="0">
-              <a:lnSpc>
-                <a:spcPct val="120000"/>
-              </a:lnSpc>
-              <a:buNone/>
-            </a:pPr>
-            <a:r>
-              <a:rPr lang="en-US" sz="1500" b="1" dirty="0">
-                <a:solidFill>
-                  <a:srgbClr val="1F2937"/>
-                </a:solidFill>
-                <a:latin typeface="Meiryo" pitchFamily="34" charset="0"/>
-                <a:ea typeface="Meiryo" pitchFamily="34" charset="-122"/>
-                <a:cs typeface="Meiryo" pitchFamily="34" charset="-120"/>
-              </a:rPr>
-              <a:t>この予約はキャンセル待ちではありません（既に処理済みの可能性があります）。</a:t>
-            </a:r>
-            <a:endParaRPr lang="en-US" sz="1500" dirty="0"/>
-          </a:p>
-          <a:p>
-            <a:pPr algn="l" indent="0" marL="0">
-              <a:lnSpc>
-                <a:spcPct val="120000"/>
-              </a:lnSpc>
-              <a:buNone/>
-            </a:pPr>
-            <a:r>
-              <a:rPr lang="en-US" sz="1250" dirty="0">
-                <a:solidFill>
-                  <a:srgbClr val="5B6472"/>
-                </a:solidFill>
-                <a:latin typeface="Meiryo" pitchFamily="34" charset="0"/>
-                <a:ea typeface="Meiryo" pitchFamily="34" charset="-122"/>
-                <a:cs typeface="Meiryo" pitchFamily="34" charset="-120"/>
-              </a:rPr>
-              <a:t>別の担当者が先に繰り上げたか、ご本人がキャンセルされました。画面を再読み込みしてご確認ください</a:t>
-            </a:r>
-            <a:endParaRPr lang="en-US" sz="1500" dirty="0"/>
-          </a:p>
-        </p:txBody>
-      </p:sp>
-      <p:sp>
-        <p:nvSpPr>
-          <p:cNvPr id="14" name="Shape 11"/>
-          <p:cNvSpPr/>
-          <p:nvPr/>
-        </p:nvSpPr>
-        <p:spPr>
-          <a:xfrm>
-            <a:off x="640080" y="4361688"/>
-            <a:ext cx="10927080" cy="768096"/>
-          </a:xfrm>
-          <a:prstGeom prst="roundRect">
-            <a:avLst>
-              <a:gd name="adj" fmla="val 7143"/>
-            </a:avLst>
-          </a:prstGeom>
-          <a:solidFill>
-            <a:srgbClr val="F4F7FC"/>
-          </a:solidFill>
-          <a:ln w="12700">
-            <a:solidFill>
-              <a:srgbClr val="C7D2E4"/>
-            </a:solidFill>
-            <a:prstDash val="solid"/>
-          </a:ln>
-        </p:spPr>
-      </p:sp>
-      <p:sp>
-        <p:nvSpPr>
-          <p:cNvPr id="15" name="Shape 12"/>
-          <p:cNvSpPr/>
-          <p:nvPr/>
-        </p:nvSpPr>
-        <p:spPr>
-          <a:xfrm>
-            <a:off x="804672" y="4535424"/>
-            <a:ext cx="420624" cy="420624"/>
-          </a:xfrm>
-          <a:prstGeom prst="ellipse">
-            <a:avLst/>
-          </a:prstGeom>
-          <a:solidFill>
-            <a:srgbClr val="B26A00"/>
-          </a:solidFill>
-          <a:ln/>
-        </p:spPr>
-      </p:sp>
-      <p:sp>
-        <p:nvSpPr>
-          <p:cNvPr id="16" name="Text 13"/>
-          <p:cNvSpPr txBox="1"/>
-          <p:nvPr/>
-        </p:nvSpPr>
-        <p:spPr>
-          <a:xfrm>
-            <a:off x="804672" y="4535424"/>
-            <a:ext cx="420624" cy="420624"/>
-          </a:xfrm>
-          <a:prstGeom prst="rect">
-            <a:avLst/>
-          </a:prstGeom>
-          <a:noFill/>
-          <a:ln/>
-        </p:spPr>
-        <p:txBody>
-          <a:bodyPr wrap="square" rtlCol="0" anchor="ctr"/>
-          <a:lstStyle/>
-          <a:p>
-            <a:pPr algn="ctr" indent="0" marL="0">
-              <a:buNone/>
-            </a:pPr>
-            <a:r>
-              <a:rPr lang="en-US" sz="1400" b="1" dirty="0">
-                <a:solidFill>
-                  <a:srgbClr val="FFFFFF"/>
-                </a:solidFill>
-                <a:latin typeface="Meiryo" pitchFamily="34" charset="0"/>
-                <a:ea typeface="Meiryo" pitchFamily="34" charset="-122"/>
-                <a:cs typeface="Meiryo" pitchFamily="34" charset="-120"/>
-              </a:rPr>
-              <a:t>!</a:t>
-            </a:r>
-            <a:endParaRPr lang="en-US" sz="1400" dirty="0"/>
-          </a:p>
-        </p:txBody>
-      </p:sp>
-      <p:sp>
-        <p:nvSpPr>
-          <p:cNvPr id="17" name="Text 14"/>
-          <p:cNvSpPr txBox="1"/>
-          <p:nvPr/>
-        </p:nvSpPr>
-        <p:spPr>
-          <a:xfrm>
-            <a:off x="1389888" y="4416552"/>
-            <a:ext cx="10012680" cy="658368"/>
-          </a:xfrm>
-          <a:prstGeom prst="rect">
-            <a:avLst/>
-          </a:prstGeom>
-          <a:noFill/>
-          <a:ln/>
-        </p:spPr>
-        <p:txBody>
-          <a:bodyPr wrap="square" lIns="0" tIns="0" rIns="0" bIns="0" rtlCol="0" anchor="ctr"/>
-          <a:lstStyle/>
-          <a:p>
-            <a:pPr algn="l" indent="0" marL="0">
-              <a:lnSpc>
-                <a:spcPct val="120000"/>
-              </a:lnSpc>
-              <a:buNone/>
-            </a:pPr>
-            <a:r>
-              <a:rPr lang="en-US" sz="1500" b="1" dirty="0">
-                <a:solidFill>
-                  <a:srgbClr val="1F2937"/>
-                </a:solidFill>
-                <a:latin typeface="Meiryo" pitchFamily="34" charset="0"/>
-                <a:ea typeface="Meiryo" pitchFamily="34" charset="-122"/>
-                <a:cs typeface="Meiryo" pitchFamily="34" charset="-120"/>
-              </a:rPr>
-              <a:t>この方は同じ体験プログラムの別の回を既にご予約済みです。</a:t>
-            </a:r>
-            <a:endParaRPr lang="en-US" sz="1500" dirty="0"/>
-          </a:p>
-          <a:p>
-            <a:pPr algn="l" indent="0" marL="0">
-              <a:lnSpc>
-                <a:spcPct val="120000"/>
-              </a:lnSpc>
-              <a:buNone/>
-            </a:pPr>
-            <a:r>
-              <a:rPr lang="en-US" sz="1250" dirty="0">
-                <a:solidFill>
-                  <a:srgbClr val="5B6472"/>
-                </a:solidFill>
-                <a:latin typeface="Meiryo" pitchFamily="34" charset="0"/>
-                <a:ea typeface="Meiryo" pitchFamily="34" charset="-122"/>
-                <a:cs typeface="Meiryo" pitchFamily="34" charset="-120"/>
-              </a:rPr>
-              <a:t>お待ちの間に別の回を予約されています。そちらでご参加いただくのが基本です</a:t>
-            </a:r>
-            <a:endParaRPr lang="en-US" sz="1500" dirty="0"/>
-          </a:p>
-        </p:txBody>
-      </p:sp>
-      <p:sp>
-        <p:nvSpPr>
-          <p:cNvPr id="18" name="Shape 15"/>
-          <p:cNvSpPr/>
-          <p:nvPr/>
-        </p:nvSpPr>
-        <p:spPr>
-          <a:xfrm>
-            <a:off x="640080" y="5248656"/>
-            <a:ext cx="10927080" cy="768096"/>
-          </a:xfrm>
-          <a:prstGeom prst="roundRect">
-            <a:avLst>
-              <a:gd name="adj" fmla="val 7143"/>
-            </a:avLst>
-          </a:prstGeom>
-          <a:solidFill>
-            <a:srgbClr val="F4F7FC"/>
-          </a:solidFill>
-          <a:ln w="12700">
-            <a:solidFill>
-              <a:srgbClr val="C7D2E4"/>
-            </a:solidFill>
-            <a:prstDash val="solid"/>
-          </a:ln>
-        </p:spPr>
-      </p:sp>
-      <p:sp>
-        <p:nvSpPr>
-          <p:cNvPr id="19" name="Shape 16"/>
-          <p:cNvSpPr/>
-          <p:nvPr/>
-        </p:nvSpPr>
-        <p:spPr>
-          <a:xfrm>
-            <a:off x="804672" y="5422392"/>
-            <a:ext cx="420624" cy="420624"/>
-          </a:xfrm>
-          <a:prstGeom prst="ellipse">
-            <a:avLst/>
-          </a:prstGeom>
-          <a:solidFill>
-            <a:srgbClr val="B26A00"/>
-          </a:solidFill>
-          <a:ln/>
-        </p:spPr>
-      </p:sp>
-      <p:sp>
-        <p:nvSpPr>
-          <p:cNvPr id="20" name="Text 17"/>
-          <p:cNvSpPr txBox="1"/>
-          <p:nvPr/>
-        </p:nvSpPr>
-        <p:spPr>
-          <a:xfrm>
-            <a:off x="804672" y="5422392"/>
-            <a:ext cx="420624" cy="420624"/>
-          </a:xfrm>
-          <a:prstGeom prst="rect">
-            <a:avLst/>
-          </a:prstGeom>
-          <a:noFill/>
-          <a:ln/>
-        </p:spPr>
-        <p:txBody>
-          <a:bodyPr wrap="square" rtlCol="0" anchor="ctr"/>
-          <a:lstStyle/>
-          <a:p>
-            <a:pPr algn="ctr" indent="0" marL="0">
-              <a:buNone/>
-            </a:pPr>
-            <a:r>
-              <a:rPr lang="en-US" sz="1400" b="1" dirty="0">
-                <a:solidFill>
-                  <a:srgbClr val="FFFFFF"/>
-                </a:solidFill>
-                <a:latin typeface="Meiryo" pitchFamily="34" charset="0"/>
-                <a:ea typeface="Meiryo" pitchFamily="34" charset="-122"/>
-                <a:cs typeface="Meiryo" pitchFamily="34" charset="-120"/>
-              </a:rPr>
-              <a:t>!</a:t>
-            </a:r>
-            <a:endParaRPr lang="en-US" sz="1400" dirty="0"/>
-          </a:p>
-        </p:txBody>
-      </p:sp>
-      <p:sp>
-        <p:nvSpPr>
-          <p:cNvPr id="21" name="Text 18"/>
-          <p:cNvSpPr txBox="1"/>
-          <p:nvPr/>
-        </p:nvSpPr>
-        <p:spPr>
-          <a:xfrm>
-            <a:off x="1389888" y="5303520"/>
-            <a:ext cx="10012680" cy="658368"/>
-          </a:xfrm>
-          <a:prstGeom prst="rect">
-            <a:avLst/>
-          </a:prstGeom>
-          <a:noFill/>
-          <a:ln/>
-        </p:spPr>
-        <p:txBody>
-          <a:bodyPr wrap="square" lIns="0" tIns="0" rIns="0" bIns="0" rtlCol="0" anchor="ctr"/>
-          <a:lstStyle/>
-          <a:p>
-            <a:pPr algn="l" indent="0" marL="0">
-              <a:lnSpc>
-                <a:spcPct val="120000"/>
-              </a:lnSpc>
-              <a:buNone/>
-            </a:pPr>
-            <a:r>
-              <a:rPr lang="en-US" sz="1500" b="1" dirty="0">
-                <a:solidFill>
-                  <a:srgbClr val="1F2937"/>
-                </a:solidFill>
-                <a:latin typeface="Meiryo" pitchFamily="34" charset="0"/>
-                <a:ea typeface="Meiryo" pitchFamily="34" charset="-122"/>
-                <a:cs typeface="Meiryo" pitchFamily="34" charset="-120"/>
-              </a:rPr>
-              <a:t>この方は時間帯の重なる予約を既に持っています（◯◯「△△」）。</a:t>
-            </a:r>
-            <a:endParaRPr lang="en-US" sz="1500" dirty="0"/>
-          </a:p>
-          <a:p>
-            <a:pPr algn="l" indent="0" marL="0">
-              <a:lnSpc>
-                <a:spcPct val="120000"/>
-              </a:lnSpc>
-              <a:buNone/>
-            </a:pPr>
-            <a:r>
-              <a:rPr lang="en-US" sz="1250" dirty="0">
-                <a:solidFill>
-                  <a:srgbClr val="5B6472"/>
-                </a:solidFill>
-                <a:latin typeface="Meiryo" pitchFamily="34" charset="0"/>
-                <a:ea typeface="Meiryo" pitchFamily="34" charset="-122"/>
-                <a:cs typeface="Meiryo" pitchFamily="34" charset="-120"/>
-              </a:rPr>
-              <a:t>他社の体験と重なっています。どちらかをご本人にキャンセルしていただく必要があります</a:t>
-            </a:r>
-            <a:endParaRPr lang="en-US" sz="1500" dirty="0"/>
-          </a:p>
-        </p:txBody>
-      </p:sp>
-      <p:sp>
-        <p:nvSpPr>
-          <p:cNvPr id="22" name="Shape 19"/>
-          <p:cNvSpPr/>
-          <p:nvPr/>
-        </p:nvSpPr>
-        <p:spPr>
-          <a:xfrm>
-            <a:off x="640080" y="5989320"/>
-            <a:ext cx="10927080" cy="457200"/>
-          </a:xfrm>
-          <a:prstGeom prst="roundRect">
-            <a:avLst>
-              <a:gd name="adj" fmla="val 16000"/>
-            </a:avLst>
-          </a:prstGeom>
-          <a:solidFill>
-            <a:srgbClr val="CADCFC"/>
-          </a:solidFill>
-          <a:ln w="12700">
-            <a:solidFill>
-              <a:srgbClr val="CADCFC"/>
-            </a:solidFill>
-            <a:prstDash val="solid"/>
-          </a:ln>
-        </p:spPr>
-      </p:sp>
-      <p:sp>
-        <p:nvSpPr>
-          <p:cNvPr id="23" name="Text 20"/>
-          <p:cNvSpPr txBox="1"/>
-          <p:nvPr/>
-        </p:nvSpPr>
-        <p:spPr>
-          <a:xfrm>
-            <a:off x="841248" y="6099048"/>
-            <a:ext cx="10524744" cy="237744"/>
-          </a:xfrm>
-          <a:prstGeom prst="rect">
-            <a:avLst/>
-          </a:prstGeom>
-          <a:noFill/>
-          <a:ln/>
-        </p:spPr>
-        <p:txBody>
-          <a:bodyPr wrap="square" lIns="0" tIns="0" rIns="0" bIns="0" rtlCol="0" anchor="ctr"/>
-          <a:lstStyle/>
-          <a:p>
-            <a:pPr algn="l" indent="0" marL="0">
-              <a:lnSpc>
-                <a:spcPct val="125000"/>
-              </a:lnSpc>
-              <a:buNone/>
-            </a:pPr>
-            <a:r>
-              <a:rPr lang="en-US" sz="1250" b="1" dirty="0">
-                <a:solidFill>
-                  <a:srgbClr val="1E2761"/>
-                </a:solidFill>
-                <a:latin typeface="Meiryo" pitchFamily="34" charset="0"/>
-                <a:ea typeface="Meiryo" pitchFamily="34" charset="-122"/>
-                <a:cs typeface="Meiryo" pitchFamily="34" charset="-120"/>
-              </a:rPr>
-              <a:t>いずれもシステムが二重予約を防いでいるためです。無理に通す方法はありません。</a:t>
-            </a:r>
-            <a:endParaRPr lang="en-US" sz="1250" dirty="0"/>
-          </a:p>
-        </p:txBody>
-      </p:sp>
     </p:spTree>
   </p:cSld>
   <p:clrMapOvr>
@@ -4700,7 +4584,7 @@
                 <a:ea typeface="Meiryo" pitchFamily="34" charset="-122"/>
                 <a:cs typeface="Meiryo" pitchFamily="34" charset="-120"/>
               </a:rPr>
-              <a:t>中止・延期のお知らせを送る</a:t>
+              <a:t>繰り上げたあと／繰り上げできないとき</a:t>
             </a:r>
             <a:endParaRPr lang="en-US" sz="2800" dirty="0"/>
           </a:p>
@@ -4739,7 +4623,7 @@
                 <a:ea typeface="Meiryo" pitchFamily="34" charset="-122"/>
                 <a:cs typeface="Meiryo" pitchFamily="34" charset="-120"/>
               </a:rPr>
-              <a:t>自社の申込者にまとめてメールを送れます</a:t>
+              <a:t>成功すると、ご本人に確定メールが送られます</a:t>
             </a:r>
             <a:endParaRPr lang="en-US" sz="1400" dirty="0"/>
           </a:p>
@@ -4747,7 +4631,7 @@
       </p:sp>
       <p:pic>
         <p:nvPicPr>
-          <p:cNvPr id="8" name="Image 0" descr="C:\Users\sato\AppData\Local\Temp\claude\c--Users-sato-Desktop---3---3\c0abf194-6a09-42ac-bc16-2cd244740c64\scratchpad\deck\img\c-bulk-to.png">    </p:cNvPr>
+          <p:cNvPr id="8" name="Image 0" descr="C:\Users\sato\AppData\Local\Temp\claude\c--Users-sato-Desktop---3---3\c0abf194-6a09-42ac-bc16-2cd244740c64\scratchpad\deck\img\c-promoted.png">    </p:cNvPr>
           <p:cNvPicPr>
             <a:picLocks noChangeAspect="1"/>
           </p:cNvPicPr>
@@ -4761,8 +4645,8 @@
         </p:blipFill>
         <p:spPr>
           <a:xfrm>
-            <a:off x="640080" y="1325880"/>
-            <a:ext cx="6675120" cy="3781511"/>
+            <a:off x="892601" y="1325880"/>
+            <a:ext cx="10406493" cy="1554480"/>
           </a:xfrm>
           <a:prstGeom prst="rect">
             <a:avLst/>
@@ -4771,18 +4655,501 @@
       </p:pic>
       <p:sp>
         <p:nvSpPr>
-          <p:cNvPr id="9" name="Shape 6"/>
+          <p:cNvPr id="9" name="Text 6"/>
+          <p:cNvSpPr txBox="1"/>
+          <p:nvPr/>
+        </p:nvSpPr>
+        <p:spPr>
+          <a:xfrm>
+            <a:off x="640080" y="3063240"/>
+            <a:ext cx="10927080" cy="320040"/>
+          </a:xfrm>
+          <a:prstGeom prst="rect">
+            <a:avLst/>
+          </a:prstGeom>
+          <a:noFill/>
+          <a:ln/>
+        </p:spPr>
+        <p:txBody>
+          <a:bodyPr wrap="square" lIns="0" tIns="0" rIns="0" bIns="0" rtlCol="0" anchor="ctr"/>
+          <a:lstStyle/>
+          <a:p>
+            <a:pPr indent="0" marL="0">
+              <a:buNone/>
+            </a:pPr>
+            <a:r>
+              <a:rPr lang="en-US" sz="1600" b="1" dirty="0">
+                <a:solidFill>
+                  <a:srgbClr val="1E2761"/>
+                </a:solidFill>
+                <a:latin typeface="Meiryo" pitchFamily="34" charset="0"/>
+                <a:ea typeface="Meiryo" pitchFamily="34" charset="-122"/>
+                <a:cs typeface="Meiryo" pitchFamily="34" charset="-120"/>
+              </a:rPr>
+              <a:t>空席は足りているのに繰り上げられないとき</a:t>
+            </a:r>
+            <a:endParaRPr lang="en-US" sz="1600" dirty="0"/>
+          </a:p>
+        </p:txBody>
+      </p:sp>
+      <p:sp>
+        <p:nvSpPr>
+          <p:cNvPr id="10" name="Shape 7"/>
           <p:cNvSpPr/>
           <p:nvPr/>
         </p:nvSpPr>
         <p:spPr>
           <a:xfrm>
-            <a:off x="7589520" y="1463040"/>
-            <a:ext cx="3977640" cy="1325880"/>
+            <a:off x="640080" y="3474720"/>
+            <a:ext cx="10927080" cy="768096"/>
           </a:xfrm>
           <a:prstGeom prst="roundRect">
             <a:avLst>
-              <a:gd name="adj" fmla="val 5517"/>
+              <a:gd name="adj" fmla="val 7143"/>
+            </a:avLst>
+          </a:prstGeom>
+          <a:solidFill>
+            <a:srgbClr val="F4F7FC"/>
+          </a:solidFill>
+          <a:ln w="12700">
+            <a:solidFill>
+              <a:srgbClr val="C7D2E4"/>
+            </a:solidFill>
+            <a:prstDash val="solid"/>
+          </a:ln>
+        </p:spPr>
+      </p:sp>
+      <p:sp>
+        <p:nvSpPr>
+          <p:cNvPr id="11" name="Shape 8"/>
+          <p:cNvSpPr/>
+          <p:nvPr/>
+        </p:nvSpPr>
+        <p:spPr>
+          <a:xfrm>
+            <a:off x="804672" y="3648456"/>
+            <a:ext cx="420624" cy="420624"/>
+          </a:xfrm>
+          <a:prstGeom prst="ellipse">
+            <a:avLst/>
+          </a:prstGeom>
+          <a:solidFill>
+            <a:srgbClr val="B26A00"/>
+          </a:solidFill>
+          <a:ln/>
+        </p:spPr>
+      </p:sp>
+      <p:sp>
+        <p:nvSpPr>
+          <p:cNvPr id="12" name="Text 9"/>
+          <p:cNvSpPr txBox="1"/>
+          <p:nvPr/>
+        </p:nvSpPr>
+        <p:spPr>
+          <a:xfrm>
+            <a:off x="804672" y="3648456"/>
+            <a:ext cx="420624" cy="420624"/>
+          </a:xfrm>
+          <a:prstGeom prst="rect">
+            <a:avLst/>
+          </a:prstGeom>
+          <a:noFill/>
+          <a:ln/>
+        </p:spPr>
+        <p:txBody>
+          <a:bodyPr wrap="square" rtlCol="0" anchor="ctr"/>
+          <a:lstStyle/>
+          <a:p>
+            <a:pPr algn="ctr" indent="0" marL="0">
+              <a:buNone/>
+            </a:pPr>
+            <a:r>
+              <a:rPr lang="en-US" sz="1400" b="1" dirty="0">
+                <a:solidFill>
+                  <a:srgbClr val="FFFFFF"/>
+                </a:solidFill>
+                <a:latin typeface="Meiryo" pitchFamily="34" charset="0"/>
+                <a:ea typeface="Meiryo" pitchFamily="34" charset="-122"/>
+                <a:cs typeface="Meiryo" pitchFamily="34" charset="-120"/>
+              </a:rPr>
+              <a:t>!</a:t>
+            </a:r>
+            <a:endParaRPr lang="en-US" sz="1400" dirty="0"/>
+          </a:p>
+        </p:txBody>
+      </p:sp>
+      <p:sp>
+        <p:nvSpPr>
+          <p:cNvPr id="13" name="Text 10"/>
+          <p:cNvSpPr txBox="1"/>
+          <p:nvPr/>
+        </p:nvSpPr>
+        <p:spPr>
+          <a:xfrm>
+            <a:off x="1389888" y="3529584"/>
+            <a:ext cx="10012680" cy="658368"/>
+          </a:xfrm>
+          <a:prstGeom prst="rect">
+            <a:avLst/>
+          </a:prstGeom>
+          <a:noFill/>
+          <a:ln/>
+        </p:spPr>
+        <p:txBody>
+          <a:bodyPr wrap="square" lIns="0" tIns="0" rIns="0" bIns="0" rtlCol="0" anchor="ctr"/>
+          <a:lstStyle/>
+          <a:p>
+            <a:pPr algn="l" indent="0" marL="0">
+              <a:lnSpc>
+                <a:spcPct val="120000"/>
+              </a:lnSpc>
+              <a:buNone/>
+            </a:pPr>
+            <a:r>
+              <a:rPr lang="en-US" sz="1500" b="1" dirty="0">
+                <a:solidFill>
+                  <a:srgbClr val="1F2937"/>
+                </a:solidFill>
+                <a:latin typeface="Meiryo" pitchFamily="34" charset="0"/>
+                <a:ea typeface="Meiryo" pitchFamily="34" charset="-122"/>
+                <a:cs typeface="Meiryo" pitchFamily="34" charset="-120"/>
+              </a:rPr>
+              <a:t>この予約はキャンセル待ちではありません（既に処理済みの可能性があります）。</a:t>
+            </a:r>
+            <a:endParaRPr lang="en-US" sz="1500" dirty="0"/>
+          </a:p>
+          <a:p>
+            <a:pPr algn="l" indent="0" marL="0">
+              <a:lnSpc>
+                <a:spcPct val="120000"/>
+              </a:lnSpc>
+              <a:buNone/>
+            </a:pPr>
+            <a:r>
+              <a:rPr lang="en-US" sz="1250" dirty="0">
+                <a:solidFill>
+                  <a:srgbClr val="5B6472"/>
+                </a:solidFill>
+                <a:latin typeface="Meiryo" pitchFamily="34" charset="0"/>
+                <a:ea typeface="Meiryo" pitchFamily="34" charset="-122"/>
+                <a:cs typeface="Meiryo" pitchFamily="34" charset="-120"/>
+              </a:rPr>
+              <a:t>別の担当者が先に繰り上げたか、ご本人がキャンセルされました。画面を再読み込みしてご確認ください</a:t>
+            </a:r>
+            <a:endParaRPr lang="en-US" sz="1500" dirty="0"/>
+          </a:p>
+        </p:txBody>
+      </p:sp>
+      <p:sp>
+        <p:nvSpPr>
+          <p:cNvPr id="14" name="Shape 11"/>
+          <p:cNvSpPr/>
+          <p:nvPr/>
+        </p:nvSpPr>
+        <p:spPr>
+          <a:xfrm>
+            <a:off x="640080" y="4361688"/>
+            <a:ext cx="10927080" cy="768096"/>
+          </a:xfrm>
+          <a:prstGeom prst="roundRect">
+            <a:avLst>
+              <a:gd name="adj" fmla="val 7143"/>
+            </a:avLst>
+          </a:prstGeom>
+          <a:solidFill>
+            <a:srgbClr val="F4F7FC"/>
+          </a:solidFill>
+          <a:ln w="12700">
+            <a:solidFill>
+              <a:srgbClr val="C7D2E4"/>
+            </a:solidFill>
+            <a:prstDash val="solid"/>
+          </a:ln>
+        </p:spPr>
+      </p:sp>
+      <p:sp>
+        <p:nvSpPr>
+          <p:cNvPr id="15" name="Shape 12"/>
+          <p:cNvSpPr/>
+          <p:nvPr/>
+        </p:nvSpPr>
+        <p:spPr>
+          <a:xfrm>
+            <a:off x="804672" y="4535424"/>
+            <a:ext cx="420624" cy="420624"/>
+          </a:xfrm>
+          <a:prstGeom prst="ellipse">
+            <a:avLst/>
+          </a:prstGeom>
+          <a:solidFill>
+            <a:srgbClr val="B26A00"/>
+          </a:solidFill>
+          <a:ln/>
+        </p:spPr>
+      </p:sp>
+      <p:sp>
+        <p:nvSpPr>
+          <p:cNvPr id="16" name="Text 13"/>
+          <p:cNvSpPr txBox="1"/>
+          <p:nvPr/>
+        </p:nvSpPr>
+        <p:spPr>
+          <a:xfrm>
+            <a:off x="804672" y="4535424"/>
+            <a:ext cx="420624" cy="420624"/>
+          </a:xfrm>
+          <a:prstGeom prst="rect">
+            <a:avLst/>
+          </a:prstGeom>
+          <a:noFill/>
+          <a:ln/>
+        </p:spPr>
+        <p:txBody>
+          <a:bodyPr wrap="square" rtlCol="0" anchor="ctr"/>
+          <a:lstStyle/>
+          <a:p>
+            <a:pPr algn="ctr" indent="0" marL="0">
+              <a:buNone/>
+            </a:pPr>
+            <a:r>
+              <a:rPr lang="en-US" sz="1400" b="1" dirty="0">
+                <a:solidFill>
+                  <a:srgbClr val="FFFFFF"/>
+                </a:solidFill>
+                <a:latin typeface="Meiryo" pitchFamily="34" charset="0"/>
+                <a:ea typeface="Meiryo" pitchFamily="34" charset="-122"/>
+                <a:cs typeface="Meiryo" pitchFamily="34" charset="-120"/>
+              </a:rPr>
+              <a:t>!</a:t>
+            </a:r>
+            <a:endParaRPr lang="en-US" sz="1400" dirty="0"/>
+          </a:p>
+        </p:txBody>
+      </p:sp>
+      <p:sp>
+        <p:nvSpPr>
+          <p:cNvPr id="17" name="Text 14"/>
+          <p:cNvSpPr txBox="1"/>
+          <p:nvPr/>
+        </p:nvSpPr>
+        <p:spPr>
+          <a:xfrm>
+            <a:off x="1389888" y="4416552"/>
+            <a:ext cx="10012680" cy="658368"/>
+          </a:xfrm>
+          <a:prstGeom prst="rect">
+            <a:avLst/>
+          </a:prstGeom>
+          <a:noFill/>
+          <a:ln/>
+        </p:spPr>
+        <p:txBody>
+          <a:bodyPr wrap="square" lIns="0" tIns="0" rIns="0" bIns="0" rtlCol="0" anchor="ctr"/>
+          <a:lstStyle/>
+          <a:p>
+            <a:pPr algn="l" indent="0" marL="0">
+              <a:lnSpc>
+                <a:spcPct val="120000"/>
+              </a:lnSpc>
+              <a:buNone/>
+            </a:pPr>
+            <a:r>
+              <a:rPr lang="en-US" sz="1500" b="1" dirty="0">
+                <a:solidFill>
+                  <a:srgbClr val="1F2937"/>
+                </a:solidFill>
+                <a:latin typeface="Meiryo" pitchFamily="34" charset="0"/>
+                <a:ea typeface="Meiryo" pitchFamily="34" charset="-122"/>
+                <a:cs typeface="Meiryo" pitchFamily="34" charset="-120"/>
+              </a:rPr>
+              <a:t>この方は同じ体験プログラムの別の回を既にご予約済みです。</a:t>
+            </a:r>
+            <a:endParaRPr lang="en-US" sz="1500" dirty="0"/>
+          </a:p>
+          <a:p>
+            <a:pPr algn="l" indent="0" marL="0">
+              <a:lnSpc>
+                <a:spcPct val="120000"/>
+              </a:lnSpc>
+              <a:buNone/>
+            </a:pPr>
+            <a:r>
+              <a:rPr lang="en-US" sz="1250" dirty="0">
+                <a:solidFill>
+                  <a:srgbClr val="5B6472"/>
+                </a:solidFill>
+                <a:latin typeface="Meiryo" pitchFamily="34" charset="0"/>
+                <a:ea typeface="Meiryo" pitchFamily="34" charset="-122"/>
+                <a:cs typeface="Meiryo" pitchFamily="34" charset="-120"/>
+              </a:rPr>
+              <a:t>お待ちの間に別の回を予約されています。そちらでご参加いただくのが基本です</a:t>
+            </a:r>
+            <a:endParaRPr lang="en-US" sz="1500" dirty="0"/>
+          </a:p>
+        </p:txBody>
+      </p:sp>
+      <p:sp>
+        <p:nvSpPr>
+          <p:cNvPr id="18" name="Shape 15"/>
+          <p:cNvSpPr/>
+          <p:nvPr/>
+        </p:nvSpPr>
+        <p:spPr>
+          <a:xfrm>
+            <a:off x="640080" y="5248656"/>
+            <a:ext cx="10927080" cy="768096"/>
+          </a:xfrm>
+          <a:prstGeom prst="roundRect">
+            <a:avLst>
+              <a:gd name="adj" fmla="val 7143"/>
+            </a:avLst>
+          </a:prstGeom>
+          <a:solidFill>
+            <a:srgbClr val="F4F7FC"/>
+          </a:solidFill>
+          <a:ln w="12700">
+            <a:solidFill>
+              <a:srgbClr val="C7D2E4"/>
+            </a:solidFill>
+            <a:prstDash val="solid"/>
+          </a:ln>
+        </p:spPr>
+      </p:sp>
+      <p:sp>
+        <p:nvSpPr>
+          <p:cNvPr id="19" name="Shape 16"/>
+          <p:cNvSpPr/>
+          <p:nvPr/>
+        </p:nvSpPr>
+        <p:spPr>
+          <a:xfrm>
+            <a:off x="804672" y="5422392"/>
+            <a:ext cx="420624" cy="420624"/>
+          </a:xfrm>
+          <a:prstGeom prst="ellipse">
+            <a:avLst/>
+          </a:prstGeom>
+          <a:solidFill>
+            <a:srgbClr val="B26A00"/>
+          </a:solidFill>
+          <a:ln/>
+        </p:spPr>
+      </p:sp>
+      <p:sp>
+        <p:nvSpPr>
+          <p:cNvPr id="20" name="Text 17"/>
+          <p:cNvSpPr txBox="1"/>
+          <p:nvPr/>
+        </p:nvSpPr>
+        <p:spPr>
+          <a:xfrm>
+            <a:off x="804672" y="5422392"/>
+            <a:ext cx="420624" cy="420624"/>
+          </a:xfrm>
+          <a:prstGeom prst="rect">
+            <a:avLst/>
+          </a:prstGeom>
+          <a:noFill/>
+          <a:ln/>
+        </p:spPr>
+        <p:txBody>
+          <a:bodyPr wrap="square" rtlCol="0" anchor="ctr"/>
+          <a:lstStyle/>
+          <a:p>
+            <a:pPr algn="ctr" indent="0" marL="0">
+              <a:buNone/>
+            </a:pPr>
+            <a:r>
+              <a:rPr lang="en-US" sz="1400" b="1" dirty="0">
+                <a:solidFill>
+                  <a:srgbClr val="FFFFFF"/>
+                </a:solidFill>
+                <a:latin typeface="Meiryo" pitchFamily="34" charset="0"/>
+                <a:ea typeface="Meiryo" pitchFamily="34" charset="-122"/>
+                <a:cs typeface="Meiryo" pitchFamily="34" charset="-120"/>
+              </a:rPr>
+              <a:t>!</a:t>
+            </a:r>
+            <a:endParaRPr lang="en-US" sz="1400" dirty="0"/>
+          </a:p>
+        </p:txBody>
+      </p:sp>
+      <p:sp>
+        <p:nvSpPr>
+          <p:cNvPr id="21" name="Text 18"/>
+          <p:cNvSpPr txBox="1"/>
+          <p:nvPr/>
+        </p:nvSpPr>
+        <p:spPr>
+          <a:xfrm>
+            <a:off x="1389888" y="5303520"/>
+            <a:ext cx="10012680" cy="658368"/>
+          </a:xfrm>
+          <a:prstGeom prst="rect">
+            <a:avLst/>
+          </a:prstGeom>
+          <a:noFill/>
+          <a:ln/>
+        </p:spPr>
+        <p:txBody>
+          <a:bodyPr wrap="square" lIns="0" tIns="0" rIns="0" bIns="0" rtlCol="0" anchor="ctr"/>
+          <a:lstStyle/>
+          <a:p>
+            <a:pPr algn="l" indent="0" marL="0">
+              <a:lnSpc>
+                <a:spcPct val="120000"/>
+              </a:lnSpc>
+              <a:buNone/>
+            </a:pPr>
+            <a:r>
+              <a:rPr lang="en-US" sz="1500" b="1" dirty="0">
+                <a:solidFill>
+                  <a:srgbClr val="1F2937"/>
+                </a:solidFill>
+                <a:latin typeface="Meiryo" pitchFamily="34" charset="0"/>
+                <a:ea typeface="Meiryo" pitchFamily="34" charset="-122"/>
+                <a:cs typeface="Meiryo" pitchFamily="34" charset="-120"/>
+              </a:rPr>
+              <a:t>この方は時間帯の重なる予約を既に持っています（◯◯「△△」）。</a:t>
+            </a:r>
+            <a:endParaRPr lang="en-US" sz="1500" dirty="0"/>
+          </a:p>
+          <a:p>
+            <a:pPr algn="l" indent="0" marL="0">
+              <a:lnSpc>
+                <a:spcPct val="120000"/>
+              </a:lnSpc>
+              <a:buNone/>
+            </a:pPr>
+            <a:r>
+              <a:rPr lang="en-US" sz="1250" dirty="0">
+                <a:solidFill>
+                  <a:srgbClr val="5B6472"/>
+                </a:solidFill>
+                <a:latin typeface="Meiryo" pitchFamily="34" charset="0"/>
+                <a:ea typeface="Meiryo" pitchFamily="34" charset="-122"/>
+                <a:cs typeface="Meiryo" pitchFamily="34" charset="-120"/>
+              </a:rPr>
+              <a:t>他社の体験と重なっています。どちらかをご本人にキャンセルしていただく必要があります</a:t>
+            </a:r>
+            <a:endParaRPr lang="en-US" sz="1500" dirty="0"/>
+          </a:p>
+        </p:txBody>
+      </p:sp>
+      <p:sp>
+        <p:nvSpPr>
+          <p:cNvPr id="22" name="Shape 19"/>
+          <p:cNvSpPr/>
+          <p:nvPr/>
+        </p:nvSpPr>
+        <p:spPr>
+          <a:xfrm>
+            <a:off x="640080" y="5989320"/>
+            <a:ext cx="10927080" cy="457200"/>
+          </a:xfrm>
+          <a:prstGeom prst="roundRect">
+            <a:avLst>
+              <a:gd name="adj" fmla="val 16000"/>
             </a:avLst>
           </a:prstGeom>
           <a:solidFill>
@@ -4798,14 +5165,14 @@
       </p:sp>
       <p:sp>
         <p:nvSpPr>
-          <p:cNvPr id="10" name="Text 7"/>
-          <p:cNvSpPr txBox="1"/>
-          <p:nvPr/>
-        </p:nvSpPr>
-        <p:spPr>
-          <a:xfrm>
-            <a:off x="7790688" y="1572768"/>
-            <a:ext cx="3575304" cy="1106424"/>
+          <p:cNvPr id="23" name="Text 20"/>
+          <p:cNvSpPr txBox="1"/>
+          <p:nvPr/>
+        </p:nvSpPr>
+        <p:spPr>
+          <a:xfrm>
+            <a:off x="841248" y="6099048"/>
+            <a:ext cx="10524744" cy="237744"/>
           </a:xfrm>
           <a:prstGeom prst="rect">
             <a:avLst/>
@@ -4824,7 +5191,7 @@
               <a:buNone/>
             </a:pPr>
             <a:r>
-              <a:rPr lang="en-US" sz="1500" b="1" dirty="0">
+              <a:rPr lang="en-US" sz="1250" b="1" dirty="0">
                 <a:solidFill>
                   <a:srgbClr val="1E2761"/>
                 </a:solidFill>
@@ -4832,287 +5199,9 @@
                 <a:ea typeface="Meiryo" pitchFamily="34" charset="-122"/>
                 <a:cs typeface="Meiryo" pitchFamily="34" charset="-120"/>
               </a:rPr>
-              <a:t>1 日だけ中止なら「開催回を指定」</a:t>
-            </a:r>
-            <a:endParaRPr lang="en-US" sz="1500" dirty="0"/>
-          </a:p>
-          <a:p>
-            <a:pPr algn="l" indent="0" marL="0">
-              <a:lnSpc>
-                <a:spcPct val="125000"/>
-              </a:lnSpc>
-              <a:buNone/>
-            </a:pPr>
-            <a:r>
-              <a:rPr lang="en-US" sz="1250" dirty="0">
-                <a:solidFill>
-                  <a:srgbClr val="1E2761"/>
-                </a:solidFill>
-                <a:latin typeface="Meiryo" pitchFamily="34" charset="0"/>
-                <a:ea typeface="Meiryo" pitchFamily="34" charset="-122"/>
-                <a:cs typeface="Meiryo" pitchFamily="34" charset="-120"/>
-              </a:rPr>
-              <a:t>関係のない回の申込者に</a:t>
-            </a:r>
-            <a:endParaRPr lang="en-US" sz="1500" dirty="0"/>
-          </a:p>
-          <a:p>
-            <a:pPr algn="l" indent="0" marL="0">
-              <a:lnSpc>
-                <a:spcPct val="125000"/>
-              </a:lnSpc>
-              <a:buNone/>
-            </a:pPr>
-            <a:r>
-              <a:rPr lang="en-US" sz="1250" dirty="0">
-                <a:solidFill>
-                  <a:srgbClr val="1E2761"/>
-                </a:solidFill>
-                <a:latin typeface="Meiryo" pitchFamily="34" charset="0"/>
-                <a:ea typeface="Meiryo" pitchFamily="34" charset="-122"/>
-                <a:cs typeface="Meiryo" pitchFamily="34" charset="-120"/>
-              </a:rPr>
-              <a:t>送らずに済みます。</a:t>
-            </a:r>
-            <a:endParaRPr lang="en-US" sz="1500" dirty="0"/>
-          </a:p>
-        </p:txBody>
-      </p:sp>
-      <p:sp>
-        <p:nvSpPr>
-          <p:cNvPr id="11" name="Shape 8"/>
-          <p:cNvSpPr/>
-          <p:nvPr/>
-        </p:nvSpPr>
-        <p:spPr>
-          <a:xfrm>
-            <a:off x="7589520" y="2926080"/>
-            <a:ext cx="3977640" cy="1325880"/>
-          </a:xfrm>
-          <a:prstGeom prst="roundRect">
-            <a:avLst>
-              <a:gd name="adj" fmla="val 5517"/>
-            </a:avLst>
-          </a:prstGeom>
-          <a:solidFill>
-            <a:srgbClr val="ECFDF5"/>
-          </a:solidFill>
-          <a:ln w="12700">
-            <a:solidFill>
-              <a:srgbClr val="ECFDF5"/>
-            </a:solidFill>
-            <a:prstDash val="solid"/>
-          </a:ln>
-        </p:spPr>
-      </p:sp>
-      <p:sp>
-        <p:nvSpPr>
-          <p:cNvPr id="12" name="Text 9"/>
-          <p:cNvSpPr txBox="1"/>
-          <p:nvPr/>
-        </p:nvSpPr>
-        <p:spPr>
-          <a:xfrm>
-            <a:off x="7790688" y="3035808"/>
-            <a:ext cx="3575304" cy="1106424"/>
-          </a:xfrm>
-          <a:prstGeom prst="rect">
-            <a:avLst/>
-          </a:prstGeom>
-          <a:noFill/>
-          <a:ln/>
-        </p:spPr>
-        <p:txBody>
-          <a:bodyPr wrap="square" lIns="0" tIns="0" rIns="0" bIns="0" rtlCol="0" anchor="ctr"/>
-          <a:lstStyle/>
-          <a:p>
-            <a:pPr algn="l" indent="0" marL="0">
-              <a:lnSpc>
-                <a:spcPct val="125000"/>
-              </a:lnSpc>
-              <a:buNone/>
-            </a:pPr>
-            <a:r>
-              <a:rPr lang="en-US" sz="1500" b="1" dirty="0">
-                <a:solidFill>
-                  <a:srgbClr val="15803D"/>
-                </a:solidFill>
-                <a:latin typeface="Meiryo" pitchFamily="34" charset="0"/>
-                <a:ea typeface="Meiryo" pitchFamily="34" charset="-122"/>
-                <a:cs typeface="Meiryo" pitchFamily="34" charset="-120"/>
-              </a:rPr>
-              <a:t>キャンセル待ちの方も含める</a:t>
-            </a:r>
-            <a:endParaRPr lang="en-US" sz="1500" dirty="0"/>
-          </a:p>
-          <a:p>
-            <a:pPr algn="l" indent="0" marL="0">
-              <a:lnSpc>
-                <a:spcPct val="125000"/>
-              </a:lnSpc>
-              <a:buNone/>
-            </a:pPr>
-            <a:r>
-              <a:rPr lang="en-US" sz="1250" dirty="0">
-                <a:solidFill>
-                  <a:srgbClr val="15803D"/>
-                </a:solidFill>
-                <a:latin typeface="Meiryo" pitchFamily="34" charset="0"/>
-                <a:ea typeface="Meiryo" pitchFamily="34" charset="-122"/>
-                <a:cs typeface="Meiryo" pitchFamily="34" charset="-120"/>
-              </a:rPr>
-              <a:t>中止・延期のお知らせなら</a:t>
-            </a:r>
-            <a:endParaRPr lang="en-US" sz="1500" dirty="0"/>
-          </a:p>
-          <a:p>
-            <a:pPr algn="l" indent="0" marL="0">
-              <a:lnSpc>
-                <a:spcPct val="125000"/>
-              </a:lnSpc>
-              <a:buNone/>
-            </a:pPr>
-            <a:r>
-              <a:rPr lang="en-US" sz="1250" dirty="0">
-                <a:solidFill>
-                  <a:srgbClr val="15803D"/>
-                </a:solidFill>
-                <a:latin typeface="Meiryo" pitchFamily="34" charset="0"/>
-                <a:ea typeface="Meiryo" pitchFamily="34" charset="-122"/>
-                <a:cs typeface="Meiryo" pitchFamily="34" charset="-120"/>
-              </a:rPr>
-              <a:t>チェックを推奨します。</a:t>
-            </a:r>
-            <a:endParaRPr lang="en-US" sz="1500" dirty="0"/>
-          </a:p>
-        </p:txBody>
-      </p:sp>
-      <p:sp>
-        <p:nvSpPr>
-          <p:cNvPr id="13" name="Shape 10"/>
-          <p:cNvSpPr/>
-          <p:nvPr/>
-        </p:nvSpPr>
-        <p:spPr>
-          <a:xfrm>
-            <a:off x="7589520" y="4389120"/>
-            <a:ext cx="3977640" cy="1508760"/>
-          </a:xfrm>
-          <a:prstGeom prst="roundRect">
-            <a:avLst>
-              <a:gd name="adj" fmla="val 4848"/>
-            </a:avLst>
-          </a:prstGeom>
-          <a:solidFill>
-            <a:srgbClr val="CADCFC"/>
-          </a:solidFill>
-          <a:ln w="12700">
-            <a:solidFill>
-              <a:srgbClr val="CADCFC"/>
-            </a:solidFill>
-            <a:prstDash val="solid"/>
-          </a:ln>
-        </p:spPr>
-      </p:sp>
-      <p:sp>
-        <p:nvSpPr>
-          <p:cNvPr id="14" name="Text 11"/>
-          <p:cNvSpPr txBox="1"/>
-          <p:nvPr/>
-        </p:nvSpPr>
-        <p:spPr>
-          <a:xfrm>
-            <a:off x="7790688" y="4498848"/>
-            <a:ext cx="3575304" cy="1289304"/>
-          </a:xfrm>
-          <a:prstGeom prst="rect">
-            <a:avLst/>
-          </a:prstGeom>
-          <a:noFill/>
-          <a:ln/>
-        </p:spPr>
-        <p:txBody>
-          <a:bodyPr wrap="square" lIns="0" tIns="0" rIns="0" bIns="0" rtlCol="0" anchor="ctr"/>
-          <a:lstStyle/>
-          <a:p>
-            <a:pPr algn="l" indent="0" marL="0">
-              <a:lnSpc>
-                <a:spcPct val="125000"/>
-              </a:lnSpc>
-              <a:buNone/>
-            </a:pPr>
-            <a:r>
-              <a:rPr lang="en-US" sz="1500" b="1" dirty="0">
-                <a:solidFill>
-                  <a:srgbClr val="1E2761"/>
-                </a:solidFill>
-                <a:latin typeface="Meiryo" pitchFamily="34" charset="0"/>
-                <a:ea typeface="Meiryo" pitchFamily="34" charset="-122"/>
-                <a:cs typeface="Meiryo" pitchFamily="34" charset="-120"/>
-              </a:rPr>
-              <a:t>自動で付くもの</a:t>
-            </a:r>
-            <a:endParaRPr lang="en-US" sz="1500" dirty="0"/>
-          </a:p>
-          <a:p>
-            <a:pPr algn="l" indent="0" marL="0">
-              <a:lnSpc>
-                <a:spcPct val="125000"/>
-              </a:lnSpc>
-              <a:buNone/>
-            </a:pPr>
-            <a:r>
-              <a:rPr lang="en-US" sz="1250" dirty="0">
-                <a:solidFill>
-                  <a:srgbClr val="1E2761"/>
-                </a:solidFill>
-                <a:latin typeface="Meiryo" pitchFamily="34" charset="0"/>
-                <a:ea typeface="Meiryo" pitchFamily="34" charset="-122"/>
-                <a:cs typeface="Meiryo" pitchFamily="34" charset="-120"/>
-              </a:rPr>
-              <a:t>体験内容と開催日時は</a:t>
-            </a:r>
-            <a:endParaRPr lang="en-US" sz="1500" dirty="0"/>
-          </a:p>
-          <a:p>
-            <a:pPr algn="l" indent="0" marL="0">
-              <a:lnSpc>
-                <a:spcPct val="125000"/>
-              </a:lnSpc>
-              <a:buNone/>
-            </a:pPr>
-            <a:r>
-              <a:rPr lang="en-US" sz="1250" dirty="0">
-                <a:solidFill>
-                  <a:srgbClr val="1E2761"/>
-                </a:solidFill>
-                <a:latin typeface="Meiryo" pitchFamily="34" charset="0"/>
-                <a:ea typeface="Meiryo" pitchFamily="34" charset="-122"/>
-                <a:cs typeface="Meiryo" pitchFamily="34" charset="-120"/>
-              </a:rPr>
-              <a:t>本文の先頭に自動で入ります。</a:t>
-            </a:r>
-            <a:endParaRPr lang="en-US" sz="1500" dirty="0"/>
-          </a:p>
-          <a:p>
-            <a:pPr algn="l" indent="0" marL="0">
-              <a:lnSpc>
-                <a:spcPct val="125000"/>
-              </a:lnSpc>
-              <a:buNone/>
-            </a:pPr>
-            <a:r>
-              <a:rPr lang="en-US" sz="1250" dirty="0">
-                <a:solidFill>
-                  <a:srgbClr val="1E2761"/>
-                </a:solidFill>
-                <a:latin typeface="Meiryo" pitchFamily="34" charset="0"/>
-                <a:ea typeface="Meiryo" pitchFamily="34" charset="-122"/>
-                <a:cs typeface="Meiryo" pitchFamily="34" charset="-120"/>
-              </a:rPr>
-              <a:t>本文には中止の事実だけで足ります。</a:t>
-            </a:r>
-            <a:endParaRPr lang="en-US" sz="1500" dirty="0"/>
+              <a:t>いずれもシステムが二重予約を防いでいるためです。無理に通す方法はありません。</a:t>
+            </a:r>
+            <a:endParaRPr lang="en-US" sz="1250" dirty="0"/>
           </a:p>
         </p:txBody>
       </p:sp>
@@ -5318,7 +5407,7 @@
                 <a:ea typeface="Meiryo" pitchFamily="34" charset="-122"/>
                 <a:cs typeface="Meiryo" pitchFamily="34" charset="-120"/>
               </a:rPr>
-              <a:t>送信前に必ず確認する</a:t>
+              <a:t>中止・延期のお知らせを送る</a:t>
             </a:r>
             <a:endParaRPr lang="en-US" sz="2800" dirty="0"/>
           </a:p>
@@ -5357,7 +5446,7 @@
                 <a:ea typeface="Meiryo" pitchFamily="34" charset="-122"/>
                 <a:cs typeface="Meiryo" pitchFamily="34" charset="-120"/>
               </a:rPr>
-              <a:t>送信後は取り消せません</a:t>
+              <a:t>自社の申込者にまとめてメールを送れます</a:t>
             </a:r>
             <a:endParaRPr lang="en-US" sz="1400" dirty="0"/>
           </a:p>
@@ -5365,7 +5454,7 @@
       </p:sp>
       <p:pic>
         <p:nvPicPr>
-          <p:cNvPr id="8" name="Image 0" descr="C:\Users\sato\AppData\Local\Temp\claude\c--Users-sato-Desktop---3---3\c0abf194-6a09-42ac-bc16-2cd244740c64\scratchpad\deck\img\c-bulk-confirm.png">    </p:cNvPr>
+          <p:cNvPr id="8" name="Image 0" descr="C:\Users\sato\AppData\Local\Temp\claude\c--Users-sato-Desktop---3---3\c0abf194-6a09-42ac-bc16-2cd244740c64\scratchpad\deck\img\c-bulk-to.png">    </p:cNvPr>
           <p:cNvPicPr>
             <a:picLocks noChangeAspect="1"/>
           </p:cNvPicPr>
@@ -5379,8 +5468,8 @@
         </p:blipFill>
         <p:spPr>
           <a:xfrm>
-            <a:off x="640080" y="1371600"/>
-            <a:ext cx="6537960" cy="3199097"/>
+            <a:off x="640080" y="1325880"/>
+            <a:ext cx="6675120" cy="3781511"/>
           </a:xfrm>
           <a:prstGeom prst="rect">
             <a:avLst/>
@@ -5395,456 +5484,12 @@
         </p:nvSpPr>
         <p:spPr>
           <a:xfrm>
-            <a:off x="7452360" y="1371600"/>
-            <a:ext cx="4114800" cy="1005840"/>
+            <a:off x="7589520" y="1463040"/>
+            <a:ext cx="3977640" cy="1325880"/>
           </a:xfrm>
           <a:prstGeom prst="roundRect">
             <a:avLst>
-              <a:gd name="adj" fmla="val 5455"/>
-            </a:avLst>
-          </a:prstGeom>
-          <a:solidFill>
-            <a:srgbClr val="F4F7FC"/>
-          </a:solidFill>
-          <a:ln w="12700">
-            <a:solidFill>
-              <a:srgbClr val="C7D2E4"/>
-            </a:solidFill>
-            <a:prstDash val="solid"/>
-          </a:ln>
-        </p:spPr>
-      </p:sp>
-      <p:sp>
-        <p:nvSpPr>
-          <p:cNvPr id="10" name="Shape 7"/>
-          <p:cNvSpPr/>
-          <p:nvPr/>
-        </p:nvSpPr>
-        <p:spPr>
-          <a:xfrm>
-            <a:off x="7616952" y="1664208"/>
-            <a:ext cx="420624" cy="420624"/>
-          </a:xfrm>
-          <a:prstGeom prst="ellipse">
-            <a:avLst/>
-          </a:prstGeom>
-          <a:solidFill>
-            <a:srgbClr val="1E2761"/>
-          </a:solidFill>
-          <a:ln/>
-        </p:spPr>
-      </p:sp>
-      <p:sp>
-        <p:nvSpPr>
-          <p:cNvPr id="11" name="Text 8"/>
-          <p:cNvSpPr txBox="1"/>
-          <p:nvPr/>
-        </p:nvSpPr>
-        <p:spPr>
-          <a:xfrm>
-            <a:off x="7616952" y="1664208"/>
-            <a:ext cx="420624" cy="420624"/>
-          </a:xfrm>
-          <a:prstGeom prst="rect">
-            <a:avLst/>
-          </a:prstGeom>
-          <a:noFill/>
-          <a:ln/>
-        </p:spPr>
-        <p:txBody>
-          <a:bodyPr wrap="square" rtlCol="0" anchor="ctr"/>
-          <a:lstStyle/>
-          <a:p>
-            <a:pPr algn="ctr" indent="0" marL="0">
-              <a:buNone/>
-            </a:pPr>
-            <a:r>
-              <a:rPr lang="en-US" sz="1400" b="1" dirty="0">
-                <a:solidFill>
-                  <a:srgbClr val="FFFFFF"/>
-                </a:solidFill>
-                <a:latin typeface="Meiryo" pitchFamily="34" charset="0"/>
-                <a:ea typeface="Meiryo" pitchFamily="34" charset="-122"/>
-                <a:cs typeface="Meiryo" pitchFamily="34" charset="-120"/>
-              </a:rPr>
-              <a:t>1</a:t>
-            </a:r>
-            <a:endParaRPr lang="en-US" sz="1400" dirty="0"/>
-          </a:p>
-        </p:txBody>
-      </p:sp>
-      <p:sp>
-        <p:nvSpPr>
-          <p:cNvPr id="12" name="Text 9"/>
-          <p:cNvSpPr txBox="1"/>
-          <p:nvPr/>
-        </p:nvSpPr>
-        <p:spPr>
-          <a:xfrm>
-            <a:off x="8202168" y="1426464"/>
-            <a:ext cx="3200400" cy="896112"/>
-          </a:xfrm>
-          <a:prstGeom prst="rect">
-            <a:avLst/>
-          </a:prstGeom>
-          <a:noFill/>
-          <a:ln/>
-        </p:spPr>
-        <p:txBody>
-          <a:bodyPr wrap="square" lIns="0" tIns="0" rIns="0" bIns="0" rtlCol="0" anchor="ctr"/>
-          <a:lstStyle/>
-          <a:p>
-            <a:pPr algn="l" indent="0" marL="0">
-              <a:lnSpc>
-                <a:spcPct val="120000"/>
-              </a:lnSpc>
-              <a:buNone/>
-            </a:pPr>
-            <a:r>
-              <a:rPr lang="en-US" sz="1500" b="1" dirty="0">
-                <a:solidFill>
-                  <a:srgbClr val="1F2937"/>
-                </a:solidFill>
-                <a:latin typeface="Meiryo" pitchFamily="34" charset="0"/>
-                <a:ea typeface="Meiryo" pitchFamily="34" charset="-122"/>
-                <a:cs typeface="Meiryo" pitchFamily="34" charset="-120"/>
-              </a:rPr>
-              <a:t>送信先と本文を確認</a:t>
-            </a:r>
-            <a:endParaRPr lang="en-US" sz="1500" dirty="0"/>
-          </a:p>
-          <a:p>
-            <a:pPr algn="l" indent="0" marL="0">
-              <a:lnSpc>
-                <a:spcPct val="120000"/>
-              </a:lnSpc>
-              <a:buNone/>
-            </a:pPr>
-            <a:r>
-              <a:rPr lang="en-US" sz="1250" dirty="0">
-                <a:solidFill>
-                  <a:srgbClr val="5B6472"/>
-                </a:solidFill>
-                <a:latin typeface="Meiryo" pitchFamily="34" charset="0"/>
-                <a:ea typeface="Meiryo" pitchFamily="34" charset="-122"/>
-                <a:cs typeface="Meiryo" pitchFamily="34" charset="-120"/>
-              </a:rPr>
-              <a:t>送信件数と、届く本文がそのまま出ます</a:t>
-            </a:r>
-            <a:endParaRPr lang="en-US" sz="1500" dirty="0"/>
-          </a:p>
-        </p:txBody>
-      </p:sp>
-      <p:sp>
-        <p:nvSpPr>
-          <p:cNvPr id="13" name="Shape 10"/>
-          <p:cNvSpPr/>
-          <p:nvPr/>
-        </p:nvSpPr>
-        <p:spPr>
-          <a:xfrm>
-            <a:off x="7452360" y="2523744"/>
-            <a:ext cx="4114800" cy="1005840"/>
-          </a:xfrm>
-          <a:prstGeom prst="roundRect">
-            <a:avLst>
-              <a:gd name="adj" fmla="val 5455"/>
-            </a:avLst>
-          </a:prstGeom>
-          <a:solidFill>
-            <a:srgbClr val="F4F7FC"/>
-          </a:solidFill>
-          <a:ln w="12700">
-            <a:solidFill>
-              <a:srgbClr val="C7D2E4"/>
-            </a:solidFill>
-            <a:prstDash val="solid"/>
-          </a:ln>
-        </p:spPr>
-      </p:sp>
-      <p:sp>
-        <p:nvSpPr>
-          <p:cNvPr id="14" name="Shape 11"/>
-          <p:cNvSpPr/>
-          <p:nvPr/>
-        </p:nvSpPr>
-        <p:spPr>
-          <a:xfrm>
-            <a:off x="7616952" y="2816352"/>
-            <a:ext cx="420624" cy="420624"/>
-          </a:xfrm>
-          <a:prstGeom prst="ellipse">
-            <a:avLst/>
-          </a:prstGeom>
-          <a:solidFill>
-            <a:srgbClr val="1E2761"/>
-          </a:solidFill>
-          <a:ln/>
-        </p:spPr>
-      </p:sp>
-      <p:sp>
-        <p:nvSpPr>
-          <p:cNvPr id="15" name="Text 12"/>
-          <p:cNvSpPr txBox="1"/>
-          <p:nvPr/>
-        </p:nvSpPr>
-        <p:spPr>
-          <a:xfrm>
-            <a:off x="7616952" y="2816352"/>
-            <a:ext cx="420624" cy="420624"/>
-          </a:xfrm>
-          <a:prstGeom prst="rect">
-            <a:avLst/>
-          </a:prstGeom>
-          <a:noFill/>
-          <a:ln/>
-        </p:spPr>
-        <p:txBody>
-          <a:bodyPr wrap="square" rtlCol="0" anchor="ctr"/>
-          <a:lstStyle/>
-          <a:p>
-            <a:pPr algn="ctr" indent="0" marL="0">
-              <a:buNone/>
-            </a:pPr>
-            <a:r>
-              <a:rPr lang="en-US" sz="1400" b="1" dirty="0">
-                <a:solidFill>
-                  <a:srgbClr val="FFFFFF"/>
-                </a:solidFill>
-                <a:latin typeface="Meiryo" pitchFamily="34" charset="0"/>
-                <a:ea typeface="Meiryo" pitchFamily="34" charset="-122"/>
-                <a:cs typeface="Meiryo" pitchFamily="34" charset="-120"/>
-              </a:rPr>
-              <a:t>2</a:t>
-            </a:r>
-            <a:endParaRPr lang="en-US" sz="1400" dirty="0"/>
-          </a:p>
-        </p:txBody>
-      </p:sp>
-      <p:sp>
-        <p:nvSpPr>
-          <p:cNvPr id="16" name="Text 13"/>
-          <p:cNvSpPr txBox="1"/>
-          <p:nvPr/>
-        </p:nvSpPr>
-        <p:spPr>
-          <a:xfrm>
-            <a:off x="8202168" y="2578608"/>
-            <a:ext cx="3200400" cy="896112"/>
-          </a:xfrm>
-          <a:prstGeom prst="rect">
-            <a:avLst/>
-          </a:prstGeom>
-          <a:noFill/>
-          <a:ln/>
-        </p:spPr>
-        <p:txBody>
-          <a:bodyPr wrap="square" lIns="0" tIns="0" rIns="0" bIns="0" rtlCol="0" anchor="ctr"/>
-          <a:lstStyle/>
-          <a:p>
-            <a:pPr algn="l" indent="0" marL="0">
-              <a:lnSpc>
-                <a:spcPct val="120000"/>
-              </a:lnSpc>
-              <a:buNone/>
-            </a:pPr>
-            <a:r>
-              <a:rPr lang="en-US" sz="1500" b="1" dirty="0">
-                <a:solidFill>
-                  <a:srgbClr val="1F2937"/>
-                </a:solidFill>
-                <a:latin typeface="Meiryo" pitchFamily="34" charset="0"/>
-                <a:ea typeface="Meiryo" pitchFamily="34" charset="-122"/>
-                <a:cs typeface="Meiryo" pitchFamily="34" charset="-120"/>
-              </a:rPr>
-              <a:t>まず自分宛に試す</a:t>
-            </a:r>
-            <a:endParaRPr lang="en-US" sz="1500" dirty="0"/>
-          </a:p>
-          <a:p>
-            <a:pPr algn="l" indent="0" marL="0">
-              <a:lnSpc>
-                <a:spcPct val="120000"/>
-              </a:lnSpc>
-              <a:buNone/>
-            </a:pPr>
-            <a:r>
-              <a:rPr lang="en-US" sz="1250" dirty="0">
-                <a:solidFill>
-                  <a:srgbClr val="5B6472"/>
-                </a:solidFill>
-                <a:latin typeface="Meiryo" pitchFamily="34" charset="0"/>
-                <a:ea typeface="Meiryo" pitchFamily="34" charset="-122"/>
-                <a:cs typeface="Meiryo" pitchFamily="34" charset="-120"/>
-              </a:rPr>
-              <a:t>この 1 通が届くかで本送信が分かります</a:t>
-            </a:r>
-            <a:endParaRPr lang="en-US" sz="1500" dirty="0"/>
-          </a:p>
-        </p:txBody>
-      </p:sp>
-      <p:sp>
-        <p:nvSpPr>
-          <p:cNvPr id="17" name="Shape 14"/>
-          <p:cNvSpPr/>
-          <p:nvPr/>
-        </p:nvSpPr>
-        <p:spPr>
-          <a:xfrm>
-            <a:off x="7452360" y="3675888"/>
-            <a:ext cx="4114800" cy="1005840"/>
-          </a:xfrm>
-          <a:prstGeom prst="roundRect">
-            <a:avLst>
-              <a:gd name="adj" fmla="val 5455"/>
-            </a:avLst>
-          </a:prstGeom>
-          <a:solidFill>
-            <a:srgbClr val="FEF2F2"/>
-          </a:solidFill>
-          <a:ln w="12700">
-            <a:solidFill>
-              <a:srgbClr val="FEF2F2"/>
-            </a:solidFill>
-            <a:prstDash val="solid"/>
-          </a:ln>
-        </p:spPr>
-      </p:sp>
-      <p:sp>
-        <p:nvSpPr>
-          <p:cNvPr id="18" name="Shape 15"/>
-          <p:cNvSpPr/>
-          <p:nvPr/>
-        </p:nvSpPr>
-        <p:spPr>
-          <a:xfrm>
-            <a:off x="7616952" y="3968496"/>
-            <a:ext cx="420624" cy="420624"/>
-          </a:xfrm>
-          <a:prstGeom prst="ellipse">
-            <a:avLst/>
-          </a:prstGeom>
-          <a:solidFill>
-            <a:srgbClr val="B91C1C"/>
-          </a:solidFill>
-          <a:ln/>
-        </p:spPr>
-      </p:sp>
-      <p:sp>
-        <p:nvSpPr>
-          <p:cNvPr id="19" name="Text 16"/>
-          <p:cNvSpPr txBox="1"/>
-          <p:nvPr/>
-        </p:nvSpPr>
-        <p:spPr>
-          <a:xfrm>
-            <a:off x="7616952" y="3968496"/>
-            <a:ext cx="420624" cy="420624"/>
-          </a:xfrm>
-          <a:prstGeom prst="rect">
-            <a:avLst/>
-          </a:prstGeom>
-          <a:noFill/>
-          <a:ln/>
-        </p:spPr>
-        <p:txBody>
-          <a:bodyPr wrap="square" rtlCol="0" anchor="ctr"/>
-          <a:lstStyle/>
-          <a:p>
-            <a:pPr algn="ctr" indent="0" marL="0">
-              <a:buNone/>
-            </a:pPr>
-            <a:r>
-              <a:rPr lang="en-US" sz="1400" b="1" dirty="0">
-                <a:solidFill>
-                  <a:srgbClr val="FFFFFF"/>
-                </a:solidFill>
-                <a:latin typeface="Meiryo" pitchFamily="34" charset="0"/>
-                <a:ea typeface="Meiryo" pitchFamily="34" charset="-122"/>
-                <a:cs typeface="Meiryo" pitchFamily="34" charset="-120"/>
-              </a:rPr>
-              <a:t>3</a:t>
-            </a:r>
-            <a:endParaRPr lang="en-US" sz="1400" dirty="0"/>
-          </a:p>
-        </p:txBody>
-      </p:sp>
-      <p:sp>
-        <p:nvSpPr>
-          <p:cNvPr id="20" name="Text 17"/>
-          <p:cNvSpPr txBox="1"/>
-          <p:nvPr/>
-        </p:nvSpPr>
-        <p:spPr>
-          <a:xfrm>
-            <a:off x="8202168" y="3730752"/>
-            <a:ext cx="3200400" cy="896112"/>
-          </a:xfrm>
-          <a:prstGeom prst="rect">
-            <a:avLst/>
-          </a:prstGeom>
-          <a:noFill/>
-          <a:ln/>
-        </p:spPr>
-        <p:txBody>
-          <a:bodyPr wrap="square" lIns="0" tIns="0" rIns="0" bIns="0" rtlCol="0" anchor="ctr"/>
-          <a:lstStyle/>
-          <a:p>
-            <a:pPr algn="l" indent="0" marL="0">
-              <a:lnSpc>
-                <a:spcPct val="120000"/>
-              </a:lnSpc>
-              <a:buNone/>
-            </a:pPr>
-            <a:r>
-              <a:rPr lang="en-US" sz="1500" b="1" dirty="0">
-                <a:solidFill>
-                  <a:srgbClr val="1F2937"/>
-                </a:solidFill>
-                <a:latin typeface="Meiryo" pitchFamily="34" charset="0"/>
-                <a:ea typeface="Meiryo" pitchFamily="34" charset="-122"/>
-                <a:cs typeface="Meiryo" pitchFamily="34" charset="-120"/>
-              </a:rPr>
-              <a:t>N 件に送信する</a:t>
-            </a:r>
-            <a:endParaRPr lang="en-US" sz="1500" dirty="0"/>
-          </a:p>
-          <a:p>
-            <a:pPr algn="l" indent="0" marL="0">
-              <a:lnSpc>
-                <a:spcPct val="120000"/>
-              </a:lnSpc>
-              <a:buNone/>
-            </a:pPr>
-            <a:r>
-              <a:rPr lang="en-US" sz="1250" dirty="0">
-                <a:solidFill>
-                  <a:srgbClr val="5B6472"/>
-                </a:solidFill>
-                <a:latin typeface="Meiryo" pitchFamily="34" charset="0"/>
-                <a:ea typeface="Meiryo" pitchFamily="34" charset="-122"/>
-                <a:cs typeface="Meiryo" pitchFamily="34" charset="-120"/>
-              </a:rPr>
-              <a:t>確認のポップアップ。取り消せません</a:t>
-            </a:r>
-            <a:endParaRPr lang="en-US" sz="1500" dirty="0"/>
-          </a:p>
-        </p:txBody>
-      </p:sp>
-      <p:sp>
-        <p:nvSpPr>
-          <p:cNvPr id="21" name="Shape 18"/>
-          <p:cNvSpPr/>
-          <p:nvPr/>
-        </p:nvSpPr>
-        <p:spPr>
-          <a:xfrm>
-            <a:off x="7452360" y="4526280"/>
-            <a:ext cx="4114800" cy="1143000"/>
-          </a:xfrm>
-          <a:prstGeom prst="roundRect">
-            <a:avLst>
-              <a:gd name="adj" fmla="val 6400"/>
+              <a:gd name="adj" fmla="val 5517"/>
             </a:avLst>
           </a:prstGeom>
           <a:solidFill>
@@ -5860,14 +5505,14 @@
       </p:sp>
       <p:sp>
         <p:nvSpPr>
-          <p:cNvPr id="22" name="Text 19"/>
-          <p:cNvSpPr txBox="1"/>
-          <p:nvPr/>
-        </p:nvSpPr>
-        <p:spPr>
-          <a:xfrm>
-            <a:off x="7653528" y="4636008"/>
-            <a:ext cx="3712464" cy="923544"/>
+          <p:cNvPr id="10" name="Text 7"/>
+          <p:cNvSpPr txBox="1"/>
+          <p:nvPr/>
+        </p:nvSpPr>
+        <p:spPr>
+          <a:xfrm>
+            <a:off x="7790688" y="1572768"/>
+            <a:ext cx="3575304" cy="1106424"/>
           </a:xfrm>
           <a:prstGeom prst="rect">
             <a:avLst/>
@@ -5886,7 +5531,7 @@
               <a:buNone/>
             </a:pPr>
             <a:r>
-              <a:rPr lang="en-US" sz="1250" dirty="0">
+              <a:rPr lang="en-US" sz="1500" b="1" dirty="0">
                 <a:solidFill>
                   <a:srgbClr val="1E2761"/>
                 </a:solidFill>
@@ -5894,9 +5539,9 @@
                 <a:ea typeface="Meiryo" pitchFamily="34" charset="-122"/>
                 <a:cs typeface="Meiryo" pitchFamily="34" charset="-120"/>
               </a:rPr>
-              <a:t>送信完了まで数分かかることがあります。</a:t>
-            </a:r>
-            <a:endParaRPr lang="en-US" sz="1250" dirty="0"/>
+              <a:t>1 日だけ中止なら「開催回を指定」</a:t>
+            </a:r>
+            <a:endParaRPr lang="en-US" sz="1500" dirty="0"/>
           </a:p>
           <a:p>
             <a:pPr algn="l" indent="0" marL="0">
@@ -5914,9 +5559,9 @@
                 <a:ea typeface="Meiryo" pitchFamily="34" charset="-122"/>
                 <a:cs typeface="Meiryo" pitchFamily="34" charset="-120"/>
               </a:rPr>
-              <a:t>お急ぎの場合や「届かない」という</a:t>
-            </a:r>
-            <a:endParaRPr lang="en-US" sz="1250" dirty="0"/>
+              <a:t>関係のない回の申込者に</a:t>
+            </a:r>
+            <a:endParaRPr lang="en-US" sz="1500" dirty="0"/>
           </a:p>
           <a:p>
             <a:pPr algn="l" indent="0" marL="0">
@@ -5934,9 +5579,247 @@
                 <a:ea typeface="Meiryo" pitchFamily="34" charset="-122"/>
                 <a:cs typeface="Meiryo" pitchFamily="34" charset="-120"/>
               </a:rPr>
-              <a:t>お問い合わせは事務局へ。</a:t>
-            </a:r>
-            <a:endParaRPr lang="en-US" sz="1250" dirty="0"/>
+              <a:t>送らずに済みます。</a:t>
+            </a:r>
+            <a:endParaRPr lang="en-US" sz="1500" dirty="0"/>
+          </a:p>
+        </p:txBody>
+      </p:sp>
+      <p:sp>
+        <p:nvSpPr>
+          <p:cNvPr id="11" name="Shape 8"/>
+          <p:cNvSpPr/>
+          <p:nvPr/>
+        </p:nvSpPr>
+        <p:spPr>
+          <a:xfrm>
+            <a:off x="7589520" y="2926080"/>
+            <a:ext cx="3977640" cy="1325880"/>
+          </a:xfrm>
+          <a:prstGeom prst="roundRect">
+            <a:avLst>
+              <a:gd name="adj" fmla="val 5517"/>
+            </a:avLst>
+          </a:prstGeom>
+          <a:solidFill>
+            <a:srgbClr val="ECFDF5"/>
+          </a:solidFill>
+          <a:ln w="12700">
+            <a:solidFill>
+              <a:srgbClr val="ECFDF5"/>
+            </a:solidFill>
+            <a:prstDash val="solid"/>
+          </a:ln>
+        </p:spPr>
+      </p:sp>
+      <p:sp>
+        <p:nvSpPr>
+          <p:cNvPr id="12" name="Text 9"/>
+          <p:cNvSpPr txBox="1"/>
+          <p:nvPr/>
+        </p:nvSpPr>
+        <p:spPr>
+          <a:xfrm>
+            <a:off x="7790688" y="3035808"/>
+            <a:ext cx="3575304" cy="1106424"/>
+          </a:xfrm>
+          <a:prstGeom prst="rect">
+            <a:avLst/>
+          </a:prstGeom>
+          <a:noFill/>
+          <a:ln/>
+        </p:spPr>
+        <p:txBody>
+          <a:bodyPr wrap="square" lIns="0" tIns="0" rIns="0" bIns="0" rtlCol="0" anchor="ctr"/>
+          <a:lstStyle/>
+          <a:p>
+            <a:pPr algn="l" indent="0" marL="0">
+              <a:lnSpc>
+                <a:spcPct val="125000"/>
+              </a:lnSpc>
+              <a:buNone/>
+            </a:pPr>
+            <a:r>
+              <a:rPr lang="en-US" sz="1500" b="1" dirty="0">
+                <a:solidFill>
+                  <a:srgbClr val="15803D"/>
+                </a:solidFill>
+                <a:latin typeface="Meiryo" pitchFamily="34" charset="0"/>
+                <a:ea typeface="Meiryo" pitchFamily="34" charset="-122"/>
+                <a:cs typeface="Meiryo" pitchFamily="34" charset="-120"/>
+              </a:rPr>
+              <a:t>キャンセル待ちの方も含める</a:t>
+            </a:r>
+            <a:endParaRPr lang="en-US" sz="1500" dirty="0"/>
+          </a:p>
+          <a:p>
+            <a:pPr algn="l" indent="0" marL="0">
+              <a:lnSpc>
+                <a:spcPct val="125000"/>
+              </a:lnSpc>
+              <a:buNone/>
+            </a:pPr>
+            <a:r>
+              <a:rPr lang="en-US" sz="1250" dirty="0">
+                <a:solidFill>
+                  <a:srgbClr val="15803D"/>
+                </a:solidFill>
+                <a:latin typeface="Meiryo" pitchFamily="34" charset="0"/>
+                <a:ea typeface="Meiryo" pitchFamily="34" charset="-122"/>
+                <a:cs typeface="Meiryo" pitchFamily="34" charset="-120"/>
+              </a:rPr>
+              <a:t>中止・延期のお知らせなら</a:t>
+            </a:r>
+            <a:endParaRPr lang="en-US" sz="1500" dirty="0"/>
+          </a:p>
+          <a:p>
+            <a:pPr algn="l" indent="0" marL="0">
+              <a:lnSpc>
+                <a:spcPct val="125000"/>
+              </a:lnSpc>
+              <a:buNone/>
+            </a:pPr>
+            <a:r>
+              <a:rPr lang="en-US" sz="1250" dirty="0">
+                <a:solidFill>
+                  <a:srgbClr val="15803D"/>
+                </a:solidFill>
+                <a:latin typeface="Meiryo" pitchFamily="34" charset="0"/>
+                <a:ea typeface="Meiryo" pitchFamily="34" charset="-122"/>
+                <a:cs typeface="Meiryo" pitchFamily="34" charset="-120"/>
+              </a:rPr>
+              <a:t>チェックを推奨します。</a:t>
+            </a:r>
+            <a:endParaRPr lang="en-US" sz="1500" dirty="0"/>
+          </a:p>
+        </p:txBody>
+      </p:sp>
+      <p:sp>
+        <p:nvSpPr>
+          <p:cNvPr id="13" name="Shape 10"/>
+          <p:cNvSpPr/>
+          <p:nvPr/>
+        </p:nvSpPr>
+        <p:spPr>
+          <a:xfrm>
+            <a:off x="7589520" y="4389120"/>
+            <a:ext cx="3977640" cy="1508760"/>
+          </a:xfrm>
+          <a:prstGeom prst="roundRect">
+            <a:avLst>
+              <a:gd name="adj" fmla="val 4848"/>
+            </a:avLst>
+          </a:prstGeom>
+          <a:solidFill>
+            <a:srgbClr val="CADCFC"/>
+          </a:solidFill>
+          <a:ln w="12700">
+            <a:solidFill>
+              <a:srgbClr val="CADCFC"/>
+            </a:solidFill>
+            <a:prstDash val="solid"/>
+          </a:ln>
+        </p:spPr>
+      </p:sp>
+      <p:sp>
+        <p:nvSpPr>
+          <p:cNvPr id="14" name="Text 11"/>
+          <p:cNvSpPr txBox="1"/>
+          <p:nvPr/>
+        </p:nvSpPr>
+        <p:spPr>
+          <a:xfrm>
+            <a:off x="7790688" y="4498848"/>
+            <a:ext cx="3575304" cy="1289304"/>
+          </a:xfrm>
+          <a:prstGeom prst="rect">
+            <a:avLst/>
+          </a:prstGeom>
+          <a:noFill/>
+          <a:ln/>
+        </p:spPr>
+        <p:txBody>
+          <a:bodyPr wrap="square" lIns="0" tIns="0" rIns="0" bIns="0" rtlCol="0" anchor="ctr"/>
+          <a:lstStyle/>
+          <a:p>
+            <a:pPr algn="l" indent="0" marL="0">
+              <a:lnSpc>
+                <a:spcPct val="125000"/>
+              </a:lnSpc>
+              <a:buNone/>
+            </a:pPr>
+            <a:r>
+              <a:rPr lang="en-US" sz="1500" b="1" dirty="0">
+                <a:solidFill>
+                  <a:srgbClr val="1E2761"/>
+                </a:solidFill>
+                <a:latin typeface="Meiryo" pitchFamily="34" charset="0"/>
+                <a:ea typeface="Meiryo" pitchFamily="34" charset="-122"/>
+                <a:cs typeface="Meiryo" pitchFamily="34" charset="-120"/>
+              </a:rPr>
+              <a:t>自動で付くもの</a:t>
+            </a:r>
+            <a:endParaRPr lang="en-US" sz="1500" dirty="0"/>
+          </a:p>
+          <a:p>
+            <a:pPr algn="l" indent="0" marL="0">
+              <a:lnSpc>
+                <a:spcPct val="125000"/>
+              </a:lnSpc>
+              <a:buNone/>
+            </a:pPr>
+            <a:r>
+              <a:rPr lang="en-US" sz="1250" dirty="0">
+                <a:solidFill>
+                  <a:srgbClr val="1E2761"/>
+                </a:solidFill>
+                <a:latin typeface="Meiryo" pitchFamily="34" charset="0"/>
+                <a:ea typeface="Meiryo" pitchFamily="34" charset="-122"/>
+                <a:cs typeface="Meiryo" pitchFamily="34" charset="-120"/>
+              </a:rPr>
+              <a:t>体験内容と開催日時は</a:t>
+            </a:r>
+            <a:endParaRPr lang="en-US" sz="1500" dirty="0"/>
+          </a:p>
+          <a:p>
+            <a:pPr algn="l" indent="0" marL="0">
+              <a:lnSpc>
+                <a:spcPct val="125000"/>
+              </a:lnSpc>
+              <a:buNone/>
+            </a:pPr>
+            <a:r>
+              <a:rPr lang="en-US" sz="1250" dirty="0">
+                <a:solidFill>
+                  <a:srgbClr val="1E2761"/>
+                </a:solidFill>
+                <a:latin typeface="Meiryo" pitchFamily="34" charset="0"/>
+                <a:ea typeface="Meiryo" pitchFamily="34" charset="-122"/>
+                <a:cs typeface="Meiryo" pitchFamily="34" charset="-120"/>
+              </a:rPr>
+              <a:t>本文の先頭に自動で入ります。</a:t>
+            </a:r>
+            <a:endParaRPr lang="en-US" sz="1500" dirty="0"/>
+          </a:p>
+          <a:p>
+            <a:pPr algn="l" indent="0" marL="0">
+              <a:lnSpc>
+                <a:spcPct val="125000"/>
+              </a:lnSpc>
+              <a:buNone/>
+            </a:pPr>
+            <a:r>
+              <a:rPr lang="en-US" sz="1250" dirty="0">
+                <a:solidFill>
+                  <a:srgbClr val="1E2761"/>
+                </a:solidFill>
+                <a:latin typeface="Meiryo" pitchFamily="34" charset="0"/>
+                <a:ea typeface="Meiryo" pitchFamily="34" charset="-122"/>
+                <a:cs typeface="Meiryo" pitchFamily="34" charset="-120"/>
+              </a:rPr>
+              <a:t>本文には中止の事実だけで足ります。</a:t>
+            </a:r>
+            <a:endParaRPr lang="en-US" sz="1500" dirty="0"/>
           </a:p>
         </p:txBody>
       </p:sp>
@@ -6142,7 +6025,7 @@
                 <a:ea typeface="Meiryo" pitchFamily="34" charset="-122"/>
                 <a:cs typeface="Meiryo" pitchFamily="34" charset="-120"/>
               </a:rPr>
-              <a:t>開催前日までの確認</a:t>
+              <a:t>送信前に必ず確認する</a:t>
             </a:r>
             <a:endParaRPr lang="en-US" sz="2800" dirty="0"/>
           </a:p>
@@ -6181,26 +6064,50 @@
                 <a:ea typeface="Meiryo" pitchFamily="34" charset="-122"/>
                 <a:cs typeface="Meiryo" pitchFamily="34" charset="-120"/>
               </a:rPr>
-              <a:t>この 4 つを確認すれば、当日に慌てません</a:t>
+              <a:t>送信後は取り消せません</a:t>
             </a:r>
             <a:endParaRPr lang="en-US" sz="1400" dirty="0"/>
           </a:p>
         </p:txBody>
       </p:sp>
-      <p:sp>
-        <p:nvSpPr>
-          <p:cNvPr id="8" name="Shape 6"/>
+      <p:pic>
+        <p:nvPicPr>
+          <p:cNvPr id="8" name="Image 0" descr="C:\Users\sato\AppData\Local\Temp\claude\c--Users-sato-Desktop---3---3\c0abf194-6a09-42ac-bc16-2cd244740c64\scratchpad\deck\img\c-bulk-confirm.png">    </p:cNvPr>
+          <p:cNvPicPr>
+            <a:picLocks noChangeAspect="1"/>
+          </p:cNvPicPr>
+          <p:nvPr/>
+        </p:nvPicPr>
+        <p:blipFill>
+          <a:blip r:embed="rId1"/>
+          <a:stretch>
+            <a:fillRect/>
+          </a:stretch>
+        </p:blipFill>
+        <p:spPr>
+          <a:xfrm>
+            <a:off x="640080" y="1371600"/>
+            <a:ext cx="6537960" cy="3199097"/>
+          </a:xfrm>
+          <a:prstGeom prst="rect">
+            <a:avLst/>
+          </a:prstGeom>
+        </p:spPr>
+      </p:pic>
+      <p:sp>
+        <p:nvSpPr>
+          <p:cNvPr id="9" name="Shape 6"/>
           <p:cNvSpPr/>
           <p:nvPr/>
         </p:nvSpPr>
         <p:spPr>
           <a:xfrm>
-            <a:off x="640080" y="1508760"/>
-            <a:ext cx="10927080" cy="914400"/>
+            <a:off x="7452360" y="1371600"/>
+            <a:ext cx="4114800" cy="1005840"/>
           </a:xfrm>
           <a:prstGeom prst="roundRect">
             <a:avLst>
-              <a:gd name="adj" fmla="val 8000"/>
+              <a:gd name="adj" fmla="val 5455"/>
             </a:avLst>
           </a:prstGeom>
           <a:solidFill>
@@ -6216,41 +6123,73 @@
       </p:sp>
       <p:sp>
         <p:nvSpPr>
-          <p:cNvPr id="9" name="Shape 7"/>
+          <p:cNvPr id="10" name="Shape 7"/>
           <p:cNvSpPr/>
           <p:nvPr/>
         </p:nvSpPr>
         <p:spPr>
           <a:xfrm>
-            <a:off x="914400" y="1764792"/>
-            <a:ext cx="402336" cy="402336"/>
-          </a:xfrm>
-          <a:prstGeom prst="roundRect">
-            <a:avLst>
-              <a:gd name="adj" fmla="val 13636"/>
-            </a:avLst>
+            <a:off x="7616952" y="1664208"/>
+            <a:ext cx="420624" cy="420624"/>
+          </a:xfrm>
+          <a:prstGeom prst="ellipse">
+            <a:avLst/>
           </a:prstGeom>
           <a:solidFill>
-            <a:srgbClr val="FFFFFF"/>
+            <a:srgbClr val="1E2761"/>
           </a:solidFill>
-          <a:ln w="25400">
-            <a:solidFill>
-              <a:srgbClr val="1E2761"/>
-            </a:solidFill>
-            <a:prstDash val="solid"/>
-          </a:ln>
-        </p:spPr>
-      </p:sp>
-      <p:sp>
-        <p:nvSpPr>
-          <p:cNvPr id="10" name="Text 8"/>
-          <p:cNvSpPr txBox="1"/>
-          <p:nvPr/>
-        </p:nvSpPr>
-        <p:spPr>
-          <a:xfrm>
-            <a:off x="1508760" y="1600200"/>
-            <a:ext cx="9784080" cy="731520"/>
+          <a:ln/>
+        </p:spPr>
+      </p:sp>
+      <p:sp>
+        <p:nvSpPr>
+          <p:cNvPr id="11" name="Text 8"/>
+          <p:cNvSpPr txBox="1"/>
+          <p:nvPr/>
+        </p:nvSpPr>
+        <p:spPr>
+          <a:xfrm>
+            <a:off x="7616952" y="1664208"/>
+            <a:ext cx="420624" cy="420624"/>
+          </a:xfrm>
+          <a:prstGeom prst="rect">
+            <a:avLst/>
+          </a:prstGeom>
+          <a:noFill/>
+          <a:ln/>
+        </p:spPr>
+        <p:txBody>
+          <a:bodyPr wrap="square" rtlCol="0" anchor="ctr"/>
+          <a:lstStyle/>
+          <a:p>
+            <a:pPr algn="ctr" indent="0" marL="0">
+              <a:buNone/>
+            </a:pPr>
+            <a:r>
+              <a:rPr lang="en-US" sz="1400" b="1" dirty="0">
+                <a:solidFill>
+                  <a:srgbClr val="FFFFFF"/>
+                </a:solidFill>
+                <a:latin typeface="Meiryo" pitchFamily="34" charset="0"/>
+                <a:ea typeface="Meiryo" pitchFamily="34" charset="-122"/>
+                <a:cs typeface="Meiryo" pitchFamily="34" charset="-120"/>
+              </a:rPr>
+              <a:t>1</a:t>
+            </a:r>
+            <a:endParaRPr lang="en-US" sz="1400" dirty="0"/>
+          </a:p>
+        </p:txBody>
+      </p:sp>
+      <p:sp>
+        <p:nvSpPr>
+          <p:cNvPr id="12" name="Text 9"/>
+          <p:cNvSpPr txBox="1"/>
+          <p:nvPr/>
+        </p:nvSpPr>
+        <p:spPr>
+          <a:xfrm>
+            <a:off x="8202168" y="1426464"/>
+            <a:ext cx="3200400" cy="896112"/>
           </a:xfrm>
           <a:prstGeom prst="rect">
             <a:avLst/>
@@ -6277,7 +6216,7 @@
                 <a:ea typeface="Meiryo" pitchFamily="34" charset="-122"/>
                 <a:cs typeface="Meiryo" pitchFamily="34" charset="-120"/>
               </a:rPr>
-              <a:t>ダッシュボードの「繰り上げ候補のある開催回」が 0 件になっているか</a:t>
+              <a:t>送信先と本文を確認</a:t>
             </a:r>
             <a:endParaRPr lang="en-US" sz="1500" dirty="0"/>
           </a:p>
@@ -6297,7 +6236,7 @@
                 <a:ea typeface="Meiryo" pitchFamily="34" charset="-122"/>
                 <a:cs typeface="Meiryo" pitchFamily="34" charset="-120"/>
               </a:rPr>
-              <a:t>残っていれば、手立て A〜E をご検討ください</a:t>
+              <a:t>送信件数と、届く本文がそのまま出ます</a:t>
             </a:r>
             <a:endParaRPr lang="en-US" sz="1500" dirty="0"/>
           </a:p>
@@ -6305,18 +6244,18 @@
       </p:sp>
       <p:sp>
         <p:nvSpPr>
-          <p:cNvPr id="11" name="Shape 9"/>
+          <p:cNvPr id="13" name="Shape 10"/>
           <p:cNvSpPr/>
           <p:nvPr/>
         </p:nvSpPr>
         <p:spPr>
           <a:xfrm>
-            <a:off x="640080" y="2560320"/>
-            <a:ext cx="10927080" cy="914400"/>
+            <a:off x="7452360" y="2523744"/>
+            <a:ext cx="4114800" cy="1005840"/>
           </a:xfrm>
           <a:prstGeom prst="roundRect">
             <a:avLst>
-              <a:gd name="adj" fmla="val 8000"/>
+              <a:gd name="adj" fmla="val 5455"/>
             </a:avLst>
           </a:prstGeom>
           <a:solidFill>
@@ -6332,26 +6271,147 @@
       </p:sp>
       <p:sp>
         <p:nvSpPr>
-          <p:cNvPr id="12" name="Shape 10"/>
+          <p:cNvPr id="14" name="Shape 11"/>
           <p:cNvSpPr/>
           <p:nvPr/>
         </p:nvSpPr>
         <p:spPr>
           <a:xfrm>
-            <a:off x="914400" y="2816352"/>
-            <a:ext cx="402336" cy="402336"/>
+            <a:off x="7616952" y="2816352"/>
+            <a:ext cx="420624" cy="420624"/>
+          </a:xfrm>
+          <a:prstGeom prst="ellipse">
+            <a:avLst/>
+          </a:prstGeom>
+          <a:solidFill>
+            <a:srgbClr val="1E2761"/>
+          </a:solidFill>
+          <a:ln/>
+        </p:spPr>
+      </p:sp>
+      <p:sp>
+        <p:nvSpPr>
+          <p:cNvPr id="15" name="Text 12"/>
+          <p:cNvSpPr txBox="1"/>
+          <p:nvPr/>
+        </p:nvSpPr>
+        <p:spPr>
+          <a:xfrm>
+            <a:off x="7616952" y="2816352"/>
+            <a:ext cx="420624" cy="420624"/>
+          </a:xfrm>
+          <a:prstGeom prst="rect">
+            <a:avLst/>
+          </a:prstGeom>
+          <a:noFill/>
+          <a:ln/>
+        </p:spPr>
+        <p:txBody>
+          <a:bodyPr wrap="square" rtlCol="0" anchor="ctr"/>
+          <a:lstStyle/>
+          <a:p>
+            <a:pPr algn="ctr" indent="0" marL="0">
+              <a:buNone/>
+            </a:pPr>
+            <a:r>
+              <a:rPr lang="en-US" sz="1400" b="1" dirty="0">
+                <a:solidFill>
+                  <a:srgbClr val="FFFFFF"/>
+                </a:solidFill>
+                <a:latin typeface="Meiryo" pitchFamily="34" charset="0"/>
+                <a:ea typeface="Meiryo" pitchFamily="34" charset="-122"/>
+                <a:cs typeface="Meiryo" pitchFamily="34" charset="-120"/>
+              </a:rPr>
+              <a:t>2</a:t>
+            </a:r>
+            <a:endParaRPr lang="en-US" sz="1400" dirty="0"/>
+          </a:p>
+        </p:txBody>
+      </p:sp>
+      <p:sp>
+        <p:nvSpPr>
+          <p:cNvPr id="16" name="Text 13"/>
+          <p:cNvSpPr txBox="1"/>
+          <p:nvPr/>
+        </p:nvSpPr>
+        <p:spPr>
+          <a:xfrm>
+            <a:off x="8202168" y="2578608"/>
+            <a:ext cx="3200400" cy="896112"/>
+          </a:xfrm>
+          <a:prstGeom prst="rect">
+            <a:avLst/>
+          </a:prstGeom>
+          <a:noFill/>
+          <a:ln/>
+        </p:spPr>
+        <p:txBody>
+          <a:bodyPr wrap="square" lIns="0" tIns="0" rIns="0" bIns="0" rtlCol="0" anchor="ctr"/>
+          <a:lstStyle/>
+          <a:p>
+            <a:pPr algn="l" indent="0" marL="0">
+              <a:lnSpc>
+                <a:spcPct val="120000"/>
+              </a:lnSpc>
+              <a:buNone/>
+            </a:pPr>
+            <a:r>
+              <a:rPr lang="en-US" sz="1500" b="1" dirty="0">
+                <a:solidFill>
+                  <a:srgbClr val="1F2937"/>
+                </a:solidFill>
+                <a:latin typeface="Meiryo" pitchFamily="34" charset="0"/>
+                <a:ea typeface="Meiryo" pitchFamily="34" charset="-122"/>
+                <a:cs typeface="Meiryo" pitchFamily="34" charset="-120"/>
+              </a:rPr>
+              <a:t>まず自分宛に試す</a:t>
+            </a:r>
+            <a:endParaRPr lang="en-US" sz="1500" dirty="0"/>
+          </a:p>
+          <a:p>
+            <a:pPr algn="l" indent="0" marL="0">
+              <a:lnSpc>
+                <a:spcPct val="120000"/>
+              </a:lnSpc>
+              <a:buNone/>
+            </a:pPr>
+            <a:r>
+              <a:rPr lang="en-US" sz="1250" dirty="0">
+                <a:solidFill>
+                  <a:srgbClr val="5B6472"/>
+                </a:solidFill>
+                <a:latin typeface="Meiryo" pitchFamily="34" charset="0"/>
+                <a:ea typeface="Meiryo" pitchFamily="34" charset="-122"/>
+                <a:cs typeface="Meiryo" pitchFamily="34" charset="-120"/>
+              </a:rPr>
+              <a:t>この 1 通が届くかで本送信が分かります</a:t>
+            </a:r>
+            <a:endParaRPr lang="en-US" sz="1500" dirty="0"/>
+          </a:p>
+        </p:txBody>
+      </p:sp>
+      <p:sp>
+        <p:nvSpPr>
+          <p:cNvPr id="17" name="Shape 14"/>
+          <p:cNvSpPr/>
+          <p:nvPr/>
+        </p:nvSpPr>
+        <p:spPr>
+          <a:xfrm>
+            <a:off x="7452360" y="3675888"/>
+            <a:ext cx="4114800" cy="1005840"/>
           </a:xfrm>
           <a:prstGeom prst="roundRect">
             <a:avLst>
-              <a:gd name="adj" fmla="val 13636"/>
+              <a:gd name="adj" fmla="val 5455"/>
             </a:avLst>
           </a:prstGeom>
           <a:solidFill>
-            <a:srgbClr val="FFFFFF"/>
+            <a:srgbClr val="FEF2F2"/>
           </a:solidFill>
-          <a:ln w="25400">
+          <a:ln w="12700">
             <a:solidFill>
-              <a:srgbClr val="1E2761"/>
+              <a:srgbClr val="FEF2F2"/>
             </a:solidFill>
             <a:prstDash val="solid"/>
           </a:ln>
@@ -6359,14 +6419,73 @@
       </p:sp>
       <p:sp>
         <p:nvSpPr>
-          <p:cNvPr id="13" name="Text 11"/>
-          <p:cNvSpPr txBox="1"/>
-          <p:nvPr/>
-        </p:nvSpPr>
-        <p:spPr>
-          <a:xfrm>
-            <a:off x="1508760" y="2651760"/>
-            <a:ext cx="9784080" cy="731520"/>
+          <p:cNvPr id="18" name="Shape 15"/>
+          <p:cNvSpPr/>
+          <p:nvPr/>
+        </p:nvSpPr>
+        <p:spPr>
+          <a:xfrm>
+            <a:off x="7616952" y="3968496"/>
+            <a:ext cx="420624" cy="420624"/>
+          </a:xfrm>
+          <a:prstGeom prst="ellipse">
+            <a:avLst/>
+          </a:prstGeom>
+          <a:solidFill>
+            <a:srgbClr val="B91C1C"/>
+          </a:solidFill>
+          <a:ln/>
+        </p:spPr>
+      </p:sp>
+      <p:sp>
+        <p:nvSpPr>
+          <p:cNvPr id="19" name="Text 16"/>
+          <p:cNvSpPr txBox="1"/>
+          <p:nvPr/>
+        </p:nvSpPr>
+        <p:spPr>
+          <a:xfrm>
+            <a:off x="7616952" y="3968496"/>
+            <a:ext cx="420624" cy="420624"/>
+          </a:xfrm>
+          <a:prstGeom prst="rect">
+            <a:avLst/>
+          </a:prstGeom>
+          <a:noFill/>
+          <a:ln/>
+        </p:spPr>
+        <p:txBody>
+          <a:bodyPr wrap="square" rtlCol="0" anchor="ctr"/>
+          <a:lstStyle/>
+          <a:p>
+            <a:pPr algn="ctr" indent="0" marL="0">
+              <a:buNone/>
+            </a:pPr>
+            <a:r>
+              <a:rPr lang="en-US" sz="1400" b="1" dirty="0">
+                <a:solidFill>
+                  <a:srgbClr val="FFFFFF"/>
+                </a:solidFill>
+                <a:latin typeface="Meiryo" pitchFamily="34" charset="0"/>
+                <a:ea typeface="Meiryo" pitchFamily="34" charset="-122"/>
+                <a:cs typeface="Meiryo" pitchFamily="34" charset="-120"/>
+              </a:rPr>
+              <a:t>3</a:t>
+            </a:r>
+            <a:endParaRPr lang="en-US" sz="1400" dirty="0"/>
+          </a:p>
+        </p:txBody>
+      </p:sp>
+      <p:sp>
+        <p:nvSpPr>
+          <p:cNvPr id="20" name="Text 17"/>
+          <p:cNvSpPr txBox="1"/>
+          <p:nvPr/>
+        </p:nvSpPr>
+        <p:spPr>
+          <a:xfrm>
+            <a:off x="8202168" y="3730752"/>
+            <a:ext cx="3200400" cy="896112"/>
           </a:xfrm>
           <a:prstGeom prst="rect">
             <a:avLst/>
@@ -6393,7 +6512,7 @@
                 <a:ea typeface="Meiryo" pitchFamily="34" charset="-122"/>
                 <a:cs typeface="Meiryo" pitchFamily="34" charset="-120"/>
               </a:rPr>
-              <a:t>繰り上げた方に確定メールが届いているか</a:t>
+              <a:t>N 件に送信する</a:t>
             </a:r>
             <a:endParaRPr lang="en-US" sz="1500" dirty="0"/>
           </a:p>
@@ -6413,7 +6532,7 @@
                 <a:ea typeface="Meiryo" pitchFamily="34" charset="-122"/>
                 <a:cs typeface="Meiryo" pitchFamily="34" charset="-120"/>
               </a:rPr>
-              <a:t>届かないというお問い合わせがあれば事務局へ</a:t>
+              <a:t>確認のポップアップ。取り消せません</a:t>
             </a:r>
             <a:endParaRPr lang="en-US" sz="1500" dirty="0"/>
           </a:p>
@@ -6421,26 +6540,26 @@
       </p:sp>
       <p:sp>
         <p:nvSpPr>
-          <p:cNvPr id="14" name="Shape 12"/>
+          <p:cNvPr id="21" name="Shape 18"/>
           <p:cNvSpPr/>
           <p:nvPr/>
         </p:nvSpPr>
         <p:spPr>
           <a:xfrm>
-            <a:off x="640080" y="3611880"/>
-            <a:ext cx="10927080" cy="914400"/>
+            <a:off x="7452360" y="4526280"/>
+            <a:ext cx="4114800" cy="1143000"/>
           </a:xfrm>
           <a:prstGeom prst="roundRect">
             <a:avLst>
-              <a:gd name="adj" fmla="val 8000"/>
+              <a:gd name="adj" fmla="val 6400"/>
             </a:avLst>
           </a:prstGeom>
           <a:solidFill>
-            <a:srgbClr val="F4F7FC"/>
+            <a:srgbClr val="CADCFC"/>
           </a:solidFill>
           <a:ln w="12700">
             <a:solidFill>
-              <a:srgbClr val="C7D2E4"/>
+              <a:srgbClr val="CADCFC"/>
             </a:solidFill>
             <a:prstDash val="solid"/>
           </a:ln>
@@ -6448,41 +6567,14 @@
       </p:sp>
       <p:sp>
         <p:nvSpPr>
-          <p:cNvPr id="15" name="Shape 13"/>
-          <p:cNvSpPr/>
-          <p:nvPr/>
-        </p:nvSpPr>
-        <p:spPr>
-          <a:xfrm>
-            <a:off x="914400" y="3867912"/>
-            <a:ext cx="402336" cy="402336"/>
-          </a:xfrm>
-          <a:prstGeom prst="roundRect">
-            <a:avLst>
-              <a:gd name="adj" fmla="val 13636"/>
-            </a:avLst>
-          </a:prstGeom>
-          <a:solidFill>
-            <a:srgbClr val="FFFFFF"/>
-          </a:solidFill>
-          <a:ln w="25400">
-            <a:solidFill>
-              <a:srgbClr val="1E2761"/>
-            </a:solidFill>
-            <a:prstDash val="solid"/>
-          </a:ln>
-        </p:spPr>
-      </p:sp>
-      <p:sp>
-        <p:nvSpPr>
-          <p:cNvPr id="16" name="Text 14"/>
-          <p:cNvSpPr txBox="1"/>
-          <p:nvPr/>
-        </p:nvSpPr>
-        <p:spPr>
-          <a:xfrm>
-            <a:off x="1508760" y="3703320"/>
-            <a:ext cx="9784080" cy="731520"/>
+          <p:cNvPr id="22" name="Text 19"/>
+          <p:cNvSpPr txBox="1"/>
+          <p:nvPr/>
+        </p:nvSpPr>
+        <p:spPr>
+          <a:xfrm>
+            <a:off x="7653528" y="4636008"/>
+            <a:ext cx="3712464" cy="923544"/>
           </a:xfrm>
           <a:prstGeom prst="rect">
             <a:avLst/>
@@ -6496,158 +6588,62 @@
           <a:p>
             <a:pPr algn="l" indent="0" marL="0">
               <a:lnSpc>
-                <a:spcPct val="120000"/>
+                <a:spcPct val="125000"/>
               </a:lnSpc>
               <a:buNone/>
             </a:pPr>
             <a:r>
-              <a:rPr lang="en-US" sz="1500" b="1" dirty="0">
-                <a:solidFill>
-                  <a:srgbClr val="1F2937"/>
-                </a:solidFill>
-                <a:latin typeface="Meiryo" pitchFamily="34" charset="0"/>
-                <a:ea typeface="Meiryo" pitchFamily="34" charset="-122"/>
-                <a:cs typeface="Meiryo" pitchFamily="34" charset="-120"/>
-              </a:rPr>
-              <a:t>「開催企業へのメッセージ」を確認したか</a:t>
-            </a:r>
-            <a:endParaRPr lang="en-US" sz="1500" dirty="0"/>
+              <a:rPr lang="en-US" sz="1250" dirty="0">
+                <a:solidFill>
+                  <a:srgbClr val="1E2761"/>
+                </a:solidFill>
+                <a:latin typeface="Meiryo" pitchFamily="34" charset="0"/>
+                <a:ea typeface="Meiryo" pitchFamily="34" charset="-122"/>
+                <a:cs typeface="Meiryo" pitchFamily="34" charset="-120"/>
+              </a:rPr>
+              <a:t>送信完了まで数分かかることがあります。</a:t>
+            </a:r>
+            <a:endParaRPr lang="en-US" sz="1250" dirty="0"/>
           </a:p>
           <a:p>
             <a:pPr algn="l" indent="0" marL="0">
               <a:lnSpc>
-                <a:spcPct val="120000"/>
+                <a:spcPct val="125000"/>
               </a:lnSpc>
               <a:buNone/>
             </a:pPr>
             <a:r>
               <a:rPr lang="en-US" sz="1250" dirty="0">
                 <a:solidFill>
-                  <a:srgbClr val="5B6472"/>
-                </a:solidFill>
-                <a:latin typeface="Meiryo" pitchFamily="34" charset="0"/>
-                <a:ea typeface="Meiryo" pitchFamily="34" charset="-122"/>
-                <a:cs typeface="Meiryo" pitchFamily="34" charset="-120"/>
-              </a:rPr>
-              <a:t>アレルギー、車椅子のご利用など</a:t>
-            </a:r>
-            <a:endParaRPr lang="en-US" sz="1500" dirty="0"/>
-          </a:p>
-        </p:txBody>
-      </p:sp>
-      <p:sp>
-        <p:nvSpPr>
-          <p:cNvPr id="17" name="Shape 15"/>
-          <p:cNvSpPr/>
-          <p:nvPr/>
-        </p:nvSpPr>
-        <p:spPr>
-          <a:xfrm>
-            <a:off x="640080" y="4663440"/>
-            <a:ext cx="10927080" cy="914400"/>
-          </a:xfrm>
-          <a:prstGeom prst="roundRect">
-            <a:avLst>
-              <a:gd name="adj" fmla="val 8000"/>
-            </a:avLst>
-          </a:prstGeom>
-          <a:solidFill>
-            <a:srgbClr val="F4F7FC"/>
-          </a:solidFill>
-          <a:ln w="12700">
-            <a:solidFill>
-              <a:srgbClr val="C7D2E4"/>
-            </a:solidFill>
-            <a:prstDash val="solid"/>
-          </a:ln>
-        </p:spPr>
-      </p:sp>
-      <p:sp>
-        <p:nvSpPr>
-          <p:cNvPr id="18" name="Shape 16"/>
-          <p:cNvSpPr/>
-          <p:nvPr/>
-        </p:nvSpPr>
-        <p:spPr>
-          <a:xfrm>
-            <a:off x="914400" y="4919472"/>
-            <a:ext cx="402336" cy="402336"/>
-          </a:xfrm>
-          <a:prstGeom prst="roundRect">
-            <a:avLst>
-              <a:gd name="adj" fmla="val 13636"/>
-            </a:avLst>
-          </a:prstGeom>
-          <a:solidFill>
-            <a:srgbClr val="FFFFFF"/>
-          </a:solidFill>
-          <a:ln w="25400">
-            <a:solidFill>
-              <a:srgbClr val="1E2761"/>
-            </a:solidFill>
-            <a:prstDash val="solid"/>
-          </a:ln>
-        </p:spPr>
-      </p:sp>
-      <p:sp>
-        <p:nvSpPr>
-          <p:cNvPr id="19" name="Text 17"/>
-          <p:cNvSpPr txBox="1"/>
-          <p:nvPr/>
-        </p:nvSpPr>
-        <p:spPr>
-          <a:xfrm>
-            <a:off x="1508760" y="4754880"/>
-            <a:ext cx="9784080" cy="731520"/>
-          </a:xfrm>
-          <a:prstGeom prst="rect">
-            <a:avLst/>
-          </a:prstGeom>
-          <a:noFill/>
-          <a:ln/>
-        </p:spPr>
-        <p:txBody>
-          <a:bodyPr wrap="square" lIns="0" tIns="0" rIns="0" bIns="0" rtlCol="0" anchor="ctr"/>
-          <a:lstStyle/>
+                  <a:srgbClr val="1E2761"/>
+                </a:solidFill>
+                <a:latin typeface="Meiryo" pitchFamily="34" charset="0"/>
+                <a:ea typeface="Meiryo" pitchFamily="34" charset="-122"/>
+                <a:cs typeface="Meiryo" pitchFamily="34" charset="-120"/>
+              </a:rPr>
+              <a:t>お急ぎの場合や「届かない」という</a:t>
+            </a:r>
+            <a:endParaRPr lang="en-US" sz="1250" dirty="0"/>
+          </a:p>
           <a:p>
             <a:pPr algn="l" indent="0" marL="0">
               <a:lnSpc>
-                <a:spcPct val="120000"/>
+                <a:spcPct val="125000"/>
               </a:lnSpc>
               <a:buNone/>
             </a:pPr>
             <a:r>
-              <a:rPr lang="en-US" sz="1500" b="1" dirty="0">
-                <a:solidFill>
-                  <a:srgbClr val="1F2937"/>
-                </a:solidFill>
-                <a:latin typeface="Meiryo" pitchFamily="34" charset="0"/>
-                <a:ea typeface="Meiryo" pitchFamily="34" charset="-122"/>
-                <a:cs typeface="Meiryo" pitchFamily="34" charset="-120"/>
-              </a:rPr>
-              <a:t>当日の名簿を CSV で出力したか</a:t>
-            </a:r>
-            <a:endParaRPr lang="en-US" sz="1500" dirty="0"/>
-          </a:p>
-          <a:p>
-            <a:pPr algn="l" indent="0" marL="0">
-              <a:lnSpc>
-                <a:spcPct val="120000"/>
-              </a:lnSpc>
-              <a:buNone/>
-            </a:pPr>
-            <a:r>
               <a:rPr lang="en-US" sz="1250" dirty="0">
                 <a:solidFill>
-                  <a:srgbClr val="5B6472"/>
-                </a:solidFill>
-                <a:latin typeface="Meiryo" pitchFamily="34" charset="0"/>
-                <a:ea typeface="Meiryo" pitchFamily="34" charset="-122"/>
-                <a:cs typeface="Meiryo" pitchFamily="34" charset="-120"/>
-              </a:rPr>
-              <a:t>並び順は「会社・体験プログラム・開催日時順」が便利です</a:t>
-            </a:r>
-            <a:endParaRPr lang="en-US" sz="1500" dirty="0"/>
+                  <a:srgbClr val="1E2761"/>
+                </a:solidFill>
+                <a:latin typeface="Meiryo" pitchFamily="34" charset="0"/>
+                <a:ea typeface="Meiryo" pitchFamily="34" charset="-122"/>
+                <a:cs typeface="Meiryo" pitchFamily="34" charset="-120"/>
+              </a:rPr>
+              <a:t>お問い合わせは事務局へ。</a:t>
+            </a:r>
+            <a:endParaRPr lang="en-US" sz="1250" dirty="0"/>
           </a:p>
         </p:txBody>
       </p:sp>
@@ -6662,6 +6658,717 @@
 <file path=ppt/slides/slide17.xml><?xml version="1.0" encoding="utf-8"?>
 <p:sld xmlns:a="http://schemas.openxmlformats.org/drawingml/2006/main" xmlns:r="http://schemas.openxmlformats.org/officeDocument/2006/relationships" xmlns:p="http://schemas.openxmlformats.org/presentationml/2006/main">
   <p:cSld name="Slide 17">
+    <p:bg>
+      <p:bgPr>
+        <a:solidFill>
+          <a:srgbClr val="FFFFFF"/>
+        </a:solidFill>
+      </p:bgPr>
+    </p:bg>
+    <p:spTree>
+      <p:nvGrpSpPr>
+        <p:cNvPr id="1" name=""/>
+        <p:cNvGrpSpPr/>
+        <p:nvPr/>
+      </p:nvGrpSpPr>
+      <p:grpSpPr>
+        <a:xfrm>
+          <a:off x="0" y="0"/>
+          <a:ext cx="0" cy="0"/>
+          <a:chOff x="0" y="0"/>
+          <a:chExt cx="0" cy="0"/>
+        </a:xfrm>
+      </p:grpSpPr>
+      <p:sp>
+        <p:nvSpPr>
+          <p:cNvPr id="2" name="Text 0"/>
+          <p:cNvSpPr txBox="1"/>
+          <p:nvPr/>
+        </p:nvSpPr>
+        <p:spPr>
+          <a:xfrm>
+            <a:off x="502920" y="6400800"/>
+            <a:ext cx="7315200" cy="274320"/>
+          </a:xfrm>
+          <a:prstGeom prst="rect">
+            <a:avLst/>
+          </a:prstGeom>
+          <a:noFill/>
+          <a:ln/>
+        </p:spPr>
+        <p:txBody>
+          <a:bodyPr wrap="square" lIns="0" tIns="0" rIns="0" bIns="0" rtlCol="0" anchor="ctr"/>
+          <a:lstStyle/>
+          <a:p>
+            <a:pPr algn="l" indent="0" marL="0">
+              <a:buNone/>
+            </a:pPr>
+            <a:r>
+              <a:rPr lang="en-US" sz="1000" dirty="0">
+                <a:solidFill>
+                  <a:srgbClr val="5B6472"/>
+                </a:solidFill>
+                <a:latin typeface="Meiryo" pitchFamily="34" charset="0"/>
+                <a:ea typeface="Meiryo" pitchFamily="34" charset="-122"/>
+                <a:cs typeface="Meiryo" pitchFamily="34" charset="-120"/>
+              </a:rPr>
+              <a:t>体験予約システム 操作マニュアル（会社担当者用）</a:t>
+            </a:r>
+            <a:endParaRPr lang="en-US" sz="1000" dirty="0"/>
+          </a:p>
+        </p:txBody>
+      </p:sp>
+      <p:sp>
+        <p:nvSpPr>
+          <p:cNvPr id="3" name="Text 1"/>
+          <p:cNvSpPr txBox="1"/>
+          <p:nvPr/>
+        </p:nvSpPr>
+        <p:spPr>
+          <a:xfrm>
+            <a:off x="11094415" y="6400800"/>
+            <a:ext cx="594360" cy="274320"/>
+          </a:xfrm>
+          <a:prstGeom prst="rect">
+            <a:avLst/>
+          </a:prstGeom>
+          <a:noFill/>
+          <a:ln/>
+        </p:spPr>
+        <p:txBody>
+          <a:bodyPr wrap="square" lIns="0" tIns="0" rIns="0" bIns="0" rtlCol="0" anchor="ctr"/>
+          <a:lstStyle/>
+          <a:p>
+            <a:pPr algn="r" indent="0" marL="0">
+              <a:buNone/>
+            </a:pPr>
+            <a:r>
+              <a:rPr lang="en-US" sz="1000" dirty="0">
+                <a:solidFill>
+                  <a:srgbClr val="5B6472"/>
+                </a:solidFill>
+                <a:latin typeface="Meiryo" pitchFamily="34" charset="0"/>
+                <a:ea typeface="Meiryo" pitchFamily="34" charset="-122"/>
+                <a:cs typeface="Meiryo" pitchFamily="34" charset="-120"/>
+              </a:rPr>
+              <a:t>16</a:t>
+            </a:r>
+            <a:endParaRPr lang="en-US" sz="1000" dirty="0"/>
+          </a:p>
+        </p:txBody>
+      </p:sp>
+      <p:sp>
+        <p:nvSpPr>
+          <p:cNvPr id="4" name="Shape 2"/>
+          <p:cNvSpPr/>
+          <p:nvPr/>
+        </p:nvSpPr>
+        <p:spPr>
+          <a:xfrm>
+            <a:off x="502920" y="384048"/>
+            <a:ext cx="566928" cy="566928"/>
+          </a:xfrm>
+          <a:prstGeom prst="ellipse">
+            <a:avLst/>
+          </a:prstGeom>
+          <a:solidFill>
+            <a:srgbClr val="1E2761"/>
+          </a:solidFill>
+          <a:ln/>
+        </p:spPr>
+      </p:sp>
+      <p:sp>
+        <p:nvSpPr>
+          <p:cNvPr id="5" name="Text 3"/>
+          <p:cNvSpPr txBox="1"/>
+          <p:nvPr/>
+        </p:nvSpPr>
+        <p:spPr>
+          <a:xfrm>
+            <a:off x="502920" y="384048"/>
+            <a:ext cx="566928" cy="566928"/>
+          </a:xfrm>
+          <a:prstGeom prst="rect">
+            <a:avLst/>
+          </a:prstGeom>
+          <a:noFill/>
+          <a:ln/>
+        </p:spPr>
+        <p:txBody>
+          <a:bodyPr wrap="square" rtlCol="0" anchor="ctr"/>
+          <a:lstStyle/>
+          <a:p>
+            <a:pPr algn="ctr" indent="0" marL="0">
+              <a:buNone/>
+            </a:pPr>
+            <a:r>
+              <a:rPr lang="en-US" sz="2000" b="1" dirty="0">
+                <a:solidFill>
+                  <a:srgbClr val="FFFFFF"/>
+                </a:solidFill>
+                <a:latin typeface="Meiryo" pitchFamily="34" charset="0"/>
+                <a:ea typeface="Meiryo" pitchFamily="34" charset="-122"/>
+                <a:cs typeface="Meiryo" pitchFamily="34" charset="-120"/>
+              </a:rPr>
+              <a:t>16</a:t>
+            </a:r>
+            <a:endParaRPr lang="en-US" sz="2000" dirty="0"/>
+          </a:p>
+        </p:txBody>
+      </p:sp>
+      <p:sp>
+        <p:nvSpPr>
+          <p:cNvPr id="6" name="Text 4"/>
+          <p:cNvSpPr txBox="1"/>
+          <p:nvPr/>
+        </p:nvSpPr>
+        <p:spPr>
+          <a:xfrm>
+            <a:off x="1225296" y="347472"/>
+            <a:ext cx="10424160" cy="457200"/>
+          </a:xfrm>
+          <a:prstGeom prst="rect">
+            <a:avLst/>
+          </a:prstGeom>
+          <a:noFill/>
+          <a:ln/>
+        </p:spPr>
+        <p:txBody>
+          <a:bodyPr wrap="square" lIns="0" tIns="0" rIns="0" bIns="0" rtlCol="0" anchor="ctr"/>
+          <a:lstStyle/>
+          <a:p>
+            <a:pPr algn="l" indent="0" marL="0">
+              <a:buNone/>
+            </a:pPr>
+            <a:r>
+              <a:rPr lang="en-US" sz="2800" b="1" dirty="0">
+                <a:solidFill>
+                  <a:srgbClr val="1E2761"/>
+                </a:solidFill>
+                <a:latin typeface="Meiryo" pitchFamily="34" charset="0"/>
+                <a:ea typeface="Meiryo" pitchFamily="34" charset="-122"/>
+                <a:cs typeface="Meiryo" pitchFamily="34" charset="-120"/>
+              </a:rPr>
+              <a:t>開催前日までの確認</a:t>
+            </a:r>
+            <a:endParaRPr lang="en-US" sz="2800" dirty="0"/>
+          </a:p>
+        </p:txBody>
+      </p:sp>
+      <p:sp>
+        <p:nvSpPr>
+          <p:cNvPr id="7" name="Text 5"/>
+          <p:cNvSpPr txBox="1"/>
+          <p:nvPr/>
+        </p:nvSpPr>
+        <p:spPr>
+          <a:xfrm>
+            <a:off x="1225296" y="841248"/>
+            <a:ext cx="10424160" cy="329184"/>
+          </a:xfrm>
+          <a:prstGeom prst="rect">
+            <a:avLst/>
+          </a:prstGeom>
+          <a:noFill/>
+          <a:ln/>
+        </p:spPr>
+        <p:txBody>
+          <a:bodyPr wrap="square" lIns="0" tIns="0" rIns="0" bIns="0" rtlCol="0" anchor="ctr"/>
+          <a:lstStyle/>
+          <a:p>
+            <a:pPr algn="l" indent="0" marL="0">
+              <a:buNone/>
+            </a:pPr>
+            <a:r>
+              <a:rPr lang="en-US" sz="1400" dirty="0">
+                <a:solidFill>
+                  <a:srgbClr val="5B6472"/>
+                </a:solidFill>
+                <a:latin typeface="Meiryo" pitchFamily="34" charset="0"/>
+                <a:ea typeface="Meiryo" pitchFamily="34" charset="-122"/>
+                <a:cs typeface="Meiryo" pitchFamily="34" charset="-120"/>
+              </a:rPr>
+              <a:t>この 4 つを確認すれば、当日に慌てません</a:t>
+            </a:r>
+            <a:endParaRPr lang="en-US" sz="1400" dirty="0"/>
+          </a:p>
+        </p:txBody>
+      </p:sp>
+      <p:sp>
+        <p:nvSpPr>
+          <p:cNvPr id="8" name="Shape 6"/>
+          <p:cNvSpPr/>
+          <p:nvPr/>
+        </p:nvSpPr>
+        <p:spPr>
+          <a:xfrm>
+            <a:off x="640080" y="1508760"/>
+            <a:ext cx="10927080" cy="914400"/>
+          </a:xfrm>
+          <a:prstGeom prst="roundRect">
+            <a:avLst>
+              <a:gd name="adj" fmla="val 8000"/>
+            </a:avLst>
+          </a:prstGeom>
+          <a:solidFill>
+            <a:srgbClr val="F4F7FC"/>
+          </a:solidFill>
+          <a:ln w="12700">
+            <a:solidFill>
+              <a:srgbClr val="C7D2E4"/>
+            </a:solidFill>
+            <a:prstDash val="solid"/>
+          </a:ln>
+        </p:spPr>
+      </p:sp>
+      <p:sp>
+        <p:nvSpPr>
+          <p:cNvPr id="9" name="Shape 7"/>
+          <p:cNvSpPr/>
+          <p:nvPr/>
+        </p:nvSpPr>
+        <p:spPr>
+          <a:xfrm>
+            <a:off x="914400" y="1764792"/>
+            <a:ext cx="402336" cy="402336"/>
+          </a:xfrm>
+          <a:prstGeom prst="roundRect">
+            <a:avLst>
+              <a:gd name="adj" fmla="val 13636"/>
+            </a:avLst>
+          </a:prstGeom>
+          <a:solidFill>
+            <a:srgbClr val="FFFFFF"/>
+          </a:solidFill>
+          <a:ln w="25400">
+            <a:solidFill>
+              <a:srgbClr val="1E2761"/>
+            </a:solidFill>
+            <a:prstDash val="solid"/>
+          </a:ln>
+        </p:spPr>
+      </p:sp>
+      <p:sp>
+        <p:nvSpPr>
+          <p:cNvPr id="10" name="Text 8"/>
+          <p:cNvSpPr txBox="1"/>
+          <p:nvPr/>
+        </p:nvSpPr>
+        <p:spPr>
+          <a:xfrm>
+            <a:off x="1508760" y="1600200"/>
+            <a:ext cx="9784080" cy="731520"/>
+          </a:xfrm>
+          <a:prstGeom prst="rect">
+            <a:avLst/>
+          </a:prstGeom>
+          <a:noFill/>
+          <a:ln/>
+        </p:spPr>
+        <p:txBody>
+          <a:bodyPr wrap="square" lIns="0" tIns="0" rIns="0" bIns="0" rtlCol="0" anchor="ctr"/>
+          <a:lstStyle/>
+          <a:p>
+            <a:pPr algn="l" indent="0" marL="0">
+              <a:lnSpc>
+                <a:spcPct val="120000"/>
+              </a:lnSpc>
+              <a:buNone/>
+            </a:pPr>
+            <a:r>
+              <a:rPr lang="en-US" sz="1500" b="1" dirty="0">
+                <a:solidFill>
+                  <a:srgbClr val="1F2937"/>
+                </a:solidFill>
+                <a:latin typeface="Meiryo" pitchFamily="34" charset="0"/>
+                <a:ea typeface="Meiryo" pitchFamily="34" charset="-122"/>
+                <a:cs typeface="Meiryo" pitchFamily="34" charset="-120"/>
+              </a:rPr>
+              <a:t>ダッシュボードの「繰り上げ候補のある開催回」が 0 件になっているか</a:t>
+            </a:r>
+            <a:endParaRPr lang="en-US" sz="1500" dirty="0"/>
+          </a:p>
+          <a:p>
+            <a:pPr algn="l" indent="0" marL="0">
+              <a:lnSpc>
+                <a:spcPct val="120000"/>
+              </a:lnSpc>
+              <a:buNone/>
+            </a:pPr>
+            <a:r>
+              <a:rPr lang="en-US" sz="1250" dirty="0">
+                <a:solidFill>
+                  <a:srgbClr val="5B6472"/>
+                </a:solidFill>
+                <a:latin typeface="Meiryo" pitchFamily="34" charset="0"/>
+                <a:ea typeface="Meiryo" pitchFamily="34" charset="-122"/>
+                <a:cs typeface="Meiryo" pitchFamily="34" charset="-120"/>
+              </a:rPr>
+              <a:t>残っていれば、手立て A〜E をご検討ください</a:t>
+            </a:r>
+            <a:endParaRPr lang="en-US" sz="1500" dirty="0"/>
+          </a:p>
+        </p:txBody>
+      </p:sp>
+      <p:sp>
+        <p:nvSpPr>
+          <p:cNvPr id="11" name="Shape 9"/>
+          <p:cNvSpPr/>
+          <p:nvPr/>
+        </p:nvSpPr>
+        <p:spPr>
+          <a:xfrm>
+            <a:off x="640080" y="2560320"/>
+            <a:ext cx="10927080" cy="914400"/>
+          </a:xfrm>
+          <a:prstGeom prst="roundRect">
+            <a:avLst>
+              <a:gd name="adj" fmla="val 8000"/>
+            </a:avLst>
+          </a:prstGeom>
+          <a:solidFill>
+            <a:srgbClr val="F4F7FC"/>
+          </a:solidFill>
+          <a:ln w="12700">
+            <a:solidFill>
+              <a:srgbClr val="C7D2E4"/>
+            </a:solidFill>
+            <a:prstDash val="solid"/>
+          </a:ln>
+        </p:spPr>
+      </p:sp>
+      <p:sp>
+        <p:nvSpPr>
+          <p:cNvPr id="12" name="Shape 10"/>
+          <p:cNvSpPr/>
+          <p:nvPr/>
+        </p:nvSpPr>
+        <p:spPr>
+          <a:xfrm>
+            <a:off x="914400" y="2816352"/>
+            <a:ext cx="402336" cy="402336"/>
+          </a:xfrm>
+          <a:prstGeom prst="roundRect">
+            <a:avLst>
+              <a:gd name="adj" fmla="val 13636"/>
+            </a:avLst>
+          </a:prstGeom>
+          <a:solidFill>
+            <a:srgbClr val="FFFFFF"/>
+          </a:solidFill>
+          <a:ln w="25400">
+            <a:solidFill>
+              <a:srgbClr val="1E2761"/>
+            </a:solidFill>
+            <a:prstDash val="solid"/>
+          </a:ln>
+        </p:spPr>
+      </p:sp>
+      <p:sp>
+        <p:nvSpPr>
+          <p:cNvPr id="13" name="Text 11"/>
+          <p:cNvSpPr txBox="1"/>
+          <p:nvPr/>
+        </p:nvSpPr>
+        <p:spPr>
+          <a:xfrm>
+            <a:off x="1508760" y="2651760"/>
+            <a:ext cx="9784080" cy="731520"/>
+          </a:xfrm>
+          <a:prstGeom prst="rect">
+            <a:avLst/>
+          </a:prstGeom>
+          <a:noFill/>
+          <a:ln/>
+        </p:spPr>
+        <p:txBody>
+          <a:bodyPr wrap="square" lIns="0" tIns="0" rIns="0" bIns="0" rtlCol="0" anchor="ctr"/>
+          <a:lstStyle/>
+          <a:p>
+            <a:pPr algn="l" indent="0" marL="0">
+              <a:lnSpc>
+                <a:spcPct val="120000"/>
+              </a:lnSpc>
+              <a:buNone/>
+            </a:pPr>
+            <a:r>
+              <a:rPr lang="en-US" sz="1500" b="1" dirty="0">
+                <a:solidFill>
+                  <a:srgbClr val="1F2937"/>
+                </a:solidFill>
+                <a:latin typeface="Meiryo" pitchFamily="34" charset="0"/>
+                <a:ea typeface="Meiryo" pitchFamily="34" charset="-122"/>
+                <a:cs typeface="Meiryo" pitchFamily="34" charset="-120"/>
+              </a:rPr>
+              <a:t>繰り上げた方に確定メールが届いているか</a:t>
+            </a:r>
+            <a:endParaRPr lang="en-US" sz="1500" dirty="0"/>
+          </a:p>
+          <a:p>
+            <a:pPr algn="l" indent="0" marL="0">
+              <a:lnSpc>
+                <a:spcPct val="120000"/>
+              </a:lnSpc>
+              <a:buNone/>
+            </a:pPr>
+            <a:r>
+              <a:rPr lang="en-US" sz="1250" dirty="0">
+                <a:solidFill>
+                  <a:srgbClr val="5B6472"/>
+                </a:solidFill>
+                <a:latin typeface="Meiryo" pitchFamily="34" charset="0"/>
+                <a:ea typeface="Meiryo" pitchFamily="34" charset="-122"/>
+                <a:cs typeface="Meiryo" pitchFamily="34" charset="-120"/>
+              </a:rPr>
+              <a:t>届かないというお問い合わせがあれば事務局へ</a:t>
+            </a:r>
+            <a:endParaRPr lang="en-US" sz="1500" dirty="0"/>
+          </a:p>
+        </p:txBody>
+      </p:sp>
+      <p:sp>
+        <p:nvSpPr>
+          <p:cNvPr id="14" name="Shape 12"/>
+          <p:cNvSpPr/>
+          <p:nvPr/>
+        </p:nvSpPr>
+        <p:spPr>
+          <a:xfrm>
+            <a:off x="640080" y="3611880"/>
+            <a:ext cx="10927080" cy="914400"/>
+          </a:xfrm>
+          <a:prstGeom prst="roundRect">
+            <a:avLst>
+              <a:gd name="adj" fmla="val 8000"/>
+            </a:avLst>
+          </a:prstGeom>
+          <a:solidFill>
+            <a:srgbClr val="F4F7FC"/>
+          </a:solidFill>
+          <a:ln w="12700">
+            <a:solidFill>
+              <a:srgbClr val="C7D2E4"/>
+            </a:solidFill>
+            <a:prstDash val="solid"/>
+          </a:ln>
+        </p:spPr>
+      </p:sp>
+      <p:sp>
+        <p:nvSpPr>
+          <p:cNvPr id="15" name="Shape 13"/>
+          <p:cNvSpPr/>
+          <p:nvPr/>
+        </p:nvSpPr>
+        <p:spPr>
+          <a:xfrm>
+            <a:off x="914400" y="3867912"/>
+            <a:ext cx="402336" cy="402336"/>
+          </a:xfrm>
+          <a:prstGeom prst="roundRect">
+            <a:avLst>
+              <a:gd name="adj" fmla="val 13636"/>
+            </a:avLst>
+          </a:prstGeom>
+          <a:solidFill>
+            <a:srgbClr val="FFFFFF"/>
+          </a:solidFill>
+          <a:ln w="25400">
+            <a:solidFill>
+              <a:srgbClr val="1E2761"/>
+            </a:solidFill>
+            <a:prstDash val="solid"/>
+          </a:ln>
+        </p:spPr>
+      </p:sp>
+      <p:sp>
+        <p:nvSpPr>
+          <p:cNvPr id="16" name="Text 14"/>
+          <p:cNvSpPr txBox="1"/>
+          <p:nvPr/>
+        </p:nvSpPr>
+        <p:spPr>
+          <a:xfrm>
+            <a:off x="1508760" y="3703320"/>
+            <a:ext cx="9784080" cy="731520"/>
+          </a:xfrm>
+          <a:prstGeom prst="rect">
+            <a:avLst/>
+          </a:prstGeom>
+          <a:noFill/>
+          <a:ln/>
+        </p:spPr>
+        <p:txBody>
+          <a:bodyPr wrap="square" lIns="0" tIns="0" rIns="0" bIns="0" rtlCol="0" anchor="ctr"/>
+          <a:lstStyle/>
+          <a:p>
+            <a:pPr algn="l" indent="0" marL="0">
+              <a:lnSpc>
+                <a:spcPct val="120000"/>
+              </a:lnSpc>
+              <a:buNone/>
+            </a:pPr>
+            <a:r>
+              <a:rPr lang="en-US" sz="1500" b="1" dirty="0">
+                <a:solidFill>
+                  <a:srgbClr val="1F2937"/>
+                </a:solidFill>
+                <a:latin typeface="Meiryo" pitchFamily="34" charset="0"/>
+                <a:ea typeface="Meiryo" pitchFamily="34" charset="-122"/>
+                <a:cs typeface="Meiryo" pitchFamily="34" charset="-120"/>
+              </a:rPr>
+              <a:t>「開催企業へのメッセージ」を確認したか</a:t>
+            </a:r>
+            <a:endParaRPr lang="en-US" sz="1500" dirty="0"/>
+          </a:p>
+          <a:p>
+            <a:pPr algn="l" indent="0" marL="0">
+              <a:lnSpc>
+                <a:spcPct val="120000"/>
+              </a:lnSpc>
+              <a:buNone/>
+            </a:pPr>
+            <a:r>
+              <a:rPr lang="en-US" sz="1250" dirty="0">
+                <a:solidFill>
+                  <a:srgbClr val="5B6472"/>
+                </a:solidFill>
+                <a:latin typeface="Meiryo" pitchFamily="34" charset="0"/>
+                <a:ea typeface="Meiryo" pitchFamily="34" charset="-122"/>
+                <a:cs typeface="Meiryo" pitchFamily="34" charset="-120"/>
+              </a:rPr>
+              <a:t>アレルギー、車椅子のご利用など</a:t>
+            </a:r>
+            <a:endParaRPr lang="en-US" sz="1500" dirty="0"/>
+          </a:p>
+        </p:txBody>
+      </p:sp>
+      <p:sp>
+        <p:nvSpPr>
+          <p:cNvPr id="17" name="Shape 15"/>
+          <p:cNvSpPr/>
+          <p:nvPr/>
+        </p:nvSpPr>
+        <p:spPr>
+          <a:xfrm>
+            <a:off x="640080" y="4663440"/>
+            <a:ext cx="10927080" cy="914400"/>
+          </a:xfrm>
+          <a:prstGeom prst="roundRect">
+            <a:avLst>
+              <a:gd name="adj" fmla="val 8000"/>
+            </a:avLst>
+          </a:prstGeom>
+          <a:solidFill>
+            <a:srgbClr val="F4F7FC"/>
+          </a:solidFill>
+          <a:ln w="12700">
+            <a:solidFill>
+              <a:srgbClr val="C7D2E4"/>
+            </a:solidFill>
+            <a:prstDash val="solid"/>
+          </a:ln>
+        </p:spPr>
+      </p:sp>
+      <p:sp>
+        <p:nvSpPr>
+          <p:cNvPr id="18" name="Shape 16"/>
+          <p:cNvSpPr/>
+          <p:nvPr/>
+        </p:nvSpPr>
+        <p:spPr>
+          <a:xfrm>
+            <a:off x="914400" y="4919472"/>
+            <a:ext cx="402336" cy="402336"/>
+          </a:xfrm>
+          <a:prstGeom prst="roundRect">
+            <a:avLst>
+              <a:gd name="adj" fmla="val 13636"/>
+            </a:avLst>
+          </a:prstGeom>
+          <a:solidFill>
+            <a:srgbClr val="FFFFFF"/>
+          </a:solidFill>
+          <a:ln w="25400">
+            <a:solidFill>
+              <a:srgbClr val="1E2761"/>
+            </a:solidFill>
+            <a:prstDash val="solid"/>
+          </a:ln>
+        </p:spPr>
+      </p:sp>
+      <p:sp>
+        <p:nvSpPr>
+          <p:cNvPr id="19" name="Text 17"/>
+          <p:cNvSpPr txBox="1"/>
+          <p:nvPr/>
+        </p:nvSpPr>
+        <p:spPr>
+          <a:xfrm>
+            <a:off x="1508760" y="4754880"/>
+            <a:ext cx="9784080" cy="731520"/>
+          </a:xfrm>
+          <a:prstGeom prst="rect">
+            <a:avLst/>
+          </a:prstGeom>
+          <a:noFill/>
+          <a:ln/>
+        </p:spPr>
+        <p:txBody>
+          <a:bodyPr wrap="square" lIns="0" tIns="0" rIns="0" bIns="0" rtlCol="0" anchor="ctr"/>
+          <a:lstStyle/>
+          <a:p>
+            <a:pPr algn="l" indent="0" marL="0">
+              <a:lnSpc>
+                <a:spcPct val="120000"/>
+              </a:lnSpc>
+              <a:buNone/>
+            </a:pPr>
+            <a:r>
+              <a:rPr lang="en-US" sz="1500" b="1" dirty="0">
+                <a:solidFill>
+                  <a:srgbClr val="1F2937"/>
+                </a:solidFill>
+                <a:latin typeface="Meiryo" pitchFamily="34" charset="0"/>
+                <a:ea typeface="Meiryo" pitchFamily="34" charset="-122"/>
+                <a:cs typeface="Meiryo" pitchFamily="34" charset="-120"/>
+              </a:rPr>
+              <a:t>当日の名簿を CSV で出力したか</a:t>
+            </a:r>
+            <a:endParaRPr lang="en-US" sz="1500" dirty="0"/>
+          </a:p>
+          <a:p>
+            <a:pPr algn="l" indent="0" marL="0">
+              <a:lnSpc>
+                <a:spcPct val="120000"/>
+              </a:lnSpc>
+              <a:buNone/>
+            </a:pPr>
+            <a:r>
+              <a:rPr lang="en-US" sz="1250" dirty="0">
+                <a:solidFill>
+                  <a:srgbClr val="5B6472"/>
+                </a:solidFill>
+                <a:latin typeface="Meiryo" pitchFamily="34" charset="0"/>
+                <a:ea typeface="Meiryo" pitchFamily="34" charset="-122"/>
+                <a:cs typeface="Meiryo" pitchFamily="34" charset="-120"/>
+              </a:rPr>
+              <a:t>並び順は「会社・体験プログラム・開催日時順」が便利です</a:t>
+            </a:r>
+            <a:endParaRPr lang="en-US" sz="1500" dirty="0"/>
+          </a:p>
+        </p:txBody>
+      </p:sp>
+    </p:spTree>
+  </p:cSld>
+  <p:clrMapOvr>
+    <a:masterClrMapping/>
+  </p:clrMapOvr>
+</p:sld>
+</file>
+
+<file path=ppt/slides/slide18.xml><?xml version="1.0" encoding="utf-8"?>
+<p:sld xmlns:a="http://schemas.openxmlformats.org/drawingml/2006/main" xmlns:r="http://schemas.openxmlformats.org/officeDocument/2006/relationships" xmlns:p="http://schemas.openxmlformats.org/presentationml/2006/main">
+  <p:cSld name="Slide 18">
     <p:bg>
       <p:bgPr>
         <a:solidFill>
@@ -6892,7 +7599,7 @@
                 <a:ea typeface="Meiryo" pitchFamily="34" charset="-122"/>
                 <a:cs typeface="Meiryo" pitchFamily="34" charset="-120"/>
               </a:rPr>
-              <a:t>16</a:t>
+              <a:t>17</a:t>
             </a:r>
             <a:endParaRPr lang="en-US" sz="1000" dirty="0"/>
           </a:p>
@@ -10704,7 +11411,7 @@
                 <a:ea typeface="Meiryo" pitchFamily="34" charset="-122"/>
                 <a:cs typeface="Meiryo" pitchFamily="34" charset="-120"/>
               </a:rPr>
-              <a:t>空きより、繰り上げたい人数が多いとき</a:t>
+              <a:t>繰り上げる前に、その方の同じ日の予約を見る</a:t>
             </a:r>
             <a:endParaRPr lang="en-US" sz="2800" dirty="0"/>
           </a:p>
@@ -10743,7 +11450,7 @@
                 <a:ea typeface="Meiryo" pitchFamily="34" charset="-122"/>
                 <a:cs typeface="Meiryo" pitchFamily="34" charset="-120"/>
               </a:rPr>
-              <a:t>まずは画面での見分け方です</a:t>
+              <a:t>「開催日時」の下に、その方が同じ日に予約している他の催事が出ます</a:t>
             </a:r>
             <a:endParaRPr lang="en-US" sz="1400" dirty="0"/>
           </a:p>
@@ -10751,7 +11458,7 @@
       </p:sp>
       <p:pic>
         <p:nvPicPr>
-          <p:cNvPr id="8" name="Image 0" descr="C:\Users\sato\AppData\Local\Temp\claude\c--Users-sato-Desktop---3---3\c0abf194-6a09-42ac-bc16-2cd244740c64\scratchpad\deck\img\c-notenough.png">    </p:cNvPr>
+          <p:cNvPr id="8" name="Image 0" descr="C:\Users\sato\AppData\Local\Temp\claude\c--Users-sato-Desktop---3---3\c0abf194-6a09-42ac-bc16-2cd244740c64\scratchpad\deck\img\c-clash.png">    </p:cNvPr>
           <p:cNvPicPr>
             <a:picLocks noChangeAspect="1"/>
           </p:cNvPicPr>
@@ -10765,8 +11472,8 @@
         </p:blipFill>
         <p:spPr>
           <a:xfrm>
-            <a:off x="825465" y="1371600"/>
-            <a:ext cx="10540765" cy="3017520"/>
+            <a:off x="3057977" y="1298448"/>
+            <a:ext cx="6075742" cy="2331720"/>
           </a:xfrm>
           <a:prstGeom prst="rect">
             <a:avLst/>
@@ -10781,12 +11488,160 @@
         </p:nvSpPr>
         <p:spPr>
           <a:xfrm>
-            <a:off x="640080" y="4572000"/>
-            <a:ext cx="5394960" cy="1554480"/>
+            <a:off x="640080" y="3822192"/>
+            <a:ext cx="10927080" cy="566928"/>
           </a:xfrm>
           <a:prstGeom prst="roundRect">
             <a:avLst>
-              <a:gd name="adj" fmla="val 4706"/>
+              <a:gd name="adj" fmla="val 9677"/>
+            </a:avLst>
+          </a:prstGeom>
+          <a:solidFill>
+            <a:srgbClr val="F4F7FC"/>
+          </a:solidFill>
+          <a:ln w="12700">
+            <a:solidFill>
+              <a:srgbClr val="C7D2E4"/>
+            </a:solidFill>
+            <a:prstDash val="solid"/>
+          </a:ln>
+        </p:spPr>
+      </p:sp>
+      <p:sp>
+        <p:nvSpPr>
+          <p:cNvPr id="10" name="Shape 7"/>
+          <p:cNvSpPr/>
+          <p:nvPr/>
+        </p:nvSpPr>
+        <p:spPr>
+          <a:xfrm>
+            <a:off x="804672" y="3895344"/>
+            <a:ext cx="420624" cy="420624"/>
+          </a:xfrm>
+          <a:prstGeom prst="ellipse">
+            <a:avLst/>
+          </a:prstGeom>
+          <a:solidFill>
+            <a:srgbClr val="5B6472"/>
+          </a:solidFill>
+          <a:ln/>
+        </p:spPr>
+      </p:sp>
+      <p:sp>
+        <p:nvSpPr>
+          <p:cNvPr id="11" name="Text 8"/>
+          <p:cNvSpPr txBox="1"/>
+          <p:nvPr/>
+        </p:nvSpPr>
+        <p:spPr>
+          <a:xfrm>
+            <a:off x="804672" y="3895344"/>
+            <a:ext cx="420624" cy="420624"/>
+          </a:xfrm>
+          <a:prstGeom prst="rect">
+            <a:avLst/>
+          </a:prstGeom>
+          <a:noFill/>
+          <a:ln/>
+        </p:spPr>
+        <p:txBody>
+          <a:bodyPr wrap="square" rtlCol="0" anchor="ctr"/>
+          <a:lstStyle/>
+          <a:p>
+            <a:pPr algn="ctr" indent="0" marL="0">
+              <a:buNone/>
+            </a:pPr>
+            <a:r>
+              <a:rPr lang="en-US" sz="1400" b="1" dirty="0">
+                <a:solidFill>
+                  <a:srgbClr val="FFFFFF"/>
+                </a:solidFill>
+                <a:latin typeface="Meiryo" pitchFamily="34" charset="0"/>
+                <a:ea typeface="Meiryo" pitchFamily="34" charset="-122"/>
+                <a:cs typeface="Meiryo" pitchFamily="34" charset="-120"/>
+              </a:rPr>
+              <a:t>○</a:t>
+            </a:r>
+            <a:endParaRPr lang="en-US" sz="1400" dirty="0"/>
+          </a:p>
+        </p:txBody>
+      </p:sp>
+      <p:sp>
+        <p:nvSpPr>
+          <p:cNvPr id="12" name="Text 9"/>
+          <p:cNvSpPr txBox="1"/>
+          <p:nvPr/>
+        </p:nvSpPr>
+        <p:spPr>
+          <a:xfrm>
+            <a:off x="1389888" y="3877056"/>
+            <a:ext cx="10012680" cy="457200"/>
+          </a:xfrm>
+          <a:prstGeom prst="rect">
+            <a:avLst/>
+          </a:prstGeom>
+          <a:noFill/>
+          <a:ln/>
+        </p:spPr>
+        <p:txBody>
+          <a:bodyPr wrap="square" lIns="0" tIns="0" rIns="0" bIns="0" rtlCol="0" anchor="ctr"/>
+          <a:lstStyle/>
+          <a:p>
+            <a:pPr algn="l" indent="0" marL="0">
+              <a:lnSpc>
+                <a:spcPct val="120000"/>
+              </a:lnSpc>
+              <a:buNone/>
+            </a:pPr>
+            <a:r>
+              <a:rPr lang="en-US" sz="1500" b="1" dirty="0">
+                <a:solidFill>
+                  <a:srgbClr val="1F2937"/>
+                </a:solidFill>
+                <a:latin typeface="Meiryo" pitchFamily="34" charset="0"/>
+                <a:ea typeface="Meiryo" pitchFamily="34" charset="-122"/>
+                <a:cs typeface="Meiryo" pitchFamily="34" charset="-120"/>
+              </a:rPr>
+              <a:t>同日 他 N 件（灰色）</a:t>
+            </a:r>
+            <a:endParaRPr lang="en-US" sz="1500" dirty="0"/>
+          </a:p>
+          <a:p>
+            <a:pPr algn="l" indent="0" marL="0">
+              <a:lnSpc>
+                <a:spcPct val="120000"/>
+              </a:lnSpc>
+              <a:buNone/>
+            </a:pPr>
+            <a:r>
+              <a:rPr lang="en-US" sz="1250" dirty="0">
+                <a:solidFill>
+                  <a:srgbClr val="5B6472"/>
+                </a:solidFill>
+                <a:latin typeface="Meiryo" pitchFamily="34" charset="0"/>
+                <a:ea typeface="Meiryo" pitchFamily="34" charset="-122"/>
+                <a:cs typeface="Meiryo" pitchFamily="34" charset="-120"/>
+              </a:rPr>
+              <a:t>時間に余裕があります。複数社を回るのはこの施設の普通の使い方です</a:t>
+            </a:r>
+            <a:endParaRPr lang="en-US" sz="1500" dirty="0"/>
+          </a:p>
+        </p:txBody>
+      </p:sp>
+      <p:sp>
+        <p:nvSpPr>
+          <p:cNvPr id="13" name="Shape 10"/>
+          <p:cNvSpPr/>
+          <p:nvPr/>
+        </p:nvSpPr>
+        <p:spPr>
+          <a:xfrm>
+            <a:off x="640080" y="4480560"/>
+            <a:ext cx="10927080" cy="566928"/>
+          </a:xfrm>
+          <a:prstGeom prst="roundRect">
+            <a:avLst>
+              <a:gd name="adj" fmla="val 9677"/>
             </a:avLst>
           </a:prstGeom>
           <a:solidFill>
@@ -10802,14 +11657,310 @@
       </p:sp>
       <p:sp>
         <p:nvSpPr>
-          <p:cNvPr id="10" name="Text 7"/>
-          <p:cNvSpPr txBox="1"/>
-          <p:nvPr/>
-        </p:nvSpPr>
-        <p:spPr>
-          <a:xfrm>
-            <a:off x="841248" y="4681728"/>
-            <a:ext cx="4992624" cy="1335024"/>
+          <p:cNvPr id="14" name="Shape 11"/>
+          <p:cNvSpPr/>
+          <p:nvPr/>
+        </p:nvSpPr>
+        <p:spPr>
+          <a:xfrm>
+            <a:off x="804672" y="4553712"/>
+            <a:ext cx="420624" cy="420624"/>
+          </a:xfrm>
+          <a:prstGeom prst="ellipse">
+            <a:avLst/>
+          </a:prstGeom>
+          <a:solidFill>
+            <a:srgbClr val="B91C1C"/>
+          </a:solidFill>
+          <a:ln/>
+        </p:spPr>
+      </p:sp>
+      <p:sp>
+        <p:nvSpPr>
+          <p:cNvPr id="15" name="Text 12"/>
+          <p:cNvSpPr txBox="1"/>
+          <p:nvPr/>
+        </p:nvSpPr>
+        <p:spPr>
+          <a:xfrm>
+            <a:off x="804672" y="4553712"/>
+            <a:ext cx="420624" cy="420624"/>
+          </a:xfrm>
+          <a:prstGeom prst="rect">
+            <a:avLst/>
+          </a:prstGeom>
+          <a:noFill/>
+          <a:ln/>
+        </p:spPr>
+        <p:txBody>
+          <a:bodyPr wrap="square" rtlCol="0" anchor="ctr"/>
+          <a:lstStyle/>
+          <a:p>
+            <a:pPr algn="ctr" indent="0" marL="0">
+              <a:buNone/>
+            </a:pPr>
+            <a:r>
+              <a:rPr lang="en-US" sz="1400" b="1" dirty="0">
+                <a:solidFill>
+                  <a:srgbClr val="FFFFFF"/>
+                </a:solidFill>
+                <a:latin typeface="Meiryo" pitchFamily="34" charset="0"/>
+                <a:ea typeface="Meiryo" pitchFamily="34" charset="-122"/>
+                <a:cs typeface="Meiryo" pitchFamily="34" charset="-120"/>
+              </a:rPr>
+              <a:t>!</a:t>
+            </a:r>
+            <a:endParaRPr lang="en-US" sz="1400" dirty="0"/>
+          </a:p>
+        </p:txBody>
+      </p:sp>
+      <p:sp>
+        <p:nvSpPr>
+          <p:cNvPr id="16" name="Text 13"/>
+          <p:cNvSpPr txBox="1"/>
+          <p:nvPr/>
+        </p:nvSpPr>
+        <p:spPr>
+          <a:xfrm>
+            <a:off x="1389888" y="4535424"/>
+            <a:ext cx="10012680" cy="457200"/>
+          </a:xfrm>
+          <a:prstGeom prst="rect">
+            <a:avLst/>
+          </a:prstGeom>
+          <a:noFill/>
+          <a:ln/>
+        </p:spPr>
+        <p:txBody>
+          <a:bodyPr wrap="square" lIns="0" tIns="0" rIns="0" bIns="0" rtlCol="0" anchor="ctr"/>
+          <a:lstStyle/>
+          <a:p>
+            <a:pPr algn="l" indent="0" marL="0">
+              <a:lnSpc>
+                <a:spcPct val="120000"/>
+              </a:lnSpc>
+              <a:buNone/>
+            </a:pPr>
+            <a:r>
+              <a:rPr lang="en-US" sz="1500" b="1" dirty="0">
+                <a:solidFill>
+                  <a:srgbClr val="1F2937"/>
+                </a:solidFill>
+                <a:latin typeface="Meiryo" pitchFamily="34" charset="0"/>
+                <a:ea typeface="Meiryo" pitchFamily="34" charset="-122"/>
+                <a:cs typeface="Meiryo" pitchFamily="34" charset="-120"/>
+              </a:rPr>
+              <a:t>⚠ 時間が重複（赤）</a:t>
+            </a:r>
+            <a:endParaRPr lang="en-US" sz="1500" dirty="0"/>
+          </a:p>
+          <a:p>
+            <a:pPr algn="l" indent="0" marL="0">
+              <a:lnSpc>
+                <a:spcPct val="120000"/>
+              </a:lnSpc>
+              <a:buNone/>
+            </a:pPr>
+            <a:r>
+              <a:rPr lang="en-US" sz="1250" dirty="0">
+                <a:solidFill>
+                  <a:srgbClr val="5B6472"/>
+                </a:solidFill>
+                <a:latin typeface="Meiryo" pitchFamily="34" charset="0"/>
+                <a:ea typeface="Meiryo" pitchFamily="34" charset="-122"/>
+                <a:cs typeface="Meiryo" pitchFamily="34" charset="-120"/>
+              </a:rPr>
+              <a:t>同じ時間に別の予約があります。繰り上げはシステムが拒否します</a:t>
+            </a:r>
+            <a:endParaRPr lang="en-US" sz="1500" dirty="0"/>
+          </a:p>
+        </p:txBody>
+      </p:sp>
+      <p:sp>
+        <p:nvSpPr>
+          <p:cNvPr id="17" name="Shape 14"/>
+          <p:cNvSpPr/>
+          <p:nvPr/>
+        </p:nvSpPr>
+        <p:spPr>
+          <a:xfrm>
+            <a:off x="640080" y="5138928"/>
+            <a:ext cx="10927080" cy="566928"/>
+          </a:xfrm>
+          <a:prstGeom prst="roundRect">
+            <a:avLst>
+              <a:gd name="adj" fmla="val 9677"/>
+            </a:avLst>
+          </a:prstGeom>
+          <a:solidFill>
+            <a:srgbClr val="FDF3E3"/>
+          </a:solidFill>
+          <a:ln w="12700">
+            <a:solidFill>
+              <a:srgbClr val="FDF3E3"/>
+            </a:solidFill>
+            <a:prstDash val="solid"/>
+          </a:ln>
+        </p:spPr>
+      </p:sp>
+      <p:sp>
+        <p:nvSpPr>
+          <p:cNvPr id="18" name="Shape 15"/>
+          <p:cNvSpPr/>
+          <p:nvPr/>
+        </p:nvSpPr>
+        <p:spPr>
+          <a:xfrm>
+            <a:off x="804672" y="5212080"/>
+            <a:ext cx="420624" cy="420624"/>
+          </a:xfrm>
+          <a:prstGeom prst="ellipse">
+            <a:avLst/>
+          </a:prstGeom>
+          <a:solidFill>
+            <a:srgbClr val="B26A00"/>
+          </a:solidFill>
+          <a:ln/>
+        </p:spPr>
+      </p:sp>
+      <p:sp>
+        <p:nvSpPr>
+          <p:cNvPr id="19" name="Text 16"/>
+          <p:cNvSpPr txBox="1"/>
+          <p:nvPr/>
+        </p:nvSpPr>
+        <p:spPr>
+          <a:xfrm>
+            <a:off x="804672" y="5212080"/>
+            <a:ext cx="420624" cy="420624"/>
+          </a:xfrm>
+          <a:prstGeom prst="rect">
+            <a:avLst/>
+          </a:prstGeom>
+          <a:noFill/>
+          <a:ln/>
+        </p:spPr>
+        <p:txBody>
+          <a:bodyPr wrap="square" rtlCol="0" anchor="ctr"/>
+          <a:lstStyle/>
+          <a:p>
+            <a:pPr algn="ctr" indent="0" marL="0">
+              <a:buNone/>
+            </a:pPr>
+            <a:r>
+              <a:rPr lang="en-US" sz="1400" b="1" dirty="0">
+                <a:solidFill>
+                  <a:srgbClr val="FFFFFF"/>
+                </a:solidFill>
+                <a:latin typeface="Meiryo" pitchFamily="34" charset="0"/>
+                <a:ea typeface="Meiryo" pitchFamily="34" charset="-122"/>
+                <a:cs typeface="Meiryo" pitchFamily="34" charset="-120"/>
+              </a:rPr>
+              <a:t>!</a:t>
+            </a:r>
+            <a:endParaRPr lang="en-US" sz="1400" dirty="0"/>
+          </a:p>
+        </p:txBody>
+      </p:sp>
+      <p:sp>
+        <p:nvSpPr>
+          <p:cNvPr id="20" name="Text 17"/>
+          <p:cNvSpPr txBox="1"/>
+          <p:nvPr/>
+        </p:nvSpPr>
+        <p:spPr>
+          <a:xfrm>
+            <a:off x="1389888" y="5193792"/>
+            <a:ext cx="10012680" cy="457200"/>
+          </a:xfrm>
+          <a:prstGeom prst="rect">
+            <a:avLst/>
+          </a:prstGeom>
+          <a:noFill/>
+          <a:ln/>
+        </p:spPr>
+        <p:txBody>
+          <a:bodyPr wrap="square" lIns="0" tIns="0" rIns="0" bIns="0" rtlCol="0" anchor="ctr"/>
+          <a:lstStyle/>
+          <a:p>
+            <a:pPr algn="l" indent="0" marL="0">
+              <a:lnSpc>
+                <a:spcPct val="120000"/>
+              </a:lnSpc>
+              <a:buNone/>
+            </a:pPr>
+            <a:r>
+              <a:rPr lang="en-US" sz="1500" b="1" dirty="0">
+                <a:solidFill>
+                  <a:srgbClr val="1F2937"/>
+                </a:solidFill>
+                <a:latin typeface="Meiryo" pitchFamily="34" charset="0"/>
+                <a:ea typeface="Meiryo" pitchFamily="34" charset="-122"/>
+                <a:cs typeface="Meiryo" pitchFamily="34" charset="-120"/>
+              </a:rPr>
+              <a:t>⚠ 移動時間が短い（オレンジ）</a:t>
+            </a:r>
+            <a:endParaRPr lang="en-US" sz="1500" dirty="0"/>
+          </a:p>
+          <a:p>
+            <a:pPr algn="l" indent="0" marL="0">
+              <a:lnSpc>
+                <a:spcPct val="120000"/>
+              </a:lnSpc>
+              <a:buNone/>
+            </a:pPr>
+            <a:r>
+              <a:rPr lang="en-US" sz="1250" dirty="0">
+                <a:solidFill>
+                  <a:srgbClr val="5B6472"/>
+                </a:solidFill>
+                <a:latin typeface="Meiryo" pitchFamily="34" charset="0"/>
+                <a:ea typeface="Meiryo" pitchFamily="34" charset="-122"/>
+                <a:cs typeface="Meiryo" pitchFamily="34" charset="-120"/>
+              </a:rPr>
+              <a:t>他社の催事との間隔が 15 分以下です。繰り上げはできますが、間に合わない可能性があります</a:t>
+            </a:r>
+            <a:endParaRPr lang="en-US" sz="1500" dirty="0"/>
+          </a:p>
+        </p:txBody>
+      </p:sp>
+      <p:sp>
+        <p:nvSpPr>
+          <p:cNvPr id="21" name="Shape 18"/>
+          <p:cNvSpPr/>
+          <p:nvPr/>
+        </p:nvSpPr>
+        <p:spPr>
+          <a:xfrm>
+            <a:off x="640080" y="5815584"/>
+            <a:ext cx="10927080" cy="475488"/>
+          </a:xfrm>
+          <a:prstGeom prst="roundRect">
+            <a:avLst>
+              <a:gd name="adj" fmla="val 15385"/>
+            </a:avLst>
+          </a:prstGeom>
+          <a:solidFill>
+            <a:srgbClr val="CADCFC"/>
+          </a:solidFill>
+          <a:ln w="12700">
+            <a:solidFill>
+              <a:srgbClr val="CADCFC"/>
+            </a:solidFill>
+            <a:prstDash val="solid"/>
+          </a:ln>
+        </p:spPr>
+      </p:sp>
+      <p:sp>
+        <p:nvSpPr>
+          <p:cNvPr id="22" name="Text 19"/>
+          <p:cNvSpPr txBox="1"/>
+          <p:nvPr/>
+        </p:nvSpPr>
+        <p:spPr>
+          <a:xfrm>
+            <a:off x="841248" y="5925312"/>
+            <a:ext cx="10524744" cy="256032"/>
           </a:xfrm>
           <a:prstGeom prst="rect">
             <a:avLst/>
@@ -10828,204 +11979,17 @@
               <a:buNone/>
             </a:pPr>
             <a:r>
-              <a:rPr lang="en-US" sz="1500" b="1" dirty="0">
-                <a:solidFill>
-                  <a:srgbClr val="B91C1C"/>
-                </a:solidFill>
-                <a:latin typeface="Meiryo" pitchFamily="34" charset="0"/>
-                <a:ea typeface="Meiryo" pitchFamily="34" charset="-122"/>
-                <a:cs typeface="Meiryo" pitchFamily="34" charset="-120"/>
-              </a:rPr>
-              <a:t>ボタンが薄いグレーになります</a:t>
-            </a:r>
-            <a:endParaRPr lang="en-US" sz="1500" dirty="0"/>
-          </a:p>
-          <a:p>
-            <a:pPr algn="l" indent="0" marL="0">
-              <a:lnSpc>
-                <a:spcPct val="125000"/>
-              </a:lnSpc>
-              <a:buNone/>
-            </a:pPr>
-            <a:r>
-              <a:rPr lang="en-US" sz="1300" dirty="0">
-                <a:solidFill>
-                  <a:srgbClr val="B91C1C"/>
-                </a:solidFill>
-                <a:latin typeface="Meiryo" pitchFamily="34" charset="0"/>
-                <a:ea typeface="Meiryo" pitchFamily="34" charset="-122"/>
-                <a:cs typeface="Meiryo" pitchFamily="34" charset="-120"/>
-              </a:rPr>
-              <a:t>マウスを載せると「現在の空きでは足りません」と出ます。</a:t>
-            </a:r>
-            <a:endParaRPr lang="en-US" sz="1500" dirty="0"/>
-          </a:p>
-          <a:p>
-            <a:pPr algn="l" indent="0" marL="0">
-              <a:lnSpc>
-                <a:spcPct val="125000"/>
-              </a:lnSpc>
-              <a:buNone/>
-            </a:pPr>
-            <a:endParaRPr lang="en-US" sz="1500" dirty="0"/>
-          </a:p>
-          <a:p>
-            <a:pPr algn="l" indent="0" marL="0">
-              <a:lnSpc>
-                <a:spcPct val="125000"/>
-              </a:lnSpc>
-              <a:buNone/>
-            </a:pPr>
-            <a:r>
-              <a:rPr lang="en-US" sz="1300" dirty="0">
-                <a:solidFill>
-                  <a:srgbClr val="B91C1C"/>
-                </a:solidFill>
-                <a:latin typeface="Meiryo" pitchFamily="34" charset="0"/>
-                <a:ea typeface="Meiryo" pitchFamily="34" charset="-122"/>
-                <a:cs typeface="Meiryo" pitchFamily="34" charset="-120"/>
-              </a:rPr>
-              <a:t>押すと、赤い帯で</a:t>
-            </a:r>
-            <a:endParaRPr lang="en-US" sz="1500" dirty="0"/>
-          </a:p>
-          <a:p>
-            <a:pPr algn="l" indent="0" marL="0">
-              <a:lnSpc>
-                <a:spcPct val="125000"/>
-              </a:lnSpc>
-              <a:buNone/>
-            </a:pPr>
-            <a:r>
-              <a:rPr lang="en-US" sz="1300" dirty="0">
-                <a:solidFill>
-                  <a:srgbClr val="B91C1C"/>
-                </a:solidFill>
-                <a:latin typeface="Meiryo" pitchFamily="34" charset="0"/>
-                <a:ea typeface="Meiryo" pitchFamily="34" charset="-122"/>
-                <a:cs typeface="Meiryo" pitchFamily="34" charset="-120"/>
-              </a:rPr>
-              <a:t>「空席が足りません（この予約は 3 名、空きは 2 名分）。」</a:t>
-            </a:r>
-            <a:endParaRPr lang="en-US" sz="1500" dirty="0"/>
-          </a:p>
-        </p:txBody>
-      </p:sp>
-      <p:sp>
-        <p:nvSpPr>
-          <p:cNvPr id="11" name="Shape 8"/>
-          <p:cNvSpPr/>
-          <p:nvPr/>
-        </p:nvSpPr>
-        <p:spPr>
-          <a:xfrm>
-            <a:off x="6172200" y="4572000"/>
-            <a:ext cx="5394960" cy="1554480"/>
-          </a:xfrm>
-          <a:prstGeom prst="roundRect">
-            <a:avLst>
-              <a:gd name="adj" fmla="val 4706"/>
-            </a:avLst>
-          </a:prstGeom>
-          <a:solidFill>
-            <a:srgbClr val="ECFDF5"/>
-          </a:solidFill>
-          <a:ln w="12700">
-            <a:solidFill>
-              <a:srgbClr val="ECFDF5"/>
-            </a:solidFill>
-            <a:prstDash val="solid"/>
-          </a:ln>
-        </p:spPr>
-      </p:sp>
-      <p:sp>
-        <p:nvSpPr>
-          <p:cNvPr id="12" name="Text 9"/>
-          <p:cNvSpPr txBox="1"/>
-          <p:nvPr/>
-        </p:nvSpPr>
-        <p:spPr>
-          <a:xfrm>
-            <a:off x="6373368" y="4681728"/>
-            <a:ext cx="4992624" cy="1335024"/>
-          </a:xfrm>
-          <a:prstGeom prst="rect">
-            <a:avLst/>
-          </a:prstGeom>
-          <a:noFill/>
-          <a:ln/>
-        </p:spPr>
-        <p:txBody>
-          <a:bodyPr wrap="square" lIns="0" tIns="0" rIns="0" bIns="0" rtlCol="0" anchor="ctr"/>
-          <a:lstStyle/>
-          <a:p>
-            <a:pPr algn="l" indent="0" marL="0">
-              <a:lnSpc>
-                <a:spcPct val="125000"/>
-              </a:lnSpc>
-              <a:buNone/>
-            </a:pPr>
-            <a:r>
-              <a:rPr lang="en-US" sz="1500" b="1" dirty="0">
-                <a:solidFill>
-                  <a:srgbClr val="15803D"/>
-                </a:solidFill>
-                <a:latin typeface="Meiryo" pitchFamily="34" charset="0"/>
-                <a:ea typeface="Meiryo" pitchFamily="34" charset="-122"/>
-                <a:cs typeface="Meiryo" pitchFamily="34" charset="-120"/>
-              </a:rPr>
-              <a:t>押しても席は動きません</a:t>
-            </a:r>
-            <a:endParaRPr lang="en-US" sz="1500" dirty="0"/>
-          </a:p>
-          <a:p>
-            <a:pPr algn="l" indent="0" marL="0">
-              <a:lnSpc>
-                <a:spcPct val="125000"/>
-              </a:lnSpc>
-              <a:buNone/>
-            </a:pPr>
-            <a:r>
-              <a:rPr lang="en-US" sz="1300" dirty="0">
-                <a:solidFill>
-                  <a:srgbClr val="15803D"/>
-                </a:solidFill>
-                <a:latin typeface="Meiryo" pitchFamily="34" charset="0"/>
-                <a:ea typeface="Meiryo" pitchFamily="34" charset="-122"/>
-                <a:cs typeface="Meiryo" pitchFamily="34" charset="-120"/>
-              </a:rPr>
-              <a:t>予約が壊れることもありません。</a:t>
-            </a:r>
-            <a:endParaRPr lang="en-US" sz="1500" dirty="0"/>
-          </a:p>
-          <a:p>
-            <a:pPr algn="l" indent="0" marL="0">
-              <a:lnSpc>
-                <a:spcPct val="125000"/>
-              </a:lnSpc>
-              <a:buNone/>
-            </a:pPr>
-            <a:endParaRPr lang="en-US" sz="1500" dirty="0"/>
-          </a:p>
-          <a:p>
-            <a:pPr algn="l" indent="0" marL="0">
-              <a:lnSpc>
-                <a:spcPct val="125000"/>
-              </a:lnSpc>
-              <a:buNone/>
-            </a:pPr>
-            <a:r>
-              <a:rPr lang="en-US" sz="1300" dirty="0">
-                <a:solidFill>
-                  <a:srgbClr val="15803D"/>
-                </a:solidFill>
-                <a:latin typeface="Meiryo" pitchFamily="34" charset="0"/>
-                <a:ea typeface="Meiryo" pitchFamily="34" charset="-122"/>
-                <a:cs typeface="Meiryo" pitchFamily="34" charset="-120"/>
-              </a:rPr>
-              <a:t>迷ったら押して確かめていただいて構いません。</a:t>
-            </a:r>
-            <a:endParaRPr lang="en-US" sz="1500" dirty="0"/>
+              <a:rPr lang="en-US" sz="1250" b="1" dirty="0">
+                <a:solidFill>
+                  <a:srgbClr val="1E2761"/>
+                </a:solidFill>
+                <a:latin typeface="Meiryo" pitchFamily="34" charset="0"/>
+                <a:ea typeface="Meiryo" pitchFamily="34" charset="-122"/>
+                <a:cs typeface="Meiryo" pitchFamily="34" charset="-120"/>
+              </a:rPr>
+              <a:t>「繰り上げ」の確認ポップアップにも同じ内容が出ます。表示されるのは開催企業名・体験内容・日時だけで、他社の予約に紐づく氏名や連絡先は出ません。</a:t>
+            </a:r>
+            <a:endParaRPr lang="en-US" sz="1250" dirty="0"/>
           </a:p>
         </p:txBody>
       </p:sp>
@@ -11231,7 +12195,7 @@
                 <a:ea typeface="Meiryo" pitchFamily="34" charset="-122"/>
                 <a:cs typeface="Meiryo" pitchFamily="34" charset="-120"/>
               </a:rPr>
-              <a:t>取れる手立ては 5 つあります</a:t>
+              <a:t>空きより、繰り上げたい人数が多いとき</a:t>
             </a:r>
             <a:endParaRPr lang="en-US" sz="2800" dirty="0"/>
           </a:p>
@@ -11270,26 +12234,188 @@
                 <a:ea typeface="Meiryo" pitchFamily="34" charset="-122"/>
                 <a:cs typeface="Meiryo" pitchFamily="34" charset="-120"/>
               </a:rPr>
-              <a:t>開催まで日があるうちは A が原則です</a:t>
+              <a:t>まずは画面での見分け方です</a:t>
             </a:r>
             <a:endParaRPr lang="en-US" sz="1400" dirty="0"/>
           </a:p>
         </p:txBody>
       </p:sp>
-      <p:sp>
-        <p:nvSpPr>
-          <p:cNvPr id="8" name="Shape 6"/>
+      <p:pic>
+        <p:nvPicPr>
+          <p:cNvPr id="8" name="Image 0" descr="C:\Users\sato\AppData\Local\Temp\claude\c--Users-sato-Desktop---3---3\c0abf194-6a09-42ac-bc16-2cd244740c64\scratchpad\deck\img\c-notenough.png">    </p:cNvPr>
+          <p:cNvPicPr>
+            <a:picLocks noChangeAspect="1"/>
+          </p:cNvPicPr>
+          <p:nvPr/>
+        </p:nvPicPr>
+        <p:blipFill>
+          <a:blip r:embed="rId1"/>
+          <a:stretch>
+            <a:fillRect/>
+          </a:stretch>
+        </p:blipFill>
+        <p:spPr>
+          <a:xfrm>
+            <a:off x="825465" y="1371600"/>
+            <a:ext cx="10540765" cy="3017520"/>
+          </a:xfrm>
+          <a:prstGeom prst="rect">
+            <a:avLst/>
+          </a:prstGeom>
+        </p:spPr>
+      </p:pic>
+      <p:sp>
+        <p:nvSpPr>
+          <p:cNvPr id="9" name="Shape 6"/>
           <p:cNvSpPr/>
           <p:nvPr/>
         </p:nvSpPr>
         <p:spPr>
           <a:xfrm>
-            <a:off x="640080" y="1371600"/>
-            <a:ext cx="10927080" cy="749808"/>
+            <a:off x="640080" y="4572000"/>
+            <a:ext cx="5394960" cy="1554480"/>
           </a:xfrm>
           <a:prstGeom prst="roundRect">
             <a:avLst>
-              <a:gd name="adj" fmla="val 7317"/>
+              <a:gd name="adj" fmla="val 4706"/>
+            </a:avLst>
+          </a:prstGeom>
+          <a:solidFill>
+            <a:srgbClr val="FEF2F2"/>
+          </a:solidFill>
+          <a:ln w="12700">
+            <a:solidFill>
+              <a:srgbClr val="FEF2F2"/>
+            </a:solidFill>
+            <a:prstDash val="solid"/>
+          </a:ln>
+        </p:spPr>
+      </p:sp>
+      <p:sp>
+        <p:nvSpPr>
+          <p:cNvPr id="10" name="Text 7"/>
+          <p:cNvSpPr txBox="1"/>
+          <p:nvPr/>
+        </p:nvSpPr>
+        <p:spPr>
+          <a:xfrm>
+            <a:off x="841248" y="4681728"/>
+            <a:ext cx="4992624" cy="1335024"/>
+          </a:xfrm>
+          <a:prstGeom prst="rect">
+            <a:avLst/>
+          </a:prstGeom>
+          <a:noFill/>
+          <a:ln/>
+        </p:spPr>
+        <p:txBody>
+          <a:bodyPr wrap="square" lIns="0" tIns="0" rIns="0" bIns="0" rtlCol="0" anchor="ctr"/>
+          <a:lstStyle/>
+          <a:p>
+            <a:pPr algn="l" indent="0" marL="0">
+              <a:lnSpc>
+                <a:spcPct val="125000"/>
+              </a:lnSpc>
+              <a:buNone/>
+            </a:pPr>
+            <a:r>
+              <a:rPr lang="en-US" sz="1500" b="1" dirty="0">
+                <a:solidFill>
+                  <a:srgbClr val="B91C1C"/>
+                </a:solidFill>
+                <a:latin typeface="Meiryo" pitchFamily="34" charset="0"/>
+                <a:ea typeface="Meiryo" pitchFamily="34" charset="-122"/>
+                <a:cs typeface="Meiryo" pitchFamily="34" charset="-120"/>
+              </a:rPr>
+              <a:t>ボタンが薄いグレーになります</a:t>
+            </a:r>
+            <a:endParaRPr lang="en-US" sz="1500" dirty="0"/>
+          </a:p>
+          <a:p>
+            <a:pPr algn="l" indent="0" marL="0">
+              <a:lnSpc>
+                <a:spcPct val="125000"/>
+              </a:lnSpc>
+              <a:buNone/>
+            </a:pPr>
+            <a:r>
+              <a:rPr lang="en-US" sz="1300" dirty="0">
+                <a:solidFill>
+                  <a:srgbClr val="B91C1C"/>
+                </a:solidFill>
+                <a:latin typeface="Meiryo" pitchFamily="34" charset="0"/>
+                <a:ea typeface="Meiryo" pitchFamily="34" charset="-122"/>
+                <a:cs typeface="Meiryo" pitchFamily="34" charset="-120"/>
+              </a:rPr>
+              <a:t>マウスを載せると「現在の空きでは足りません」と出ます。</a:t>
+            </a:r>
+            <a:endParaRPr lang="en-US" sz="1500" dirty="0"/>
+          </a:p>
+          <a:p>
+            <a:pPr algn="l" indent="0" marL="0">
+              <a:lnSpc>
+                <a:spcPct val="125000"/>
+              </a:lnSpc>
+              <a:buNone/>
+            </a:pPr>
+            <a:endParaRPr lang="en-US" sz="1500" dirty="0"/>
+          </a:p>
+          <a:p>
+            <a:pPr algn="l" indent="0" marL="0">
+              <a:lnSpc>
+                <a:spcPct val="125000"/>
+              </a:lnSpc>
+              <a:buNone/>
+            </a:pPr>
+            <a:r>
+              <a:rPr lang="en-US" sz="1300" dirty="0">
+                <a:solidFill>
+                  <a:srgbClr val="B91C1C"/>
+                </a:solidFill>
+                <a:latin typeface="Meiryo" pitchFamily="34" charset="0"/>
+                <a:ea typeface="Meiryo" pitchFamily="34" charset="-122"/>
+                <a:cs typeface="Meiryo" pitchFamily="34" charset="-120"/>
+              </a:rPr>
+              <a:t>押すと、赤い帯で</a:t>
+            </a:r>
+            <a:endParaRPr lang="en-US" sz="1500" dirty="0"/>
+          </a:p>
+          <a:p>
+            <a:pPr algn="l" indent="0" marL="0">
+              <a:lnSpc>
+                <a:spcPct val="125000"/>
+              </a:lnSpc>
+              <a:buNone/>
+            </a:pPr>
+            <a:r>
+              <a:rPr lang="en-US" sz="1300" dirty="0">
+                <a:solidFill>
+                  <a:srgbClr val="B91C1C"/>
+                </a:solidFill>
+                <a:latin typeface="Meiryo" pitchFamily="34" charset="0"/>
+                <a:ea typeface="Meiryo" pitchFamily="34" charset="-122"/>
+                <a:cs typeface="Meiryo" pitchFamily="34" charset="-120"/>
+              </a:rPr>
+              <a:t>「空席が足りません（この予約は 3 名、空きは 2 名分）。」</a:t>
+            </a:r>
+            <a:endParaRPr lang="en-US" sz="1500" dirty="0"/>
+          </a:p>
+        </p:txBody>
+      </p:sp>
+      <p:sp>
+        <p:nvSpPr>
+          <p:cNvPr id="11" name="Shape 8"/>
+          <p:cNvSpPr/>
+          <p:nvPr/>
+        </p:nvSpPr>
+        <p:spPr>
+          <a:xfrm>
+            <a:off x="6172200" y="4572000"/>
+            <a:ext cx="5394960" cy="1554480"/>
+          </a:xfrm>
+          <a:prstGeom prst="roundRect">
+            <a:avLst>
+              <a:gd name="adj" fmla="val 4706"/>
             </a:avLst>
           </a:prstGeom>
           <a:solidFill>
@@ -11305,754 +12431,14 @@
       </p:sp>
       <p:sp>
         <p:nvSpPr>
-          <p:cNvPr id="9" name="Shape 7"/>
-          <p:cNvSpPr/>
-          <p:nvPr/>
-        </p:nvSpPr>
-        <p:spPr>
-          <a:xfrm>
-            <a:off x="804672" y="1536192"/>
-            <a:ext cx="420624" cy="420624"/>
-          </a:xfrm>
-          <a:prstGeom prst="ellipse">
-            <a:avLst/>
-          </a:prstGeom>
-          <a:solidFill>
-            <a:srgbClr val="15803D"/>
-          </a:solidFill>
-          <a:ln/>
-        </p:spPr>
-      </p:sp>
-      <p:sp>
-        <p:nvSpPr>
-          <p:cNvPr id="10" name="Text 8"/>
-          <p:cNvSpPr txBox="1"/>
-          <p:nvPr/>
-        </p:nvSpPr>
-        <p:spPr>
-          <a:xfrm>
-            <a:off x="804672" y="1536192"/>
-            <a:ext cx="420624" cy="420624"/>
-          </a:xfrm>
-          <a:prstGeom prst="rect">
-            <a:avLst/>
-          </a:prstGeom>
-          <a:noFill/>
-          <a:ln/>
-        </p:spPr>
-        <p:txBody>
-          <a:bodyPr wrap="square" rtlCol="0" anchor="ctr"/>
-          <a:lstStyle/>
-          <a:p>
-            <a:pPr algn="ctr" indent="0" marL="0">
-              <a:buNone/>
-            </a:pPr>
-            <a:r>
-              <a:rPr lang="en-US" sz="1400" b="1" dirty="0">
-                <a:solidFill>
-                  <a:srgbClr val="FFFFFF"/>
-                </a:solidFill>
-                <a:latin typeface="Meiryo" pitchFamily="34" charset="0"/>
-                <a:ea typeface="Meiryo" pitchFamily="34" charset="-122"/>
-                <a:cs typeface="Meiryo" pitchFamily="34" charset="-120"/>
-              </a:rPr>
-              <a:t>A</a:t>
-            </a:r>
-            <a:endParaRPr lang="en-US" sz="1400" dirty="0"/>
-          </a:p>
-        </p:txBody>
-      </p:sp>
-      <p:sp>
-        <p:nvSpPr>
-          <p:cNvPr id="11" name="Text 9"/>
-          <p:cNvSpPr txBox="1"/>
-          <p:nvPr/>
-        </p:nvSpPr>
-        <p:spPr>
-          <a:xfrm>
-            <a:off x="1389888" y="1426464"/>
-            <a:ext cx="10012680" cy="640080"/>
-          </a:xfrm>
-          <a:prstGeom prst="rect">
-            <a:avLst/>
-          </a:prstGeom>
-          <a:noFill/>
-          <a:ln/>
-        </p:spPr>
-        <p:txBody>
-          <a:bodyPr wrap="square" lIns="0" tIns="0" rIns="0" bIns="0" rtlCol="0" anchor="ctr"/>
-          <a:lstStyle/>
-          <a:p>
-            <a:pPr algn="l" indent="0" marL="0">
-              <a:lnSpc>
-                <a:spcPct val="120000"/>
-              </a:lnSpc>
-              <a:buNone/>
-            </a:pPr>
-            <a:r>
-              <a:rPr lang="en-US" sz="1500" b="1" dirty="0">
-                <a:solidFill>
-                  <a:srgbClr val="1F2937"/>
-                </a:solidFill>
-                <a:latin typeface="Meiryo" pitchFamily="34" charset="0"/>
-                <a:ea typeface="Meiryo" pitchFamily="34" charset="-122"/>
-                <a:cs typeface="Meiryo" pitchFamily="34" charset="-120"/>
-              </a:rPr>
-              <a:t>そのまま待つ（原則）</a:t>
-            </a:r>
-            <a:endParaRPr lang="en-US" sz="1500" dirty="0"/>
-          </a:p>
-          <a:p>
-            <a:pPr algn="l" indent="0" marL="0">
-              <a:lnSpc>
-                <a:spcPct val="120000"/>
-              </a:lnSpc>
-              <a:buNone/>
-            </a:pPr>
-            <a:r>
-              <a:rPr lang="en-US" sz="1250" dirty="0">
-                <a:solidFill>
-                  <a:srgbClr val="5B6472"/>
-                </a:solidFill>
-                <a:latin typeface="Meiryo" pitchFamily="34" charset="0"/>
-                <a:ea typeface="Meiryo" pitchFamily="34" charset="-122"/>
-                <a:cs typeface="Meiryo" pitchFamily="34" charset="-120"/>
-              </a:rPr>
-              <a:t>追加のキャンセルが出れば、先頭の方をそのまま繰り上げられます。お待ちの順番を守れるのはこれだけです</a:t>
-            </a:r>
-            <a:endParaRPr lang="en-US" sz="1500" dirty="0"/>
-          </a:p>
-        </p:txBody>
-      </p:sp>
-      <p:sp>
-        <p:nvSpPr>
-          <p:cNvPr id="12" name="Shape 10"/>
-          <p:cNvSpPr/>
-          <p:nvPr/>
-        </p:nvSpPr>
-        <p:spPr>
-          <a:xfrm>
-            <a:off x="640080" y="2240280"/>
-            <a:ext cx="10927080" cy="749808"/>
-          </a:xfrm>
-          <a:prstGeom prst="roundRect">
-            <a:avLst>
-              <a:gd name="adj" fmla="val 7317"/>
-            </a:avLst>
-          </a:prstGeom>
-          <a:solidFill>
-            <a:srgbClr val="F4F7FC"/>
-          </a:solidFill>
-          <a:ln w="12700">
-            <a:solidFill>
-              <a:srgbClr val="C7D2E4"/>
-            </a:solidFill>
-            <a:prstDash val="solid"/>
-          </a:ln>
-        </p:spPr>
-      </p:sp>
-      <p:sp>
-        <p:nvSpPr>
-          <p:cNvPr id="13" name="Shape 11"/>
-          <p:cNvSpPr/>
-          <p:nvPr/>
-        </p:nvSpPr>
-        <p:spPr>
-          <a:xfrm>
-            <a:off x="804672" y="2404872"/>
-            <a:ext cx="420624" cy="420624"/>
-          </a:xfrm>
-          <a:prstGeom prst="ellipse">
-            <a:avLst/>
-          </a:prstGeom>
-          <a:solidFill>
-            <a:srgbClr val="1E2761"/>
-          </a:solidFill>
-          <a:ln/>
-        </p:spPr>
-      </p:sp>
-      <p:sp>
-        <p:nvSpPr>
-          <p:cNvPr id="14" name="Text 12"/>
-          <p:cNvSpPr txBox="1"/>
-          <p:nvPr/>
-        </p:nvSpPr>
-        <p:spPr>
-          <a:xfrm>
-            <a:off x="804672" y="2404872"/>
-            <a:ext cx="420624" cy="420624"/>
-          </a:xfrm>
-          <a:prstGeom prst="rect">
-            <a:avLst/>
-          </a:prstGeom>
-          <a:noFill/>
-          <a:ln/>
-        </p:spPr>
-        <p:txBody>
-          <a:bodyPr wrap="square" rtlCol="0" anchor="ctr"/>
-          <a:lstStyle/>
-          <a:p>
-            <a:pPr algn="ctr" indent="0" marL="0">
-              <a:buNone/>
-            </a:pPr>
-            <a:r>
-              <a:rPr lang="en-US" sz="1400" b="1" dirty="0">
-                <a:solidFill>
-                  <a:srgbClr val="FFFFFF"/>
-                </a:solidFill>
-                <a:latin typeface="Meiryo" pitchFamily="34" charset="0"/>
-                <a:ea typeface="Meiryo" pitchFamily="34" charset="-122"/>
-                <a:cs typeface="Meiryo" pitchFamily="34" charset="-120"/>
-              </a:rPr>
-              <a:t>B</a:t>
-            </a:r>
-            <a:endParaRPr lang="en-US" sz="1400" dirty="0"/>
-          </a:p>
-        </p:txBody>
-      </p:sp>
-      <p:sp>
-        <p:nvSpPr>
-          <p:cNvPr id="15" name="Text 13"/>
-          <p:cNvSpPr txBox="1"/>
-          <p:nvPr/>
-        </p:nvSpPr>
-        <p:spPr>
-          <a:xfrm>
-            <a:off x="1389888" y="2295144"/>
-            <a:ext cx="10012680" cy="640080"/>
-          </a:xfrm>
-          <a:prstGeom prst="rect">
-            <a:avLst/>
-          </a:prstGeom>
-          <a:noFill/>
-          <a:ln/>
-        </p:spPr>
-        <p:txBody>
-          <a:bodyPr wrap="square" lIns="0" tIns="0" rIns="0" bIns="0" rtlCol="0" anchor="ctr"/>
-          <a:lstStyle/>
-          <a:p>
-            <a:pPr algn="l" indent="0" marL="0">
-              <a:lnSpc>
-                <a:spcPct val="120000"/>
-              </a:lnSpc>
-              <a:buNone/>
-            </a:pPr>
-            <a:r>
-              <a:rPr lang="en-US" sz="1500" b="1" dirty="0">
-                <a:solidFill>
-                  <a:srgbClr val="1F2937"/>
-                </a:solidFill>
-                <a:latin typeface="Meiryo" pitchFamily="34" charset="0"/>
-                <a:ea typeface="Meiryo" pitchFamily="34" charset="-122"/>
-                <a:cs typeface="Meiryo" pitchFamily="34" charset="-120"/>
-              </a:rPr>
-              <a:t>定員を増やす</a:t>
-            </a:r>
-            <a:endParaRPr lang="en-US" sz="1500" dirty="0"/>
-          </a:p>
-          <a:p>
-            <a:pPr algn="l" indent="0" marL="0">
-              <a:lnSpc>
-                <a:spcPct val="120000"/>
-              </a:lnSpc>
-              <a:buNone/>
-            </a:pPr>
-            <a:r>
-              <a:rPr lang="en-US" sz="1250" dirty="0">
-                <a:solidFill>
-                  <a:srgbClr val="5B6472"/>
-                </a:solidFill>
-                <a:latin typeface="Meiryo" pitchFamily="34" charset="0"/>
-                <a:ea typeface="Meiryo" pitchFamily="34" charset="-122"/>
-                <a:cs typeface="Meiryo" pitchFamily="34" charset="-120"/>
-              </a:rPr>
-              <a:t>会場と運営に余裕があるとき。もっとも角が立ちません（増やしただけでは繰り上がりません）</a:t>
-            </a:r>
-            <a:endParaRPr lang="en-US" sz="1500" dirty="0"/>
-          </a:p>
-        </p:txBody>
-      </p:sp>
-      <p:sp>
-        <p:nvSpPr>
-          <p:cNvPr id="16" name="Shape 14"/>
-          <p:cNvSpPr/>
-          <p:nvPr/>
-        </p:nvSpPr>
-        <p:spPr>
-          <a:xfrm>
-            <a:off x="640080" y="3108960"/>
-            <a:ext cx="10927080" cy="749808"/>
-          </a:xfrm>
-          <a:prstGeom prst="roundRect">
-            <a:avLst>
-              <a:gd name="adj" fmla="val 7317"/>
-            </a:avLst>
-          </a:prstGeom>
-          <a:solidFill>
-            <a:srgbClr val="FDF3E3"/>
-          </a:solidFill>
-          <a:ln w="12700">
-            <a:solidFill>
-              <a:srgbClr val="FDF3E3"/>
-            </a:solidFill>
-            <a:prstDash val="solid"/>
-          </a:ln>
-        </p:spPr>
-      </p:sp>
-      <p:sp>
-        <p:nvSpPr>
-          <p:cNvPr id="17" name="Shape 15"/>
-          <p:cNvSpPr/>
-          <p:nvPr/>
-        </p:nvSpPr>
-        <p:spPr>
-          <a:xfrm>
-            <a:off x="804672" y="3273552"/>
-            <a:ext cx="420624" cy="420624"/>
-          </a:xfrm>
-          <a:prstGeom prst="ellipse">
-            <a:avLst/>
-          </a:prstGeom>
-          <a:solidFill>
-            <a:srgbClr val="B26A00"/>
-          </a:solidFill>
-          <a:ln/>
-        </p:spPr>
-      </p:sp>
-      <p:sp>
-        <p:nvSpPr>
-          <p:cNvPr id="18" name="Text 16"/>
-          <p:cNvSpPr txBox="1"/>
-          <p:nvPr/>
-        </p:nvSpPr>
-        <p:spPr>
-          <a:xfrm>
-            <a:off x="804672" y="3273552"/>
-            <a:ext cx="420624" cy="420624"/>
-          </a:xfrm>
-          <a:prstGeom prst="rect">
-            <a:avLst/>
-          </a:prstGeom>
-          <a:noFill/>
-          <a:ln/>
-        </p:spPr>
-        <p:txBody>
-          <a:bodyPr wrap="square" rtlCol="0" anchor="ctr"/>
-          <a:lstStyle/>
-          <a:p>
-            <a:pPr algn="ctr" indent="0" marL="0">
-              <a:buNone/>
-            </a:pPr>
-            <a:r>
-              <a:rPr lang="en-US" sz="1400" b="1" dirty="0">
-                <a:solidFill>
-                  <a:srgbClr val="FFFFFF"/>
-                </a:solidFill>
-                <a:latin typeface="Meiryo" pitchFamily="34" charset="0"/>
-                <a:ea typeface="Meiryo" pitchFamily="34" charset="-122"/>
-                <a:cs typeface="Meiryo" pitchFamily="34" charset="-120"/>
-              </a:rPr>
-              <a:t>C</a:t>
-            </a:r>
-            <a:endParaRPr lang="en-US" sz="1400" dirty="0"/>
-          </a:p>
-        </p:txBody>
-      </p:sp>
-      <p:sp>
-        <p:nvSpPr>
-          <p:cNvPr id="19" name="Text 17"/>
-          <p:cNvSpPr txBox="1"/>
-          <p:nvPr/>
-        </p:nvSpPr>
-        <p:spPr>
-          <a:xfrm>
-            <a:off x="1389888" y="3163824"/>
-            <a:ext cx="10012680" cy="640080"/>
-          </a:xfrm>
-          <a:prstGeom prst="rect">
-            <a:avLst/>
-          </a:prstGeom>
-          <a:noFill/>
-          <a:ln/>
-        </p:spPr>
-        <p:txBody>
-          <a:bodyPr wrap="square" lIns="0" tIns="0" rIns="0" bIns="0" rtlCol="0" anchor="ctr"/>
-          <a:lstStyle/>
-          <a:p>
-            <a:pPr algn="l" indent="0" marL="0">
-              <a:lnSpc>
-                <a:spcPct val="120000"/>
-              </a:lnSpc>
-              <a:buNone/>
-            </a:pPr>
-            <a:r>
-              <a:rPr lang="en-US" sz="1500" b="1" dirty="0">
-                <a:solidFill>
-                  <a:srgbClr val="1F2937"/>
-                </a:solidFill>
-                <a:latin typeface="Meiryo" pitchFamily="34" charset="0"/>
-                <a:ea typeface="Meiryo" pitchFamily="34" charset="-122"/>
-                <a:cs typeface="Meiryo" pitchFamily="34" charset="-120"/>
-              </a:rPr>
-              <a:t>人数の収まる別の方を先に繰り上げる</a:t>
-            </a:r>
-            <a:endParaRPr lang="en-US" sz="1500" dirty="0"/>
-          </a:p>
-          <a:p>
-            <a:pPr algn="l" indent="0" marL="0">
-              <a:lnSpc>
-                <a:spcPct val="120000"/>
-              </a:lnSpc>
-              <a:buNone/>
-            </a:pPr>
-            <a:r>
-              <a:rPr lang="en-US" sz="1250" dirty="0">
-                <a:solidFill>
-                  <a:srgbClr val="5B6472"/>
-                </a:solidFill>
-                <a:latin typeface="Meiryo" pitchFamily="34" charset="0"/>
-                <a:ea typeface="Meiryo" pitchFamily="34" charset="-122"/>
-                <a:cs typeface="Meiryo" pitchFamily="34" charset="-120"/>
-              </a:rPr>
-              <a:t>開催が近く、空席を埋めたいとき。順番の追い越しになるので、先にお待ちの方への連絡をおすすめします</a:t>
-            </a:r>
-            <a:endParaRPr lang="en-US" sz="1500" dirty="0"/>
-          </a:p>
-        </p:txBody>
-      </p:sp>
-      <p:sp>
-        <p:nvSpPr>
-          <p:cNvPr id="20" name="Shape 18"/>
-          <p:cNvSpPr/>
-          <p:nvPr/>
-        </p:nvSpPr>
-        <p:spPr>
-          <a:xfrm>
-            <a:off x="640080" y="3977640"/>
-            <a:ext cx="10927080" cy="749808"/>
-          </a:xfrm>
-          <a:prstGeom prst="roundRect">
-            <a:avLst>
-              <a:gd name="adj" fmla="val 7317"/>
-            </a:avLst>
-          </a:prstGeom>
-          <a:solidFill>
-            <a:srgbClr val="FDF3E3"/>
-          </a:solidFill>
-          <a:ln w="12700">
-            <a:solidFill>
-              <a:srgbClr val="FDF3E3"/>
-            </a:solidFill>
-            <a:prstDash val="solid"/>
-          </a:ln>
-        </p:spPr>
-      </p:sp>
-      <p:sp>
-        <p:nvSpPr>
-          <p:cNvPr id="21" name="Shape 19"/>
-          <p:cNvSpPr/>
-          <p:nvPr/>
-        </p:nvSpPr>
-        <p:spPr>
-          <a:xfrm>
-            <a:off x="804672" y="4142232"/>
-            <a:ext cx="420624" cy="420624"/>
-          </a:xfrm>
-          <a:prstGeom prst="ellipse">
-            <a:avLst/>
-          </a:prstGeom>
-          <a:solidFill>
-            <a:srgbClr val="B26A00"/>
-          </a:solidFill>
-          <a:ln/>
-        </p:spPr>
-      </p:sp>
-      <p:sp>
-        <p:nvSpPr>
-          <p:cNvPr id="22" name="Text 20"/>
-          <p:cNvSpPr txBox="1"/>
-          <p:nvPr/>
-        </p:nvSpPr>
-        <p:spPr>
-          <a:xfrm>
-            <a:off x="804672" y="4142232"/>
-            <a:ext cx="420624" cy="420624"/>
-          </a:xfrm>
-          <a:prstGeom prst="rect">
-            <a:avLst/>
-          </a:prstGeom>
-          <a:noFill/>
-          <a:ln/>
-        </p:spPr>
-        <p:txBody>
-          <a:bodyPr wrap="square" rtlCol="0" anchor="ctr"/>
-          <a:lstStyle/>
-          <a:p>
-            <a:pPr algn="ctr" indent="0" marL="0">
-              <a:buNone/>
-            </a:pPr>
-            <a:r>
-              <a:rPr lang="en-US" sz="1400" b="1" dirty="0">
-                <a:solidFill>
-                  <a:srgbClr val="FFFFFF"/>
-                </a:solidFill>
-                <a:latin typeface="Meiryo" pitchFamily="34" charset="0"/>
-                <a:ea typeface="Meiryo" pitchFamily="34" charset="-122"/>
-                <a:cs typeface="Meiryo" pitchFamily="34" charset="-120"/>
-              </a:rPr>
-              <a:t>D</a:t>
-            </a:r>
-            <a:endParaRPr lang="en-US" sz="1400" dirty="0"/>
-          </a:p>
-        </p:txBody>
-      </p:sp>
-      <p:sp>
-        <p:nvSpPr>
-          <p:cNvPr id="23" name="Text 21"/>
-          <p:cNvSpPr txBox="1"/>
-          <p:nvPr/>
-        </p:nvSpPr>
-        <p:spPr>
-          <a:xfrm>
-            <a:off x="1389888" y="4032504"/>
-            <a:ext cx="10012680" cy="640080"/>
-          </a:xfrm>
-          <a:prstGeom prst="rect">
-            <a:avLst/>
-          </a:prstGeom>
-          <a:noFill/>
-          <a:ln/>
-        </p:spPr>
-        <p:txBody>
-          <a:bodyPr wrap="square" lIns="0" tIns="0" rIns="0" bIns="0" rtlCol="0" anchor="ctr"/>
-          <a:lstStyle/>
-          <a:p>
-            <a:pPr algn="l" indent="0" marL="0">
-              <a:lnSpc>
-                <a:spcPct val="120000"/>
-              </a:lnSpc>
-              <a:buNone/>
-            </a:pPr>
-            <a:r>
-              <a:rPr lang="en-US" sz="1500" b="1" dirty="0">
-                <a:solidFill>
-                  <a:srgbClr val="1F2937"/>
-                </a:solidFill>
-                <a:latin typeface="Meiryo" pitchFamily="34" charset="0"/>
-                <a:ea typeface="Meiryo" pitchFamily="34" charset="-122"/>
-                <a:cs typeface="Meiryo" pitchFamily="34" charset="-120"/>
-              </a:rPr>
-              <a:t>人数を減らして取り直していただく</a:t>
-            </a:r>
-            <a:endParaRPr lang="en-US" sz="1500" dirty="0"/>
-          </a:p>
-          <a:p>
-            <a:pPr algn="l" indent="0" marL="0">
-              <a:lnSpc>
-                <a:spcPct val="120000"/>
-              </a:lnSpc>
-              <a:buNone/>
-            </a:pPr>
-            <a:r>
-              <a:rPr lang="en-US" sz="1250" dirty="0">
-                <a:solidFill>
-                  <a:srgbClr val="5B6472"/>
-                </a:solidFill>
-                <a:latin typeface="Meiryo" pitchFamily="34" charset="0"/>
-                <a:ea typeface="Meiryo" pitchFamily="34" charset="-122"/>
-                <a:cs typeface="Meiryo" pitchFamily="34" charset="-120"/>
-              </a:rPr>
-              <a:t>3 名のうち 2 名なら参加できる、と言われたとき。待ち順が最初からになる点に注意が必要です</a:t>
-            </a:r>
-            <a:endParaRPr lang="en-US" sz="1500" dirty="0"/>
-          </a:p>
-        </p:txBody>
-      </p:sp>
-      <p:sp>
-        <p:nvSpPr>
-          <p:cNvPr id="24" name="Shape 22"/>
-          <p:cNvSpPr/>
-          <p:nvPr/>
-        </p:nvSpPr>
-        <p:spPr>
-          <a:xfrm>
-            <a:off x="640080" y="4846320"/>
-            <a:ext cx="10927080" cy="749808"/>
-          </a:xfrm>
-          <a:prstGeom prst="roundRect">
-            <a:avLst>
-              <a:gd name="adj" fmla="val 7317"/>
-            </a:avLst>
-          </a:prstGeom>
-          <a:solidFill>
-            <a:srgbClr val="F4F7FC"/>
-          </a:solidFill>
-          <a:ln w="12700">
-            <a:solidFill>
-              <a:srgbClr val="C7D2E4"/>
-            </a:solidFill>
-            <a:prstDash val="solid"/>
-          </a:ln>
-        </p:spPr>
-      </p:sp>
-      <p:sp>
-        <p:nvSpPr>
-          <p:cNvPr id="25" name="Shape 23"/>
-          <p:cNvSpPr/>
-          <p:nvPr/>
-        </p:nvSpPr>
-        <p:spPr>
-          <a:xfrm>
-            <a:off x="804672" y="5010912"/>
-            <a:ext cx="420624" cy="420624"/>
-          </a:xfrm>
-          <a:prstGeom prst="ellipse">
-            <a:avLst/>
-          </a:prstGeom>
-          <a:solidFill>
-            <a:srgbClr val="1E2761"/>
-          </a:solidFill>
-          <a:ln/>
-        </p:spPr>
-      </p:sp>
-      <p:sp>
-        <p:nvSpPr>
-          <p:cNvPr id="26" name="Text 24"/>
-          <p:cNvSpPr txBox="1"/>
-          <p:nvPr/>
-        </p:nvSpPr>
-        <p:spPr>
-          <a:xfrm>
-            <a:off x="804672" y="5010912"/>
-            <a:ext cx="420624" cy="420624"/>
-          </a:xfrm>
-          <a:prstGeom prst="rect">
-            <a:avLst/>
-          </a:prstGeom>
-          <a:noFill/>
-          <a:ln/>
-        </p:spPr>
-        <p:txBody>
-          <a:bodyPr wrap="square" rtlCol="0" anchor="ctr"/>
-          <a:lstStyle/>
-          <a:p>
-            <a:pPr algn="ctr" indent="0" marL="0">
-              <a:buNone/>
-            </a:pPr>
-            <a:r>
-              <a:rPr lang="en-US" sz="1400" b="1" dirty="0">
-                <a:solidFill>
-                  <a:srgbClr val="FFFFFF"/>
-                </a:solidFill>
-                <a:latin typeface="Meiryo" pitchFamily="34" charset="0"/>
-                <a:ea typeface="Meiryo" pitchFamily="34" charset="-122"/>
-                <a:cs typeface="Meiryo" pitchFamily="34" charset="-120"/>
-              </a:rPr>
-              <a:t>E</a:t>
-            </a:r>
-            <a:endParaRPr lang="en-US" sz="1400" dirty="0"/>
-          </a:p>
-        </p:txBody>
-      </p:sp>
-      <p:sp>
-        <p:nvSpPr>
-          <p:cNvPr id="27" name="Text 25"/>
-          <p:cNvSpPr txBox="1"/>
-          <p:nvPr/>
-        </p:nvSpPr>
-        <p:spPr>
-          <a:xfrm>
-            <a:off x="1389888" y="4901184"/>
-            <a:ext cx="10012680" cy="640080"/>
-          </a:xfrm>
-          <a:prstGeom prst="rect">
-            <a:avLst/>
-          </a:prstGeom>
-          <a:noFill/>
-          <a:ln/>
-        </p:spPr>
-        <p:txBody>
-          <a:bodyPr wrap="square" lIns="0" tIns="0" rIns="0" bIns="0" rtlCol="0" anchor="ctr"/>
-          <a:lstStyle/>
-          <a:p>
-            <a:pPr algn="l" indent="0" marL="0">
-              <a:lnSpc>
-                <a:spcPct val="120000"/>
-              </a:lnSpc>
-              <a:buNone/>
-            </a:pPr>
-            <a:r>
-              <a:rPr lang="en-US" sz="1500" b="1" dirty="0">
-                <a:solidFill>
-                  <a:srgbClr val="1F2937"/>
-                </a:solidFill>
-                <a:latin typeface="Meiryo" pitchFamily="34" charset="0"/>
-                <a:ea typeface="Meiryo" pitchFamily="34" charset="-122"/>
-                <a:cs typeface="Meiryo" pitchFamily="34" charset="-120"/>
-              </a:rPr>
-              <a:t>別の回に振り替えていただく</a:t>
-            </a:r>
-            <a:endParaRPr lang="en-US" sz="1500" dirty="0"/>
-          </a:p>
-          <a:p>
-            <a:pPr algn="l" indent="0" marL="0">
-              <a:lnSpc>
-                <a:spcPct val="120000"/>
-              </a:lnSpc>
-              <a:buNone/>
-            </a:pPr>
-            <a:r>
-              <a:rPr lang="en-US" sz="1250" dirty="0">
-                <a:solidFill>
-                  <a:srgbClr val="5B6472"/>
-                </a:solidFill>
-                <a:latin typeface="Meiryo" pitchFamily="34" charset="0"/>
-                <a:ea typeface="Meiryo" pitchFamily="34" charset="-122"/>
-                <a:cs typeface="Meiryo" pitchFamily="34" charset="-120"/>
-              </a:rPr>
-              <a:t>空きのある別の回があるとき。これもキャンセル → 取り直しになります</a:t>
-            </a:r>
-            <a:endParaRPr lang="en-US" sz="1500" dirty="0"/>
-          </a:p>
-        </p:txBody>
-      </p:sp>
-      <p:sp>
-        <p:nvSpPr>
-          <p:cNvPr id="28" name="Shape 26"/>
-          <p:cNvSpPr/>
-          <p:nvPr/>
-        </p:nvSpPr>
-        <p:spPr>
-          <a:xfrm>
-            <a:off x="640080" y="5779008"/>
-            <a:ext cx="10927080" cy="512064"/>
-          </a:xfrm>
-          <a:prstGeom prst="roundRect">
-            <a:avLst>
-              <a:gd name="adj" fmla="val 14286"/>
-            </a:avLst>
-          </a:prstGeom>
-          <a:solidFill>
-            <a:srgbClr val="CADCFC"/>
-          </a:solidFill>
-          <a:ln w="12700">
-            <a:solidFill>
-              <a:srgbClr val="CADCFC"/>
-            </a:solidFill>
-            <a:prstDash val="solid"/>
-          </a:ln>
-        </p:spPr>
-      </p:sp>
-      <p:sp>
-        <p:nvSpPr>
-          <p:cNvPr id="29" name="Text 27"/>
-          <p:cNvSpPr txBox="1"/>
-          <p:nvPr/>
-        </p:nvSpPr>
-        <p:spPr>
-          <a:xfrm>
-            <a:off x="841248" y="5888736"/>
-            <a:ext cx="10524744" cy="292608"/>
+          <p:cNvPr id="12" name="Text 9"/>
+          <p:cNvSpPr txBox="1"/>
+          <p:nvPr/>
+        </p:nvSpPr>
+        <p:spPr>
+          <a:xfrm>
+            <a:off x="6373368" y="4681728"/>
+            <a:ext cx="4992624" cy="1335024"/>
           </a:xfrm>
           <a:prstGeom prst="rect">
             <a:avLst/>
@@ -12071,17 +12457,66 @@
               <a:buNone/>
             </a:pPr>
             <a:r>
-              <a:rPr lang="en-US" sz="1350" b="1" dirty="0">
-                <a:solidFill>
-                  <a:srgbClr val="1E2761"/>
-                </a:solidFill>
-                <a:latin typeface="Meiryo" pitchFamily="34" charset="0"/>
-                <a:ea typeface="Meiryo" pitchFamily="34" charset="-122"/>
-                <a:cs typeface="Meiryo" pitchFamily="34" charset="-120"/>
-              </a:rPr>
-              <a:t>判断に迷ったら事務局にご相談ください。</a:t>
-            </a:r>
-            <a:endParaRPr lang="en-US" sz="1350" dirty="0"/>
+              <a:rPr lang="en-US" sz="1500" b="1" dirty="0">
+                <a:solidFill>
+                  <a:srgbClr val="15803D"/>
+                </a:solidFill>
+                <a:latin typeface="Meiryo" pitchFamily="34" charset="0"/>
+                <a:ea typeface="Meiryo" pitchFamily="34" charset="-122"/>
+                <a:cs typeface="Meiryo" pitchFamily="34" charset="-120"/>
+              </a:rPr>
+              <a:t>押しても席は動きません</a:t>
+            </a:r>
+            <a:endParaRPr lang="en-US" sz="1500" dirty="0"/>
+          </a:p>
+          <a:p>
+            <a:pPr algn="l" indent="0" marL="0">
+              <a:lnSpc>
+                <a:spcPct val="125000"/>
+              </a:lnSpc>
+              <a:buNone/>
+            </a:pPr>
+            <a:r>
+              <a:rPr lang="en-US" sz="1300" dirty="0">
+                <a:solidFill>
+                  <a:srgbClr val="15803D"/>
+                </a:solidFill>
+                <a:latin typeface="Meiryo" pitchFamily="34" charset="0"/>
+                <a:ea typeface="Meiryo" pitchFamily="34" charset="-122"/>
+                <a:cs typeface="Meiryo" pitchFamily="34" charset="-120"/>
+              </a:rPr>
+              <a:t>予約が壊れることもありません。</a:t>
+            </a:r>
+            <a:endParaRPr lang="en-US" sz="1500" dirty="0"/>
+          </a:p>
+          <a:p>
+            <a:pPr algn="l" indent="0" marL="0">
+              <a:lnSpc>
+                <a:spcPct val="125000"/>
+              </a:lnSpc>
+              <a:buNone/>
+            </a:pPr>
+            <a:endParaRPr lang="en-US" sz="1500" dirty="0"/>
+          </a:p>
+          <a:p>
+            <a:pPr algn="l" indent="0" marL="0">
+              <a:lnSpc>
+                <a:spcPct val="125000"/>
+              </a:lnSpc>
+              <a:buNone/>
+            </a:pPr>
+            <a:r>
+              <a:rPr lang="en-US" sz="1300" dirty="0">
+                <a:solidFill>
+                  <a:srgbClr val="15803D"/>
+                </a:solidFill>
+                <a:latin typeface="Meiryo" pitchFamily="34" charset="0"/>
+                <a:ea typeface="Meiryo" pitchFamily="34" charset="-122"/>
+                <a:cs typeface="Meiryo" pitchFamily="34" charset="-120"/>
+              </a:rPr>
+              <a:t>迷ったら押して確かめていただいて構いません。</a:t>
+            </a:r>
+            <a:endParaRPr lang="en-US" sz="1500" dirty="0"/>
           </a:p>
         </p:txBody>
       </p:sp>
@@ -12287,7 +12722,7 @@
                 <a:ea typeface="Meiryo" pitchFamily="34" charset="-122"/>
                 <a:cs typeface="Meiryo" pitchFamily="34" charset="-120"/>
               </a:rPr>
-              <a:t>手立て B ： 定員を増やす</a:t>
+              <a:t>取れる手立ては 5 つあります</a:t>
             </a:r>
             <a:endParaRPr lang="en-US" sz="2800" dirty="0"/>
           </a:p>
@@ -12326,58 +12761,34 @@
                 <a:ea typeface="Meiryo" pitchFamily="34" charset="-122"/>
                 <a:cs typeface="Meiryo" pitchFamily="34" charset="-120"/>
               </a:rPr>
-              <a:t>「体験内容」→ 開催回 → 編集 → 定員（人数）</a:t>
+              <a:t>開催まで日があるうちは A が原則です</a:t>
             </a:r>
             <a:endParaRPr lang="en-US" sz="1400" dirty="0"/>
           </a:p>
         </p:txBody>
       </p:sp>
-      <p:pic>
-        <p:nvPicPr>
-          <p:cNvPr id="8" name="Image 0" descr="C:\Users\sato\AppData\Local\Temp\claude\c--Users-sato-Desktop---3---3\c0abf194-6a09-42ac-bc16-2cd244740c64\scratchpad\deck\img\c-capacity.png">    </p:cNvPr>
-          <p:cNvPicPr>
-            <a:picLocks noChangeAspect="1"/>
-          </p:cNvPicPr>
-          <p:nvPr/>
-        </p:nvPicPr>
-        <p:blipFill>
-          <a:blip r:embed="rId1"/>
-          <a:stretch>
-            <a:fillRect/>
-          </a:stretch>
-        </p:blipFill>
-        <p:spPr>
-          <a:xfrm>
-            <a:off x="640080" y="1325880"/>
-            <a:ext cx="6168187" cy="4206240"/>
-          </a:xfrm>
-          <a:prstGeom prst="rect">
-            <a:avLst/>
-          </a:prstGeom>
-        </p:spPr>
-      </p:pic>
-      <p:sp>
-        <p:nvSpPr>
-          <p:cNvPr id="9" name="Shape 6"/>
+      <p:sp>
+        <p:nvSpPr>
+          <p:cNvPr id="8" name="Shape 6"/>
           <p:cNvSpPr/>
           <p:nvPr/>
         </p:nvSpPr>
         <p:spPr>
           <a:xfrm>
-            <a:off x="7406640" y="1463040"/>
-            <a:ext cx="4160520" cy="1371600"/>
+            <a:off x="640080" y="1371600"/>
+            <a:ext cx="10927080" cy="749808"/>
           </a:xfrm>
           <a:prstGeom prst="roundRect">
             <a:avLst>
-              <a:gd name="adj" fmla="val 5333"/>
+              <a:gd name="adj" fmla="val 7317"/>
             </a:avLst>
           </a:prstGeom>
           <a:solidFill>
-            <a:srgbClr val="FEF2F2"/>
+            <a:srgbClr val="ECFDF5"/>
           </a:solidFill>
           <a:ln w="12700">
             <a:solidFill>
-              <a:srgbClr val="FEF2F2"/>
+              <a:srgbClr val="ECFDF5"/>
             </a:solidFill>
             <a:prstDash val="solid"/>
           </a:ln>
@@ -12385,14 +12796,73 @@
       </p:sp>
       <p:sp>
         <p:nvSpPr>
-          <p:cNvPr id="10" name="Text 7"/>
-          <p:cNvSpPr txBox="1"/>
-          <p:nvPr/>
-        </p:nvSpPr>
-        <p:spPr>
-          <a:xfrm>
-            <a:off x="7607808" y="1572768"/>
-            <a:ext cx="3758184" cy="1152144"/>
+          <p:cNvPr id="9" name="Shape 7"/>
+          <p:cNvSpPr/>
+          <p:nvPr/>
+        </p:nvSpPr>
+        <p:spPr>
+          <a:xfrm>
+            <a:off x="804672" y="1536192"/>
+            <a:ext cx="420624" cy="420624"/>
+          </a:xfrm>
+          <a:prstGeom prst="ellipse">
+            <a:avLst/>
+          </a:prstGeom>
+          <a:solidFill>
+            <a:srgbClr val="15803D"/>
+          </a:solidFill>
+          <a:ln/>
+        </p:spPr>
+      </p:sp>
+      <p:sp>
+        <p:nvSpPr>
+          <p:cNvPr id="10" name="Text 8"/>
+          <p:cNvSpPr txBox="1"/>
+          <p:nvPr/>
+        </p:nvSpPr>
+        <p:spPr>
+          <a:xfrm>
+            <a:off x="804672" y="1536192"/>
+            <a:ext cx="420624" cy="420624"/>
+          </a:xfrm>
+          <a:prstGeom prst="rect">
+            <a:avLst/>
+          </a:prstGeom>
+          <a:noFill/>
+          <a:ln/>
+        </p:spPr>
+        <p:txBody>
+          <a:bodyPr wrap="square" rtlCol="0" anchor="ctr"/>
+          <a:lstStyle/>
+          <a:p>
+            <a:pPr algn="ctr" indent="0" marL="0">
+              <a:buNone/>
+            </a:pPr>
+            <a:r>
+              <a:rPr lang="en-US" sz="1400" b="1" dirty="0">
+                <a:solidFill>
+                  <a:srgbClr val="FFFFFF"/>
+                </a:solidFill>
+                <a:latin typeface="Meiryo" pitchFamily="34" charset="0"/>
+                <a:ea typeface="Meiryo" pitchFamily="34" charset="-122"/>
+                <a:cs typeface="Meiryo" pitchFamily="34" charset="-120"/>
+              </a:rPr>
+              <a:t>A</a:t>
+            </a:r>
+            <a:endParaRPr lang="en-US" sz="1400" dirty="0"/>
+          </a:p>
+        </p:txBody>
+      </p:sp>
+      <p:sp>
+        <p:nvSpPr>
+          <p:cNvPr id="11" name="Text 9"/>
+          <p:cNvSpPr txBox="1"/>
+          <p:nvPr/>
+        </p:nvSpPr>
+        <p:spPr>
+          <a:xfrm>
+            <a:off x="1389888" y="1426464"/>
+            <a:ext cx="10012680" cy="640080"/>
           </a:xfrm>
           <a:prstGeom prst="rect">
             <a:avLst/>
@@ -12406,79 +12876,651 @@
           <a:p>
             <a:pPr algn="l" indent="0" marL="0">
               <a:lnSpc>
-                <a:spcPct val="125000"/>
+                <a:spcPct val="120000"/>
               </a:lnSpc>
               <a:buNone/>
             </a:pPr>
             <a:r>
               <a:rPr lang="en-US" sz="1500" b="1" dirty="0">
                 <a:solidFill>
-                  <a:srgbClr val="B91C1C"/>
-                </a:solidFill>
-                <a:latin typeface="Meiryo" pitchFamily="34" charset="0"/>
-                <a:ea typeface="Meiryo" pitchFamily="34" charset="-122"/>
-                <a:cs typeface="Meiryo" pitchFamily="34" charset="-120"/>
-              </a:rPr>
-              <a:t>増やしただけでは繰り上がりません</a:t>
+                  <a:srgbClr val="1F2937"/>
+                </a:solidFill>
+                <a:latin typeface="Meiryo" pitchFamily="34" charset="0"/>
+                <a:ea typeface="Meiryo" pitchFamily="34" charset="-122"/>
+                <a:cs typeface="Meiryo" pitchFamily="34" charset="-120"/>
+              </a:rPr>
+              <a:t>そのまま待つ（原則）</a:t>
             </a:r>
             <a:endParaRPr lang="en-US" sz="1500" dirty="0"/>
           </a:p>
           <a:p>
             <a:pPr algn="l" indent="0" marL="0">
               <a:lnSpc>
-                <a:spcPct val="125000"/>
+                <a:spcPct val="120000"/>
               </a:lnSpc>
               <a:buNone/>
             </a:pPr>
             <a:r>
               <a:rPr lang="en-US" sz="1250" dirty="0">
                 <a:solidFill>
-                  <a:srgbClr val="B91C1C"/>
-                </a:solidFill>
-                <a:latin typeface="Meiryo" pitchFamily="34" charset="0"/>
-                <a:ea typeface="Meiryo" pitchFamily="34" charset="-122"/>
-                <a:cs typeface="Meiryo" pitchFamily="34" charset="-120"/>
-              </a:rPr>
-              <a:t>更新したあと、予約一覧に戻って</a:t>
+                  <a:srgbClr val="5B6472"/>
+                </a:solidFill>
+                <a:latin typeface="Meiryo" pitchFamily="34" charset="0"/>
+                <a:ea typeface="Meiryo" pitchFamily="34" charset="-122"/>
+                <a:cs typeface="Meiryo" pitchFamily="34" charset="-120"/>
+              </a:rPr>
+              <a:t>追加のキャンセルが出れば、先頭の方をそのまま繰り上げられます。お待ちの順番を守れるのはこれだけです</a:t>
             </a:r>
             <a:endParaRPr lang="en-US" sz="1500" dirty="0"/>
           </a:p>
-          <a:p>
-            <a:pPr algn="l" indent="0" marL="0">
-              <a:lnSpc>
-                <a:spcPct val="125000"/>
-              </a:lnSpc>
-              <a:buNone/>
-            </a:pPr>
-            <a:r>
-              <a:rPr lang="en-US" sz="1250" dirty="0">
-                <a:solidFill>
-                  <a:srgbClr val="B91C1C"/>
-                </a:solidFill>
-                <a:latin typeface="Meiryo" pitchFamily="34" charset="0"/>
-                <a:ea typeface="Meiryo" pitchFamily="34" charset="-122"/>
-                <a:cs typeface="Meiryo" pitchFamily="34" charset="-120"/>
-              </a:rPr>
-              <a:t>「繰り上げ」を押してください。</a:t>
-            </a:r>
-            <a:endParaRPr lang="en-US" sz="1500" dirty="0"/>
-          </a:p>
-        </p:txBody>
-      </p:sp>
-      <p:sp>
-        <p:nvSpPr>
-          <p:cNvPr id="11" name="Shape 8"/>
+        </p:txBody>
+      </p:sp>
+      <p:sp>
+        <p:nvSpPr>
+          <p:cNvPr id="12" name="Shape 10"/>
           <p:cNvSpPr/>
           <p:nvPr/>
         </p:nvSpPr>
         <p:spPr>
           <a:xfrm>
-            <a:off x="7406640" y="2971800"/>
-            <a:ext cx="4160520" cy="1371600"/>
+            <a:off x="640080" y="2240280"/>
+            <a:ext cx="10927080" cy="749808"/>
           </a:xfrm>
           <a:prstGeom prst="roundRect">
             <a:avLst>
-              <a:gd name="adj" fmla="val 5333"/>
+              <a:gd name="adj" fmla="val 7317"/>
+            </a:avLst>
+          </a:prstGeom>
+          <a:solidFill>
+            <a:srgbClr val="F4F7FC"/>
+          </a:solidFill>
+          <a:ln w="12700">
+            <a:solidFill>
+              <a:srgbClr val="C7D2E4"/>
+            </a:solidFill>
+            <a:prstDash val="solid"/>
+          </a:ln>
+        </p:spPr>
+      </p:sp>
+      <p:sp>
+        <p:nvSpPr>
+          <p:cNvPr id="13" name="Shape 11"/>
+          <p:cNvSpPr/>
+          <p:nvPr/>
+        </p:nvSpPr>
+        <p:spPr>
+          <a:xfrm>
+            <a:off x="804672" y="2404872"/>
+            <a:ext cx="420624" cy="420624"/>
+          </a:xfrm>
+          <a:prstGeom prst="ellipse">
+            <a:avLst/>
+          </a:prstGeom>
+          <a:solidFill>
+            <a:srgbClr val="1E2761"/>
+          </a:solidFill>
+          <a:ln/>
+        </p:spPr>
+      </p:sp>
+      <p:sp>
+        <p:nvSpPr>
+          <p:cNvPr id="14" name="Text 12"/>
+          <p:cNvSpPr txBox="1"/>
+          <p:nvPr/>
+        </p:nvSpPr>
+        <p:spPr>
+          <a:xfrm>
+            <a:off x="804672" y="2404872"/>
+            <a:ext cx="420624" cy="420624"/>
+          </a:xfrm>
+          <a:prstGeom prst="rect">
+            <a:avLst/>
+          </a:prstGeom>
+          <a:noFill/>
+          <a:ln/>
+        </p:spPr>
+        <p:txBody>
+          <a:bodyPr wrap="square" rtlCol="0" anchor="ctr"/>
+          <a:lstStyle/>
+          <a:p>
+            <a:pPr algn="ctr" indent="0" marL="0">
+              <a:buNone/>
+            </a:pPr>
+            <a:r>
+              <a:rPr lang="en-US" sz="1400" b="1" dirty="0">
+                <a:solidFill>
+                  <a:srgbClr val="FFFFFF"/>
+                </a:solidFill>
+                <a:latin typeface="Meiryo" pitchFamily="34" charset="0"/>
+                <a:ea typeface="Meiryo" pitchFamily="34" charset="-122"/>
+                <a:cs typeface="Meiryo" pitchFamily="34" charset="-120"/>
+              </a:rPr>
+              <a:t>B</a:t>
+            </a:r>
+            <a:endParaRPr lang="en-US" sz="1400" dirty="0"/>
+          </a:p>
+        </p:txBody>
+      </p:sp>
+      <p:sp>
+        <p:nvSpPr>
+          <p:cNvPr id="15" name="Text 13"/>
+          <p:cNvSpPr txBox="1"/>
+          <p:nvPr/>
+        </p:nvSpPr>
+        <p:spPr>
+          <a:xfrm>
+            <a:off x="1389888" y="2295144"/>
+            <a:ext cx="10012680" cy="640080"/>
+          </a:xfrm>
+          <a:prstGeom prst="rect">
+            <a:avLst/>
+          </a:prstGeom>
+          <a:noFill/>
+          <a:ln/>
+        </p:spPr>
+        <p:txBody>
+          <a:bodyPr wrap="square" lIns="0" tIns="0" rIns="0" bIns="0" rtlCol="0" anchor="ctr"/>
+          <a:lstStyle/>
+          <a:p>
+            <a:pPr algn="l" indent="0" marL="0">
+              <a:lnSpc>
+                <a:spcPct val="120000"/>
+              </a:lnSpc>
+              <a:buNone/>
+            </a:pPr>
+            <a:r>
+              <a:rPr lang="en-US" sz="1500" b="1" dirty="0">
+                <a:solidFill>
+                  <a:srgbClr val="1F2937"/>
+                </a:solidFill>
+                <a:latin typeface="Meiryo" pitchFamily="34" charset="0"/>
+                <a:ea typeface="Meiryo" pitchFamily="34" charset="-122"/>
+                <a:cs typeface="Meiryo" pitchFamily="34" charset="-120"/>
+              </a:rPr>
+              <a:t>定員を増やす</a:t>
+            </a:r>
+            <a:endParaRPr lang="en-US" sz="1500" dirty="0"/>
+          </a:p>
+          <a:p>
+            <a:pPr algn="l" indent="0" marL="0">
+              <a:lnSpc>
+                <a:spcPct val="120000"/>
+              </a:lnSpc>
+              <a:buNone/>
+            </a:pPr>
+            <a:r>
+              <a:rPr lang="en-US" sz="1250" dirty="0">
+                <a:solidFill>
+                  <a:srgbClr val="5B6472"/>
+                </a:solidFill>
+                <a:latin typeface="Meiryo" pitchFamily="34" charset="0"/>
+                <a:ea typeface="Meiryo" pitchFamily="34" charset="-122"/>
+                <a:cs typeface="Meiryo" pitchFamily="34" charset="-120"/>
+              </a:rPr>
+              <a:t>会場と運営に余裕があるとき。もっとも角が立ちません（増やしただけでは繰り上がりません）</a:t>
+            </a:r>
+            <a:endParaRPr lang="en-US" sz="1500" dirty="0"/>
+          </a:p>
+        </p:txBody>
+      </p:sp>
+      <p:sp>
+        <p:nvSpPr>
+          <p:cNvPr id="16" name="Shape 14"/>
+          <p:cNvSpPr/>
+          <p:nvPr/>
+        </p:nvSpPr>
+        <p:spPr>
+          <a:xfrm>
+            <a:off x="640080" y="3108960"/>
+            <a:ext cx="10927080" cy="749808"/>
+          </a:xfrm>
+          <a:prstGeom prst="roundRect">
+            <a:avLst>
+              <a:gd name="adj" fmla="val 7317"/>
+            </a:avLst>
+          </a:prstGeom>
+          <a:solidFill>
+            <a:srgbClr val="FDF3E3"/>
+          </a:solidFill>
+          <a:ln w="12700">
+            <a:solidFill>
+              <a:srgbClr val="FDF3E3"/>
+            </a:solidFill>
+            <a:prstDash val="solid"/>
+          </a:ln>
+        </p:spPr>
+      </p:sp>
+      <p:sp>
+        <p:nvSpPr>
+          <p:cNvPr id="17" name="Shape 15"/>
+          <p:cNvSpPr/>
+          <p:nvPr/>
+        </p:nvSpPr>
+        <p:spPr>
+          <a:xfrm>
+            <a:off x="804672" y="3273552"/>
+            <a:ext cx="420624" cy="420624"/>
+          </a:xfrm>
+          <a:prstGeom prst="ellipse">
+            <a:avLst/>
+          </a:prstGeom>
+          <a:solidFill>
+            <a:srgbClr val="B26A00"/>
+          </a:solidFill>
+          <a:ln/>
+        </p:spPr>
+      </p:sp>
+      <p:sp>
+        <p:nvSpPr>
+          <p:cNvPr id="18" name="Text 16"/>
+          <p:cNvSpPr txBox="1"/>
+          <p:nvPr/>
+        </p:nvSpPr>
+        <p:spPr>
+          <a:xfrm>
+            <a:off x="804672" y="3273552"/>
+            <a:ext cx="420624" cy="420624"/>
+          </a:xfrm>
+          <a:prstGeom prst="rect">
+            <a:avLst/>
+          </a:prstGeom>
+          <a:noFill/>
+          <a:ln/>
+        </p:spPr>
+        <p:txBody>
+          <a:bodyPr wrap="square" rtlCol="0" anchor="ctr"/>
+          <a:lstStyle/>
+          <a:p>
+            <a:pPr algn="ctr" indent="0" marL="0">
+              <a:buNone/>
+            </a:pPr>
+            <a:r>
+              <a:rPr lang="en-US" sz="1400" b="1" dirty="0">
+                <a:solidFill>
+                  <a:srgbClr val="FFFFFF"/>
+                </a:solidFill>
+                <a:latin typeface="Meiryo" pitchFamily="34" charset="0"/>
+                <a:ea typeface="Meiryo" pitchFamily="34" charset="-122"/>
+                <a:cs typeface="Meiryo" pitchFamily="34" charset="-120"/>
+              </a:rPr>
+              <a:t>C</a:t>
+            </a:r>
+            <a:endParaRPr lang="en-US" sz="1400" dirty="0"/>
+          </a:p>
+        </p:txBody>
+      </p:sp>
+      <p:sp>
+        <p:nvSpPr>
+          <p:cNvPr id="19" name="Text 17"/>
+          <p:cNvSpPr txBox="1"/>
+          <p:nvPr/>
+        </p:nvSpPr>
+        <p:spPr>
+          <a:xfrm>
+            <a:off x="1389888" y="3163824"/>
+            <a:ext cx="10012680" cy="640080"/>
+          </a:xfrm>
+          <a:prstGeom prst="rect">
+            <a:avLst/>
+          </a:prstGeom>
+          <a:noFill/>
+          <a:ln/>
+        </p:spPr>
+        <p:txBody>
+          <a:bodyPr wrap="square" lIns="0" tIns="0" rIns="0" bIns="0" rtlCol="0" anchor="ctr"/>
+          <a:lstStyle/>
+          <a:p>
+            <a:pPr algn="l" indent="0" marL="0">
+              <a:lnSpc>
+                <a:spcPct val="120000"/>
+              </a:lnSpc>
+              <a:buNone/>
+            </a:pPr>
+            <a:r>
+              <a:rPr lang="en-US" sz="1500" b="1" dirty="0">
+                <a:solidFill>
+                  <a:srgbClr val="1F2937"/>
+                </a:solidFill>
+                <a:latin typeface="Meiryo" pitchFamily="34" charset="0"/>
+                <a:ea typeface="Meiryo" pitchFamily="34" charset="-122"/>
+                <a:cs typeface="Meiryo" pitchFamily="34" charset="-120"/>
+              </a:rPr>
+              <a:t>人数の収まる別の方を先に繰り上げる</a:t>
+            </a:r>
+            <a:endParaRPr lang="en-US" sz="1500" dirty="0"/>
+          </a:p>
+          <a:p>
+            <a:pPr algn="l" indent="0" marL="0">
+              <a:lnSpc>
+                <a:spcPct val="120000"/>
+              </a:lnSpc>
+              <a:buNone/>
+            </a:pPr>
+            <a:r>
+              <a:rPr lang="en-US" sz="1250" dirty="0">
+                <a:solidFill>
+                  <a:srgbClr val="5B6472"/>
+                </a:solidFill>
+                <a:latin typeface="Meiryo" pitchFamily="34" charset="0"/>
+                <a:ea typeface="Meiryo" pitchFamily="34" charset="-122"/>
+                <a:cs typeface="Meiryo" pitchFamily="34" charset="-120"/>
+              </a:rPr>
+              <a:t>開催が近く、空席を埋めたいとき。順番の追い越しになるので、先にお待ちの方への連絡をおすすめします</a:t>
+            </a:r>
+            <a:endParaRPr lang="en-US" sz="1500" dirty="0"/>
+          </a:p>
+        </p:txBody>
+      </p:sp>
+      <p:sp>
+        <p:nvSpPr>
+          <p:cNvPr id="20" name="Shape 18"/>
+          <p:cNvSpPr/>
+          <p:nvPr/>
+        </p:nvSpPr>
+        <p:spPr>
+          <a:xfrm>
+            <a:off x="640080" y="3977640"/>
+            <a:ext cx="10927080" cy="749808"/>
+          </a:xfrm>
+          <a:prstGeom prst="roundRect">
+            <a:avLst>
+              <a:gd name="adj" fmla="val 7317"/>
+            </a:avLst>
+          </a:prstGeom>
+          <a:solidFill>
+            <a:srgbClr val="FDF3E3"/>
+          </a:solidFill>
+          <a:ln w="12700">
+            <a:solidFill>
+              <a:srgbClr val="FDF3E3"/>
+            </a:solidFill>
+            <a:prstDash val="solid"/>
+          </a:ln>
+        </p:spPr>
+      </p:sp>
+      <p:sp>
+        <p:nvSpPr>
+          <p:cNvPr id="21" name="Shape 19"/>
+          <p:cNvSpPr/>
+          <p:nvPr/>
+        </p:nvSpPr>
+        <p:spPr>
+          <a:xfrm>
+            <a:off x="804672" y="4142232"/>
+            <a:ext cx="420624" cy="420624"/>
+          </a:xfrm>
+          <a:prstGeom prst="ellipse">
+            <a:avLst/>
+          </a:prstGeom>
+          <a:solidFill>
+            <a:srgbClr val="B26A00"/>
+          </a:solidFill>
+          <a:ln/>
+        </p:spPr>
+      </p:sp>
+      <p:sp>
+        <p:nvSpPr>
+          <p:cNvPr id="22" name="Text 20"/>
+          <p:cNvSpPr txBox="1"/>
+          <p:nvPr/>
+        </p:nvSpPr>
+        <p:spPr>
+          <a:xfrm>
+            <a:off x="804672" y="4142232"/>
+            <a:ext cx="420624" cy="420624"/>
+          </a:xfrm>
+          <a:prstGeom prst="rect">
+            <a:avLst/>
+          </a:prstGeom>
+          <a:noFill/>
+          <a:ln/>
+        </p:spPr>
+        <p:txBody>
+          <a:bodyPr wrap="square" rtlCol="0" anchor="ctr"/>
+          <a:lstStyle/>
+          <a:p>
+            <a:pPr algn="ctr" indent="0" marL="0">
+              <a:buNone/>
+            </a:pPr>
+            <a:r>
+              <a:rPr lang="en-US" sz="1400" b="1" dirty="0">
+                <a:solidFill>
+                  <a:srgbClr val="FFFFFF"/>
+                </a:solidFill>
+                <a:latin typeface="Meiryo" pitchFamily="34" charset="0"/>
+                <a:ea typeface="Meiryo" pitchFamily="34" charset="-122"/>
+                <a:cs typeface="Meiryo" pitchFamily="34" charset="-120"/>
+              </a:rPr>
+              <a:t>D</a:t>
+            </a:r>
+            <a:endParaRPr lang="en-US" sz="1400" dirty="0"/>
+          </a:p>
+        </p:txBody>
+      </p:sp>
+      <p:sp>
+        <p:nvSpPr>
+          <p:cNvPr id="23" name="Text 21"/>
+          <p:cNvSpPr txBox="1"/>
+          <p:nvPr/>
+        </p:nvSpPr>
+        <p:spPr>
+          <a:xfrm>
+            <a:off x="1389888" y="4032504"/>
+            <a:ext cx="10012680" cy="640080"/>
+          </a:xfrm>
+          <a:prstGeom prst="rect">
+            <a:avLst/>
+          </a:prstGeom>
+          <a:noFill/>
+          <a:ln/>
+        </p:spPr>
+        <p:txBody>
+          <a:bodyPr wrap="square" lIns="0" tIns="0" rIns="0" bIns="0" rtlCol="0" anchor="ctr"/>
+          <a:lstStyle/>
+          <a:p>
+            <a:pPr algn="l" indent="0" marL="0">
+              <a:lnSpc>
+                <a:spcPct val="120000"/>
+              </a:lnSpc>
+              <a:buNone/>
+            </a:pPr>
+            <a:r>
+              <a:rPr lang="en-US" sz="1500" b="1" dirty="0">
+                <a:solidFill>
+                  <a:srgbClr val="1F2937"/>
+                </a:solidFill>
+                <a:latin typeface="Meiryo" pitchFamily="34" charset="0"/>
+                <a:ea typeface="Meiryo" pitchFamily="34" charset="-122"/>
+                <a:cs typeface="Meiryo" pitchFamily="34" charset="-120"/>
+              </a:rPr>
+              <a:t>人数を減らして取り直していただく</a:t>
+            </a:r>
+            <a:endParaRPr lang="en-US" sz="1500" dirty="0"/>
+          </a:p>
+          <a:p>
+            <a:pPr algn="l" indent="0" marL="0">
+              <a:lnSpc>
+                <a:spcPct val="120000"/>
+              </a:lnSpc>
+              <a:buNone/>
+            </a:pPr>
+            <a:r>
+              <a:rPr lang="en-US" sz="1250" dirty="0">
+                <a:solidFill>
+                  <a:srgbClr val="5B6472"/>
+                </a:solidFill>
+                <a:latin typeface="Meiryo" pitchFamily="34" charset="0"/>
+                <a:ea typeface="Meiryo" pitchFamily="34" charset="-122"/>
+                <a:cs typeface="Meiryo" pitchFamily="34" charset="-120"/>
+              </a:rPr>
+              <a:t>3 名のうち 2 名なら参加できる、と言われたとき。待ち順が最初からになる点に注意が必要です</a:t>
+            </a:r>
+            <a:endParaRPr lang="en-US" sz="1500" dirty="0"/>
+          </a:p>
+        </p:txBody>
+      </p:sp>
+      <p:sp>
+        <p:nvSpPr>
+          <p:cNvPr id="24" name="Shape 22"/>
+          <p:cNvSpPr/>
+          <p:nvPr/>
+        </p:nvSpPr>
+        <p:spPr>
+          <a:xfrm>
+            <a:off x="640080" y="4846320"/>
+            <a:ext cx="10927080" cy="749808"/>
+          </a:xfrm>
+          <a:prstGeom prst="roundRect">
+            <a:avLst>
+              <a:gd name="adj" fmla="val 7317"/>
+            </a:avLst>
+          </a:prstGeom>
+          <a:solidFill>
+            <a:srgbClr val="F4F7FC"/>
+          </a:solidFill>
+          <a:ln w="12700">
+            <a:solidFill>
+              <a:srgbClr val="C7D2E4"/>
+            </a:solidFill>
+            <a:prstDash val="solid"/>
+          </a:ln>
+        </p:spPr>
+      </p:sp>
+      <p:sp>
+        <p:nvSpPr>
+          <p:cNvPr id="25" name="Shape 23"/>
+          <p:cNvSpPr/>
+          <p:nvPr/>
+        </p:nvSpPr>
+        <p:spPr>
+          <a:xfrm>
+            <a:off x="804672" y="5010912"/>
+            <a:ext cx="420624" cy="420624"/>
+          </a:xfrm>
+          <a:prstGeom prst="ellipse">
+            <a:avLst/>
+          </a:prstGeom>
+          <a:solidFill>
+            <a:srgbClr val="1E2761"/>
+          </a:solidFill>
+          <a:ln/>
+        </p:spPr>
+      </p:sp>
+      <p:sp>
+        <p:nvSpPr>
+          <p:cNvPr id="26" name="Text 24"/>
+          <p:cNvSpPr txBox="1"/>
+          <p:nvPr/>
+        </p:nvSpPr>
+        <p:spPr>
+          <a:xfrm>
+            <a:off x="804672" y="5010912"/>
+            <a:ext cx="420624" cy="420624"/>
+          </a:xfrm>
+          <a:prstGeom prst="rect">
+            <a:avLst/>
+          </a:prstGeom>
+          <a:noFill/>
+          <a:ln/>
+        </p:spPr>
+        <p:txBody>
+          <a:bodyPr wrap="square" rtlCol="0" anchor="ctr"/>
+          <a:lstStyle/>
+          <a:p>
+            <a:pPr algn="ctr" indent="0" marL="0">
+              <a:buNone/>
+            </a:pPr>
+            <a:r>
+              <a:rPr lang="en-US" sz="1400" b="1" dirty="0">
+                <a:solidFill>
+                  <a:srgbClr val="FFFFFF"/>
+                </a:solidFill>
+                <a:latin typeface="Meiryo" pitchFamily="34" charset="0"/>
+                <a:ea typeface="Meiryo" pitchFamily="34" charset="-122"/>
+                <a:cs typeface="Meiryo" pitchFamily="34" charset="-120"/>
+              </a:rPr>
+              <a:t>E</a:t>
+            </a:r>
+            <a:endParaRPr lang="en-US" sz="1400" dirty="0"/>
+          </a:p>
+        </p:txBody>
+      </p:sp>
+      <p:sp>
+        <p:nvSpPr>
+          <p:cNvPr id="27" name="Text 25"/>
+          <p:cNvSpPr txBox="1"/>
+          <p:nvPr/>
+        </p:nvSpPr>
+        <p:spPr>
+          <a:xfrm>
+            <a:off x="1389888" y="4901184"/>
+            <a:ext cx="10012680" cy="640080"/>
+          </a:xfrm>
+          <a:prstGeom prst="rect">
+            <a:avLst/>
+          </a:prstGeom>
+          <a:noFill/>
+          <a:ln/>
+        </p:spPr>
+        <p:txBody>
+          <a:bodyPr wrap="square" lIns="0" tIns="0" rIns="0" bIns="0" rtlCol="0" anchor="ctr"/>
+          <a:lstStyle/>
+          <a:p>
+            <a:pPr algn="l" indent="0" marL="0">
+              <a:lnSpc>
+                <a:spcPct val="120000"/>
+              </a:lnSpc>
+              <a:buNone/>
+            </a:pPr>
+            <a:r>
+              <a:rPr lang="en-US" sz="1500" b="1" dirty="0">
+                <a:solidFill>
+                  <a:srgbClr val="1F2937"/>
+                </a:solidFill>
+                <a:latin typeface="Meiryo" pitchFamily="34" charset="0"/>
+                <a:ea typeface="Meiryo" pitchFamily="34" charset="-122"/>
+                <a:cs typeface="Meiryo" pitchFamily="34" charset="-120"/>
+              </a:rPr>
+              <a:t>別の回に振り替えていただく</a:t>
+            </a:r>
+            <a:endParaRPr lang="en-US" sz="1500" dirty="0"/>
+          </a:p>
+          <a:p>
+            <a:pPr algn="l" indent="0" marL="0">
+              <a:lnSpc>
+                <a:spcPct val="120000"/>
+              </a:lnSpc>
+              <a:buNone/>
+            </a:pPr>
+            <a:r>
+              <a:rPr lang="en-US" sz="1250" dirty="0">
+                <a:solidFill>
+                  <a:srgbClr val="5B6472"/>
+                </a:solidFill>
+                <a:latin typeface="Meiryo" pitchFamily="34" charset="0"/>
+                <a:ea typeface="Meiryo" pitchFamily="34" charset="-122"/>
+                <a:cs typeface="Meiryo" pitchFamily="34" charset="-120"/>
+              </a:rPr>
+              <a:t>空きのある別の回があるとき。これもキャンセル → 取り直しになります</a:t>
+            </a:r>
+            <a:endParaRPr lang="en-US" sz="1500" dirty="0"/>
+          </a:p>
+        </p:txBody>
+      </p:sp>
+      <p:sp>
+        <p:nvSpPr>
+          <p:cNvPr id="28" name="Shape 26"/>
+          <p:cNvSpPr/>
+          <p:nvPr/>
+        </p:nvSpPr>
+        <p:spPr>
+          <a:xfrm>
+            <a:off x="640080" y="5779008"/>
+            <a:ext cx="10927080" cy="512064"/>
+          </a:xfrm>
+          <a:prstGeom prst="roundRect">
+            <a:avLst>
+              <a:gd name="adj" fmla="val 14286"/>
             </a:avLst>
           </a:prstGeom>
           <a:solidFill>
@@ -12494,14 +13536,14 @@
       </p:sp>
       <p:sp>
         <p:nvSpPr>
-          <p:cNvPr id="12" name="Text 9"/>
-          <p:cNvSpPr txBox="1"/>
-          <p:nvPr/>
-        </p:nvSpPr>
-        <p:spPr>
-          <a:xfrm>
-            <a:off x="7607808" y="3081528"/>
-            <a:ext cx="3758184" cy="1152144"/>
+          <p:cNvPr id="29" name="Text 27"/>
+          <p:cNvSpPr txBox="1"/>
+          <p:nvPr/>
+        </p:nvSpPr>
+        <p:spPr>
+          <a:xfrm>
+            <a:off x="841248" y="5888736"/>
+            <a:ext cx="10524744" cy="292608"/>
           </a:xfrm>
           <a:prstGeom prst="rect">
             <a:avLst/>
@@ -12520,7 +13562,7 @@
               <a:buNone/>
             </a:pPr>
             <a:r>
-              <a:rPr lang="en-US" sz="1500" b="1" dirty="0">
+              <a:rPr lang="en-US" sz="1350" b="1" dirty="0">
                 <a:solidFill>
                   <a:srgbClr val="1E2761"/>
                 </a:solidFill>
@@ -12528,178 +13570,9 @@
                 <a:ea typeface="Meiryo" pitchFamily="34" charset="-122"/>
                 <a:cs typeface="Meiryo" pitchFamily="34" charset="-120"/>
               </a:rPr>
-              <a:t>定員は減らせないことがあります</a:t>
-            </a:r>
-            <a:endParaRPr lang="en-US" sz="1500" dirty="0"/>
-          </a:p>
-          <a:p>
-            <a:pPr algn="l" indent="0" marL="0">
-              <a:lnSpc>
-                <a:spcPct val="125000"/>
-              </a:lnSpc>
-              <a:buNone/>
-            </a:pPr>
-            <a:r>
-              <a:rPr lang="en-US" sz="1250" dirty="0">
-                <a:solidFill>
-                  <a:srgbClr val="1E2761"/>
-                </a:solidFill>
-                <a:latin typeface="Meiryo" pitchFamily="34" charset="0"/>
-                <a:ea typeface="Meiryo" pitchFamily="34" charset="-122"/>
-                <a:cs typeface="Meiryo" pitchFamily="34" charset="-120"/>
-              </a:rPr>
-              <a:t>現在の確定席数より小さくはできません。</a:t>
-            </a:r>
-            <a:endParaRPr lang="en-US" sz="1500" dirty="0"/>
-          </a:p>
-          <a:p>
-            <a:pPr algn="l" indent="0" marL="0">
-              <a:lnSpc>
-                <a:spcPct val="125000"/>
-              </a:lnSpc>
-              <a:buNone/>
-            </a:pPr>
-            <a:r>
-              <a:rPr lang="en-US" sz="1250" dirty="0">
-                <a:solidFill>
-                  <a:srgbClr val="1E2761"/>
-                </a:solidFill>
-                <a:latin typeface="Meiryo" pitchFamily="34" charset="0"/>
-                <a:ea typeface="Meiryo" pitchFamily="34" charset="-122"/>
-                <a:cs typeface="Meiryo" pitchFamily="34" charset="-120"/>
-              </a:rPr>
-              <a:t>先にキャンセルか繰り上げが必要です。</a:t>
-            </a:r>
-            <a:endParaRPr lang="en-US" sz="1500" dirty="0"/>
-          </a:p>
-        </p:txBody>
-      </p:sp>
-      <p:sp>
-        <p:nvSpPr>
-          <p:cNvPr id="13" name="Shape 10"/>
-          <p:cNvSpPr/>
-          <p:nvPr/>
-        </p:nvSpPr>
-        <p:spPr>
-          <a:xfrm>
-            <a:off x="7406640" y="4480560"/>
-            <a:ext cx="4160520" cy="1508760"/>
-          </a:xfrm>
-          <a:prstGeom prst="roundRect">
-            <a:avLst>
-              <a:gd name="adj" fmla="val 4848"/>
-            </a:avLst>
-          </a:prstGeom>
-          <a:solidFill>
-            <a:srgbClr val="ECFDF5"/>
-          </a:solidFill>
-          <a:ln w="12700">
-            <a:solidFill>
-              <a:srgbClr val="ECFDF5"/>
-            </a:solidFill>
-            <a:prstDash val="solid"/>
-          </a:ln>
-        </p:spPr>
-      </p:sp>
-      <p:sp>
-        <p:nvSpPr>
-          <p:cNvPr id="14" name="Text 11"/>
-          <p:cNvSpPr txBox="1"/>
-          <p:nvPr/>
-        </p:nvSpPr>
-        <p:spPr>
-          <a:xfrm>
-            <a:off x="7607808" y="4590288"/>
-            <a:ext cx="3758184" cy="1289304"/>
-          </a:xfrm>
-          <a:prstGeom prst="rect">
-            <a:avLst/>
-          </a:prstGeom>
-          <a:noFill/>
-          <a:ln/>
-        </p:spPr>
-        <p:txBody>
-          <a:bodyPr wrap="square" lIns="0" tIns="0" rIns="0" bIns="0" rtlCol="0" anchor="ctr"/>
-          <a:lstStyle/>
-          <a:p>
-            <a:pPr algn="l" indent="0" marL="0">
-              <a:lnSpc>
-                <a:spcPct val="125000"/>
-              </a:lnSpc>
-              <a:buNone/>
-            </a:pPr>
-            <a:r>
-              <a:rPr lang="en-US" sz="1500" b="1" dirty="0">
-                <a:solidFill>
-                  <a:srgbClr val="15803D"/>
-                </a:solidFill>
-                <a:latin typeface="Meiryo" pitchFamily="34" charset="0"/>
-                <a:ea typeface="Meiryo" pitchFamily="34" charset="-122"/>
-                <a:cs typeface="Meiryo" pitchFamily="34" charset="-120"/>
-              </a:rPr>
-              <a:t>先に埋められる心配はありません</a:t>
-            </a:r>
-            <a:endParaRPr lang="en-US" sz="1500" dirty="0"/>
-          </a:p>
-          <a:p>
-            <a:pPr algn="l" indent="0" marL="0">
-              <a:lnSpc>
-                <a:spcPct val="125000"/>
-              </a:lnSpc>
-              <a:buNone/>
-            </a:pPr>
-            <a:r>
-              <a:rPr lang="en-US" sz="1250" dirty="0">
-                <a:solidFill>
-                  <a:srgbClr val="15803D"/>
-                </a:solidFill>
-                <a:latin typeface="Meiryo" pitchFamily="34" charset="0"/>
-                <a:ea typeface="Meiryo" pitchFamily="34" charset="-122"/>
-                <a:cs typeface="Meiryo" pitchFamily="34" charset="-120"/>
-              </a:rPr>
-              <a:t>お待ちの方がいる間、公開側は</a:t>
-            </a:r>
-            <a:endParaRPr lang="en-US" sz="1500" dirty="0"/>
-          </a:p>
-          <a:p>
-            <a:pPr algn="l" indent="0" marL="0">
-              <a:lnSpc>
-                <a:spcPct val="125000"/>
-              </a:lnSpc>
-              <a:buNone/>
-            </a:pPr>
-            <a:r>
-              <a:rPr lang="en-US" sz="1250" dirty="0">
-                <a:solidFill>
-                  <a:srgbClr val="15803D"/>
-                </a:solidFill>
-                <a:latin typeface="Meiryo" pitchFamily="34" charset="0"/>
-                <a:ea typeface="Meiryo" pitchFamily="34" charset="-122"/>
-                <a:cs typeface="Meiryo" pitchFamily="34" charset="-120"/>
-              </a:rPr>
-              <a:t>「キャンセル待ち」のままです。</a:t>
-            </a:r>
-            <a:endParaRPr lang="en-US" sz="1500" dirty="0"/>
-          </a:p>
-          <a:p>
-            <a:pPr algn="l" indent="0" marL="0">
-              <a:lnSpc>
-                <a:spcPct val="125000"/>
-              </a:lnSpc>
-              <a:buNone/>
-            </a:pPr>
-            <a:r>
-              <a:rPr lang="en-US" sz="1250" dirty="0">
-                <a:solidFill>
-                  <a:srgbClr val="15803D"/>
-                </a:solidFill>
-                <a:latin typeface="Meiryo" pitchFamily="34" charset="0"/>
-                <a:ea typeface="Meiryo" pitchFamily="34" charset="-122"/>
-                <a:cs typeface="Meiryo" pitchFamily="34" charset="-120"/>
-              </a:rPr>
-              <a:t>落ち着いて繰り上げてください。</a:t>
-            </a:r>
-            <a:endParaRPr lang="en-US" sz="1500" dirty="0"/>
+              <a:t>判断に迷ったら事務局にご相談ください。</a:t>
+            </a:r>
+            <a:endParaRPr lang="en-US" sz="1350" dirty="0"/>
           </a:p>
         </p:txBody>
       </p:sp>
